--- a/espaces/intelligence-academy/seances/laurence-saulais/laurence-saulais-s1-fondamentaux.pptx
+++ b/espaces/intelligence-academy/seances/laurence-saulais/laurence-saulais-s1-fondamentaux.pptx
@@ -62,6 +62,10 @@
     <p:sldId id="310" r:id="rId61"/>
     <p:sldId id="311" r:id="rId62"/>
     <p:sldId id="312" r:id="rId63"/>
+    <p:sldId id="313" r:id="rId64"/>
+    <p:sldId id="314" r:id="rId65"/>
+    <p:sldId id="315" r:id="rId66"/>
+    <p:sldId id="316" r:id="rId67"/>
   </p:sldIdLst>
   <p:sldSz cx="12191695" cy="6858000" type="screen4x3"/>
   <p:notesSz cx="6858000" cy="9144000"/>
@@ -7156,7 +7160,7 @@
                 </a:solidFill>
                 <a:latin typeface="Bricolage Grotesque"/>
               </a:rPr>
-              <a:t>Vos exercices du e-learning</a:t>
+              <a:t>Votre exercice retrouvé</a:t>
             </a:r>
           </a:p>
         </p:txBody>
@@ -7191,7 +7195,7 @@
                 </a:solidFill>
                 <a:latin typeface="Bricolage Grotesque"/>
               </a:rPr>
-              <a:t>« Spécifiquement pour toi » : on les fait ensemble</a:t>
+              <a:t>« Structurer une synthèse médico-sociale complexe »</a:t>
             </a:r>
           </a:p>
         </p:txBody>
@@ -7225,41 +7229,7 @@
                 </a:solidFill>
                 <a:latin typeface="Bricolage Grotesque"/>
               </a:rPr>
-              <a:t>Ouvrez à l'écran l'exercice qui vous a bloquée.</a:t>
-            </a:r>
-          </a:p>
-        </p:txBody>
-      </p:sp>
-      <p:sp>
-        <p:nvSpPr>
-          <p:cNvPr id="7" name="TextBox 6"/>
-          <p:cNvSpPr txBox="1"/>
-          <p:nvPr/>
-        </p:nvSpPr>
-        <p:spPr>
-          <a:xfrm>
-            <a:off x="640080" y="2852928"/>
-            <a:ext cx="10881360" cy="411480"/>
-          </a:xfrm>
-          <a:prstGeom prst="rect">
-            <a:avLst/>
-          </a:prstGeom>
-          <a:noFill/>
-        </p:spPr>
-        <p:txBody>
-          <a:bodyPr wrap="square">
-            <a:spAutoFit/>
-          </a:bodyPr>
-          <a:lstStyle/>
-          <a:p>
-            <a:r>
-              <a:rPr sz="2000" b="0">
-                <a:solidFill>
-                  <a:srgbClr val="333333"/>
-                </a:solidFill>
-                <a:latin typeface="Bricolage Grotesque"/>
-              </a:rPr>
-              <a:t>On lit la consigne, vous le faites, je reprends la main si besoin.</a:t>
+              <a:t>Vous aviez raison : la demande n'est pas claire. Cherchons pourquoi.</a:t>
             </a:r>
           </a:p>
         </p:txBody>
@@ -7406,7 +7376,7 @@
                 </a:solidFill>
                 <a:latin typeface="Bricolage Grotesque"/>
               </a:rPr>
-              <a:t>Vos exercices du e-learning</a:t>
+              <a:t>Votre exercice retrouvé</a:t>
             </a:r>
           </a:p>
         </p:txBody>
@@ -7441,7 +7411,7 @@
                 </a:solidFill>
                 <a:latin typeface="Bricolage Grotesque"/>
               </a:rPr>
-              <a:t>« Spécifiquement pour toi » : on les fait ensemble</a:t>
+              <a:t>« Structurer une synthèse médico-sociale complexe »</a:t>
             </a:r>
           </a:p>
         </p:txBody>
@@ -7475,7 +7445,7 @@
                 </a:solidFill>
                 <a:latin typeface="Bricolage Grotesque"/>
               </a:rPr>
-              <a:t>Ouvrez à l'écran l'exercice qui vous a bloquée.</a:t>
+              <a:t>Vous aviez raison : la demande n'est pas claire. Cherchons pourquoi.</a:t>
             </a:r>
           </a:p>
         </p:txBody>
@@ -7488,7 +7458,7 @@
         </p:nvSpPr>
         <p:spPr>
           <a:xfrm>
-            <a:off x="640080" y="2852928"/>
+            <a:off x="640080" y="3090672"/>
             <a:ext cx="10881360" cy="411480"/>
           </a:xfrm>
           <a:prstGeom prst="rect">
@@ -7503,13 +7473,13 @@
           <a:lstStyle/>
           <a:p>
             <a:r>
-              <a:rPr sz="2000" b="0">
-                <a:solidFill>
-                  <a:srgbClr val="333333"/>
-                </a:solidFill>
-                <a:latin typeface="Bricolage Grotesque"/>
-              </a:rPr>
-              <a:t>On lit la consigne, vous le faites, je reprends la main si besoin.</a:t>
+              <a:rPr sz="2000" b="1">
+                <a:solidFill>
+                  <a:srgbClr val="1B5E6B"/>
+                </a:solidFill>
+                <a:latin typeface="Bricolage Grotesque"/>
+              </a:rPr>
+              <a:t>Pas de consigne : c'est un prompt à coller dans ChatGPT, rien ne le dit.</a:t>
             </a:r>
           </a:p>
         </p:txBody>
@@ -7543,7 +7513,7 @@
                 </a:solidFill>
                 <a:latin typeface="Bricolage Grotesque"/>
               </a:rPr>
-              <a:t>Ce qu'on en retient : comment aborder seule les suivants.</a:t>
+              <a:t>Il demande vos notes réelles sur un usager : jamais, on l'a vu.</a:t>
             </a:r>
           </a:p>
         </p:txBody>
@@ -7575,17 +7545,25 @@
         <p:spPr>
           <a:xfrm>
             <a:off x="0" y="0"/>
-            <a:ext cx="12191695" cy="6858000"/>
-          </a:xfrm>
-          <a:prstGeom prst="rect">
-            <a:avLst/>
-          </a:prstGeom>
-          <a:solidFill>
-            <a:srgbClr val="0F2B3A"/>
-          </a:solidFill>
+            <a:ext cx="12191695" cy="1143000"/>
+          </a:xfrm>
+          <a:prstGeom prst="rect">
+            <a:avLst/>
+          </a:prstGeom>
           <a:ln>
             <a:noFill/>
           </a:ln>
+          <a:gradFill>
+            <a:gsLst>
+              <a:gs pos="0">
+                <a:srgbClr val="0A2530"/>
+              </a:gs>
+              <a:gs pos="100000">
+                <a:srgbClr val="1E5565"/>
+              </a:gs>
+            </a:gsLst>
+            <a:lin ang="0" scaled="1"/>
+          </a:gradFill>
         </p:spPr>
         <p:style>
           <a:lnRef idx="1">
@@ -7617,8 +7595,8 @@
         </p:nvSpPr>
         <p:spPr>
           <a:xfrm>
-            <a:off x="640080" y="1965960"/>
-            <a:ext cx="2743200" cy="36576"/>
+            <a:off x="0" y="1143000"/>
+            <a:ext cx="12191695" cy="18288"/>
           </a:xfrm>
           <a:prstGeom prst="rect">
             <a:avLst/>
@@ -7660,8 +7638,8 @@
         </p:nvSpPr>
         <p:spPr>
           <a:xfrm>
-            <a:off x="640080" y="1371600"/>
-            <a:ext cx="10515600" cy="731520"/>
+            <a:off x="640080" y="182880"/>
+            <a:ext cx="10515600" cy="822960"/>
           </a:xfrm>
           <a:prstGeom prst="rect">
             <a:avLst/>
@@ -7676,13 +7654,13 @@
           <a:p>
             <a:pPr algn="l"/>
             <a:r>
-              <a:rPr sz="2200" b="1">
-                <a:solidFill>
-                  <a:srgbClr val="E8A000"/>
-                </a:solidFill>
-                <a:latin typeface="Bricolage Grotesque"/>
-              </a:rPr>
-              <a:t>Séquence 2</a:t>
+              <a:rPr sz="3400" b="1">
+                <a:solidFill>
+                  <a:srgbClr val="FFFFFF"/>
+                </a:solidFill>
+                <a:latin typeface="Bricolage Grotesque"/>
+              </a:rPr>
+              <a:t>Votre exercice retrouvé</a:t>
             </a:r>
           </a:p>
         </p:txBody>
@@ -7695,8 +7673,8 @@
         </p:nvSpPr>
         <p:spPr>
           <a:xfrm>
-            <a:off x="640080" y="2286000"/>
-            <a:ext cx="10698480" cy="1645920"/>
+            <a:off x="640080" y="1463040"/>
+            <a:ext cx="10515600" cy="640080"/>
           </a:xfrm>
           <a:prstGeom prst="rect">
             <a:avLst/>
@@ -7711,13 +7689,13 @@
           <a:p>
             <a:pPr algn="l"/>
             <a:r>
-              <a:rPr sz="4200" b="1">
-                <a:solidFill>
-                  <a:srgbClr val="FFFFFF"/>
-                </a:solidFill>
-                <a:latin typeface="Bricolage Grotesque"/>
-              </a:rPr>
-              <a:t>Les fondamentaux</a:t>
+              <a:rPr sz="2600" b="1">
+                <a:solidFill>
+                  <a:srgbClr val="1A1A1A"/>
+                </a:solidFill>
+                <a:latin typeface="Bricolage Grotesque"/>
+              </a:rPr>
+              <a:t>« Structurer une synthèse médico-sociale complexe »</a:t>
             </a:r>
           </a:p>
         </p:txBody>
@@ -7730,57 +7708,66 @@
         </p:nvSpPr>
         <p:spPr>
           <a:xfrm>
-            <a:off x="640080" y="4023360"/>
-            <a:ext cx="10515600" cy="731520"/>
-          </a:xfrm>
-          <a:prstGeom prst="rect">
-            <a:avLst/>
-          </a:prstGeom>
-          <a:noFill/>
-        </p:spPr>
-        <p:txBody>
-          <a:bodyPr wrap="square">
-            <a:spAutoFit/>
-          </a:bodyPr>
-          <a:lstStyle/>
-          <a:p>
-            <a:pPr algn="l"/>
+            <a:off x="640080" y="2331720"/>
+            <a:ext cx="10881360" cy="411480"/>
+          </a:xfrm>
+          <a:prstGeom prst="rect">
+            <a:avLst/>
+          </a:prstGeom>
+          <a:noFill/>
+        </p:spPr>
+        <p:txBody>
+          <a:bodyPr wrap="square">
+            <a:spAutoFit/>
+          </a:bodyPr>
+          <a:lstStyle/>
+          <a:p>
             <a:r>
               <a:rPr sz="2000" b="0">
                 <a:solidFill>
-                  <a:srgbClr val="5A8A8F"/>
-                </a:solidFill>
-                <a:latin typeface="Bricolage Grotesque"/>
-              </a:rPr>
-              <a:t>Ce que la séance ajoute au e-learning</a:t>
-            </a:r>
-          </a:p>
-        </p:txBody>
-      </p:sp>
-      <p:pic>
-        <p:nvPicPr>
-          <p:cNvPr id="7" name="Picture 6" descr="ia-round.png"/>
-          <p:cNvPicPr>
-            <a:picLocks noChangeAspect="1"/>
-          </p:cNvPicPr>
-          <p:nvPr/>
-        </p:nvPicPr>
-        <p:blipFill>
-          <a:blip r:embed="rId2"/>
-          <a:stretch>
-            <a:fillRect/>
-          </a:stretch>
-        </p:blipFill>
-        <p:spPr>
-          <a:xfrm>
-            <a:off x="457200" y="6217920"/>
-            <a:ext cx="320040" cy="320040"/>
-          </a:xfrm>
-          <a:prstGeom prst="rect">
-            <a:avLst/>
-          </a:prstGeom>
-        </p:spPr>
-      </p:pic>
+                  <a:srgbClr val="333333"/>
+                </a:solidFill>
+                <a:latin typeface="Bricolage Grotesque"/>
+              </a:rPr>
+              <a:t>Vous aviez raison : la demande n'est pas claire. Cherchons pourquoi.</a:t>
+            </a:r>
+          </a:p>
+        </p:txBody>
+      </p:sp>
+      <p:sp>
+        <p:nvSpPr>
+          <p:cNvPr id="7" name="TextBox 6"/>
+          <p:cNvSpPr txBox="1"/>
+          <p:nvPr/>
+        </p:nvSpPr>
+        <p:spPr>
+          <a:xfrm>
+            <a:off x="640080" y="3090672"/>
+            <a:ext cx="10881360" cy="411480"/>
+          </a:xfrm>
+          <a:prstGeom prst="rect">
+            <a:avLst/>
+          </a:prstGeom>
+          <a:noFill/>
+        </p:spPr>
+        <p:txBody>
+          <a:bodyPr wrap="square">
+            <a:spAutoFit/>
+          </a:bodyPr>
+          <a:lstStyle/>
+          <a:p>
+            <a:r>
+              <a:rPr sz="2000" b="1">
+                <a:solidFill>
+                  <a:srgbClr val="1B5E6B"/>
+                </a:solidFill>
+                <a:latin typeface="Bricolage Grotesque"/>
+              </a:rPr>
+              <a:t>Pas de consigne : c'est un prompt à coller dans ChatGPT, rien ne le dit.</a:t>
+            </a:r>
+          </a:p>
+        </p:txBody>
+      </p:sp>
       <p:sp>
         <p:nvSpPr>
           <p:cNvPr id="8" name="TextBox 7"/>
@@ -7789,29 +7776,96 @@
         </p:nvSpPr>
         <p:spPr>
           <a:xfrm>
-            <a:off x="868680" y="6199632"/>
-            <a:ext cx="3657600" cy="365760"/>
-          </a:xfrm>
-          <a:prstGeom prst="rect">
-            <a:avLst/>
-          </a:prstGeom>
-          <a:noFill/>
-        </p:spPr>
-        <p:txBody>
-          <a:bodyPr wrap="square">
-            <a:spAutoFit/>
-          </a:bodyPr>
-          <a:lstStyle/>
-          <a:p>
-            <a:pPr algn="l"/>
-            <a:r>
-              <a:rPr sz="1400" b="0">
-                <a:solidFill>
-                  <a:srgbClr val="FFFFFF"/>
-                </a:solidFill>
-                <a:latin typeface="Bricolage Grotesque"/>
-              </a:rPr>
-              <a:t>intelligence academy</a:t>
+            <a:off x="640080" y="3611880"/>
+            <a:ext cx="10881360" cy="411480"/>
+          </a:xfrm>
+          <a:prstGeom prst="rect">
+            <a:avLst/>
+          </a:prstGeom>
+          <a:noFill/>
+        </p:spPr>
+        <p:txBody>
+          <a:bodyPr wrap="square">
+            <a:spAutoFit/>
+          </a:bodyPr>
+          <a:lstStyle/>
+          <a:p>
+            <a:r>
+              <a:rPr sz="2000" b="1">
+                <a:solidFill>
+                  <a:srgbClr val="1B5E6B"/>
+                </a:solidFill>
+                <a:latin typeface="Bricolage Grotesque"/>
+              </a:rPr>
+              <a:t>Il demande vos notes réelles sur un usager : jamais, on l'a vu.</a:t>
+            </a:r>
+          </a:p>
+        </p:txBody>
+      </p:sp>
+      <p:sp>
+        <p:nvSpPr>
+          <p:cNvPr id="9" name="TextBox 8"/>
+          <p:cNvSpPr txBox="1"/>
+          <p:nvPr/>
+        </p:nvSpPr>
+        <p:spPr>
+          <a:xfrm>
+            <a:off x="640080" y="4370832"/>
+            <a:ext cx="10881360" cy="411480"/>
+          </a:xfrm>
+          <a:prstGeom prst="rect">
+            <a:avLst/>
+          </a:prstGeom>
+          <a:noFill/>
+        </p:spPr>
+        <p:txBody>
+          <a:bodyPr wrap="square">
+            <a:spAutoFit/>
+          </a:bodyPr>
+          <a:lstStyle/>
+          <a:p>
+            <a:r>
+              <a:rPr sz="2000" b="1">
+                <a:solidFill>
+                  <a:srgbClr val="1B5E6B"/>
+                </a:solidFill>
+                <a:latin typeface="Bricolage Grotesque"/>
+              </a:rPr>
+              <a:t>« Utilise GPT-4o » : un prompt ne choisit pas le modèle, l'interface oui.</a:t>
+            </a:r>
+          </a:p>
+        </p:txBody>
+      </p:sp>
+      <p:sp>
+        <p:nvSpPr>
+          <p:cNvPr id="10" name="TextBox 9"/>
+          <p:cNvSpPr txBox="1"/>
+          <p:nvPr/>
+        </p:nvSpPr>
+        <p:spPr>
+          <a:xfrm>
+            <a:off x="640080" y="4892040"/>
+            <a:ext cx="10881360" cy="411480"/>
+          </a:xfrm>
+          <a:prstGeom prst="rect">
+            <a:avLst/>
+          </a:prstGeom>
+          <a:noFill/>
+        </p:spPr>
+        <p:txBody>
+          <a:bodyPr wrap="square">
+            <a:spAutoFit/>
+          </a:bodyPr>
+          <a:lstStyle/>
+          <a:p>
+            <a:r>
+              <a:rPr sz="2000" b="1">
+                <a:solidFill>
+                  <a:srgbClr val="1B5E6B"/>
+                </a:solidFill>
+                <a:latin typeface="Bricolage Grotesque"/>
+              </a:rPr>
+              <a:t>« La méthode de l'Intelligence Academy » : jamais définie.</a:t>
             </a:r>
           </a:p>
         </p:txBody>
@@ -7843,25 +7897,17 @@
         <p:spPr>
           <a:xfrm>
             <a:off x="0" y="0"/>
-            <a:ext cx="12191695" cy="1143000"/>
-          </a:xfrm>
-          <a:prstGeom prst="rect">
-            <a:avLst/>
-          </a:prstGeom>
+            <a:ext cx="12191695" cy="6858000"/>
+          </a:xfrm>
+          <a:prstGeom prst="rect">
+            <a:avLst/>
+          </a:prstGeom>
+          <a:solidFill>
+            <a:srgbClr val="0F2B3A"/>
+          </a:solidFill>
           <a:ln>
             <a:noFill/>
           </a:ln>
-          <a:gradFill>
-            <a:gsLst>
-              <a:gs pos="0">
-                <a:srgbClr val="0A2530"/>
-              </a:gs>
-              <a:gs pos="100000">
-                <a:srgbClr val="1E5565"/>
-              </a:gs>
-            </a:gsLst>
-            <a:lin ang="0" scaled="1"/>
-          </a:gradFill>
         </p:spPr>
         <p:style>
           <a:lnRef idx="1">
@@ -7893,8 +7939,8 @@
         </p:nvSpPr>
         <p:spPr>
           <a:xfrm>
-            <a:off x="0" y="1143000"/>
-            <a:ext cx="12191695" cy="18288"/>
+            <a:off x="640080" y="1965960"/>
+            <a:ext cx="2743200" cy="36576"/>
           </a:xfrm>
           <a:prstGeom prst="rect">
             <a:avLst/>
@@ -7936,8 +7982,8 @@
         </p:nvSpPr>
         <p:spPr>
           <a:xfrm>
-            <a:off x="640080" y="182880"/>
-            <a:ext cx="10515600" cy="822960"/>
+            <a:off x="640080" y="1371600"/>
+            <a:ext cx="10515600" cy="731520"/>
           </a:xfrm>
           <a:prstGeom prst="rect">
             <a:avLst/>
@@ -7952,27 +7998,62 @@
           <a:p>
             <a:pPr algn="l"/>
             <a:r>
-              <a:rPr sz="3400" b="1">
+              <a:rPr sz="2200" b="1">
+                <a:solidFill>
+                  <a:srgbClr val="E8A000"/>
+                </a:solidFill>
+                <a:latin typeface="Bricolage Grotesque"/>
+              </a:rPr>
+              <a:t>Séquence 2</a:t>
+            </a:r>
+          </a:p>
+        </p:txBody>
+      </p:sp>
+      <p:sp>
+        <p:nvSpPr>
+          <p:cNvPr id="5" name="TextBox 4"/>
+          <p:cNvSpPr txBox="1"/>
+          <p:nvPr/>
+        </p:nvSpPr>
+        <p:spPr>
+          <a:xfrm>
+            <a:off x="640080" y="2286000"/>
+            <a:ext cx="10698480" cy="1645920"/>
+          </a:xfrm>
+          <a:prstGeom prst="rect">
+            <a:avLst/>
+          </a:prstGeom>
+          <a:noFill/>
+        </p:spPr>
+        <p:txBody>
+          <a:bodyPr wrap="square">
+            <a:spAutoFit/>
+          </a:bodyPr>
+          <a:lstStyle/>
+          <a:p>
+            <a:pPr algn="l"/>
+            <a:r>
+              <a:rPr sz="4200" b="1">
                 <a:solidFill>
                   <a:srgbClr val="FFFFFF"/>
                 </a:solidFill>
                 <a:latin typeface="Bricolage Grotesque"/>
               </a:rPr>
-              <a:t>Les mots, avec vos exemples</a:t>
-            </a:r>
-          </a:p>
-        </p:txBody>
-      </p:sp>
-      <p:sp>
-        <p:nvSpPr>
-          <p:cNvPr id="5" name="TextBox 4"/>
-          <p:cNvSpPr txBox="1"/>
-          <p:nvPr/>
-        </p:nvSpPr>
-        <p:spPr>
-          <a:xfrm>
-            <a:off x="640080" y="1463040"/>
-            <a:ext cx="10515600" cy="640080"/>
+              <a:t>Les fondamentaux</a:t>
+            </a:r>
+          </a:p>
+        </p:txBody>
+      </p:sp>
+      <p:sp>
+        <p:nvSpPr>
+          <p:cNvPr id="6" name="TextBox 5"/>
+          <p:cNvSpPr txBox="1"/>
+          <p:nvPr/>
+        </p:nvSpPr>
+        <p:spPr>
+          <a:xfrm>
+            <a:off x="640080" y="4023360"/>
+            <a:ext cx="10515600" cy="731520"/>
           </a:xfrm>
           <a:prstGeom prst="rect">
             <a:avLst/>
@@ -7987,81 +8068,72 @@
           <a:p>
             <a:pPr algn="l"/>
             <a:r>
-              <a:rPr sz="2600" b="1">
-                <a:solidFill>
-                  <a:srgbClr val="1A1A1A"/>
-                </a:solidFill>
-                <a:latin typeface="Bricolage Grotesque"/>
-              </a:rPr>
-              <a:t>Ce qui se cache derrière le vocabulaire</a:t>
-            </a:r>
-          </a:p>
-        </p:txBody>
-      </p:sp>
-      <p:sp>
-        <p:nvSpPr>
-          <p:cNvPr id="6" name="TextBox 5"/>
-          <p:cNvSpPr txBox="1"/>
-          <p:nvPr/>
-        </p:nvSpPr>
-        <p:spPr>
-          <a:xfrm>
-            <a:off x="640080" y="2331720"/>
-            <a:ext cx="10881360" cy="411480"/>
-          </a:xfrm>
-          <a:prstGeom prst="rect">
-            <a:avLst/>
-          </a:prstGeom>
-          <a:noFill/>
-        </p:spPr>
-        <p:txBody>
-          <a:bodyPr wrap="square">
-            <a:spAutoFit/>
-          </a:bodyPr>
-          <a:lstStyle/>
-          <a:p>
-            <a:r>
-              <a:rPr sz="2000" b="1">
-                <a:solidFill>
-                  <a:srgbClr val="1B5E6B"/>
-                </a:solidFill>
-                <a:latin typeface="Bricolage Grotesque"/>
-              </a:rPr>
-              <a:t>IA générative : produit du texte, des images, du son à partir d'une demande.</a:t>
-            </a:r>
-          </a:p>
-        </p:txBody>
-      </p:sp>
-      <p:sp>
-        <p:nvSpPr>
-          <p:cNvPr id="7" name="TextBox 6"/>
-          <p:cNvSpPr txBox="1"/>
-          <p:nvPr/>
-        </p:nvSpPr>
-        <p:spPr>
-          <a:xfrm>
-            <a:off x="640080" y="2852928"/>
-            <a:ext cx="10881360" cy="411480"/>
-          </a:xfrm>
-          <a:prstGeom prst="rect">
-            <a:avLst/>
-          </a:prstGeom>
-          <a:noFill/>
-        </p:spPr>
-        <p:txBody>
-          <a:bodyPr wrap="square">
-            <a:spAutoFit/>
-          </a:bodyPr>
-          <a:lstStyle/>
-          <a:p>
-            <a:r>
-              <a:rPr sz="2000" b="1">
-                <a:solidFill>
-                  <a:srgbClr val="1B5E6B"/>
-                </a:solidFill>
-                <a:latin typeface="Bricolage Grotesque"/>
-              </a:rPr>
-              <a:t>Modèle : le « moteur » (GPT, Claude, Gemini). L'appli n'est que la vitrine.</a:t>
+              <a:rPr sz="2000" b="0">
+                <a:solidFill>
+                  <a:srgbClr val="5A8A8F"/>
+                </a:solidFill>
+                <a:latin typeface="Bricolage Grotesque"/>
+              </a:rPr>
+              <a:t>Ce que la séance ajoute au e-learning</a:t>
+            </a:r>
+          </a:p>
+        </p:txBody>
+      </p:sp>
+      <p:pic>
+        <p:nvPicPr>
+          <p:cNvPr id="7" name="Picture 6" descr="ia-round.png"/>
+          <p:cNvPicPr>
+            <a:picLocks noChangeAspect="1"/>
+          </p:cNvPicPr>
+          <p:nvPr/>
+        </p:nvPicPr>
+        <p:blipFill>
+          <a:blip r:embed="rId2"/>
+          <a:stretch>
+            <a:fillRect/>
+          </a:stretch>
+        </p:blipFill>
+        <p:spPr>
+          <a:xfrm>
+            <a:off x="457200" y="6217920"/>
+            <a:ext cx="320040" cy="320040"/>
+          </a:xfrm>
+          <a:prstGeom prst="rect">
+            <a:avLst/>
+          </a:prstGeom>
+        </p:spPr>
+      </p:pic>
+      <p:sp>
+        <p:nvSpPr>
+          <p:cNvPr id="8" name="TextBox 7"/>
+          <p:cNvSpPr txBox="1"/>
+          <p:nvPr/>
+        </p:nvSpPr>
+        <p:spPr>
+          <a:xfrm>
+            <a:off x="868680" y="6199632"/>
+            <a:ext cx="3657600" cy="365760"/>
+          </a:xfrm>
+          <a:prstGeom prst="rect">
+            <a:avLst/>
+          </a:prstGeom>
+          <a:noFill/>
+        </p:spPr>
+        <p:txBody>
+          <a:bodyPr wrap="square">
+            <a:spAutoFit/>
+          </a:bodyPr>
+          <a:lstStyle/>
+          <a:p>
+            <a:pPr algn="l"/>
+            <a:r>
+              <a:rPr sz="1400" b="0">
+                <a:solidFill>
+                  <a:srgbClr val="FFFFFF"/>
+                </a:solidFill>
+                <a:latin typeface="Bricolage Grotesque"/>
+              </a:rPr>
+              <a:t>intelligence academy</a:t>
             </a:r>
           </a:p>
         </p:txBody>
@@ -8316,74 +8388,6 @@
           </a:p>
         </p:txBody>
       </p:sp>
-      <p:sp>
-        <p:nvSpPr>
-          <p:cNvPr id="8" name="TextBox 7"/>
-          <p:cNvSpPr txBox="1"/>
-          <p:nvPr/>
-        </p:nvSpPr>
-        <p:spPr>
-          <a:xfrm>
-            <a:off x="640080" y="3611880"/>
-            <a:ext cx="10881360" cy="411480"/>
-          </a:xfrm>
-          <a:prstGeom prst="rect">
-            <a:avLst/>
-          </a:prstGeom>
-          <a:noFill/>
-        </p:spPr>
-        <p:txBody>
-          <a:bodyPr wrap="square">
-            <a:spAutoFit/>
-          </a:bodyPr>
-          <a:lstStyle/>
-          <a:p>
-            <a:r>
-              <a:rPr sz="2000" b="1">
-                <a:solidFill>
-                  <a:srgbClr val="1B5E6B"/>
-                </a:solidFill>
-                <a:latin typeface="Bricolage Grotesque"/>
-              </a:rPr>
-              <a:t>Agent : un modèle qui enchaîne des actions seul (chercher, trier, écrire).</a:t>
-            </a:r>
-          </a:p>
-        </p:txBody>
-      </p:sp>
-      <p:sp>
-        <p:nvSpPr>
-          <p:cNvPr id="9" name="TextBox 8"/>
-          <p:cNvSpPr txBox="1"/>
-          <p:nvPr/>
-        </p:nvSpPr>
-        <p:spPr>
-          <a:xfrm>
-            <a:off x="640080" y="4133088"/>
-            <a:ext cx="10881360" cy="411480"/>
-          </a:xfrm>
-          <a:prstGeom prst="rect">
-            <a:avLst/>
-          </a:prstGeom>
-          <a:noFill/>
-        </p:spPr>
-        <p:txBody>
-          <a:bodyPr wrap="square">
-            <a:spAutoFit/>
-          </a:bodyPr>
-          <a:lstStyle/>
-          <a:p>
-            <a:r>
-              <a:rPr sz="2000" b="0">
-                <a:solidFill>
-                  <a:srgbClr val="333333"/>
-                </a:solidFill>
-                <a:latin typeface="Bricolage Grotesque"/>
-              </a:rPr>
-              <a:t>Ex. : veiller sur les appels à projets et vous en faire la synthèse.</a:t>
-            </a:r>
-          </a:p>
-        </p:txBody>
-      </p:sp>
     </p:spTree>
   </p:cSld>
   <p:clrMapOvr>
@@ -8561,7 +8565,7 @@
                 </a:solidFill>
                 <a:latin typeface="Bricolage Grotesque"/>
               </a:rPr>
-              <a:t>L'hallucination : faux, mais dit avec aplomb</a:t>
+              <a:t>Ce qui se cache derrière le vocabulaire</a:t>
             </a:r>
           </a:p>
         </p:txBody>
@@ -8589,13 +8593,13 @@
           <a:lstStyle/>
           <a:p>
             <a:r>
-              <a:rPr sz="2000" b="0">
-                <a:solidFill>
-                  <a:srgbClr val="333333"/>
-                </a:solidFill>
-                <a:latin typeface="Bricolage Grotesque"/>
-              </a:rPr>
-              <a:t>Votre croisière : une réponse fausse, énoncée avec assurance.</a:t>
+              <a:rPr sz="2000" b="1">
+                <a:solidFill>
+                  <a:srgbClr val="1B5E6B"/>
+                </a:solidFill>
+                <a:latin typeface="Bricolage Grotesque"/>
+              </a:rPr>
+              <a:t>IA générative : produit du texte, des images, du son à partir d'une demande.</a:t>
             </a:r>
           </a:p>
         </p:txBody>
@@ -8623,13 +8627,81 @@
           <a:lstStyle/>
           <a:p>
             <a:r>
+              <a:rPr sz="2000" b="1">
+                <a:solidFill>
+                  <a:srgbClr val="1B5E6B"/>
+                </a:solidFill>
+                <a:latin typeface="Bricolage Grotesque"/>
+              </a:rPr>
+              <a:t>Modèle : le « moteur » (GPT, Claude, Gemini). L'appli n'est que la vitrine.</a:t>
+            </a:r>
+          </a:p>
+        </p:txBody>
+      </p:sp>
+      <p:sp>
+        <p:nvSpPr>
+          <p:cNvPr id="8" name="TextBox 7"/>
+          <p:cNvSpPr txBox="1"/>
+          <p:nvPr/>
+        </p:nvSpPr>
+        <p:spPr>
+          <a:xfrm>
+            <a:off x="640080" y="3611880"/>
+            <a:ext cx="10881360" cy="411480"/>
+          </a:xfrm>
+          <a:prstGeom prst="rect">
+            <a:avLst/>
+          </a:prstGeom>
+          <a:noFill/>
+        </p:spPr>
+        <p:txBody>
+          <a:bodyPr wrap="square">
+            <a:spAutoFit/>
+          </a:bodyPr>
+          <a:lstStyle/>
+          <a:p>
+            <a:r>
+              <a:rPr sz="2000" b="1">
+                <a:solidFill>
+                  <a:srgbClr val="1B5E6B"/>
+                </a:solidFill>
+                <a:latin typeface="Bricolage Grotesque"/>
+              </a:rPr>
+              <a:t>Agent : un modèle qui enchaîne des actions seul (chercher, trier, écrire).</a:t>
+            </a:r>
+          </a:p>
+        </p:txBody>
+      </p:sp>
+      <p:sp>
+        <p:nvSpPr>
+          <p:cNvPr id="9" name="TextBox 8"/>
+          <p:cNvSpPr txBox="1"/>
+          <p:nvPr/>
+        </p:nvSpPr>
+        <p:spPr>
+          <a:xfrm>
+            <a:off x="640080" y="4133088"/>
+            <a:ext cx="10881360" cy="411480"/>
+          </a:xfrm>
+          <a:prstGeom prst="rect">
+            <a:avLst/>
+          </a:prstGeom>
+          <a:noFill/>
+        </p:spPr>
+        <p:txBody>
+          <a:bodyPr wrap="square">
+            <a:spAutoFit/>
+          </a:bodyPr>
+          <a:lstStyle/>
+          <a:p>
+            <a:r>
               <a:rPr sz="2000" b="0">
                 <a:solidFill>
                   <a:srgbClr val="333333"/>
                 </a:solidFill>
                 <a:latin typeface="Bricolage Grotesque"/>
               </a:rPr>
-              <a:t>Le modèle ne ment pas. Il produit toujours une suite, vraie ou non.</a:t>
+              <a:t>Ex. : veiller sur les appels à projets et vous en faire la synthèse.</a:t>
             </a:r>
           </a:p>
         </p:txBody>
@@ -8884,74 +8956,6 @@
           </a:p>
         </p:txBody>
       </p:sp>
-      <p:sp>
-        <p:nvSpPr>
-          <p:cNvPr id="8" name="TextBox 7"/>
-          <p:cNvSpPr txBox="1"/>
-          <p:nvPr/>
-        </p:nvSpPr>
-        <p:spPr>
-          <a:xfrm>
-            <a:off x="640080" y="3611880"/>
-            <a:ext cx="10881360" cy="411480"/>
-          </a:xfrm>
-          <a:prstGeom prst="rect">
-            <a:avLst/>
-          </a:prstGeom>
-          <a:noFill/>
-        </p:spPr>
-        <p:txBody>
-          <a:bodyPr wrap="square">
-            <a:spAutoFit/>
-          </a:bodyPr>
-          <a:lstStyle/>
-          <a:p>
-            <a:r>
-              <a:rPr sz="2000" b="1">
-                <a:solidFill>
-                  <a:srgbClr val="1B5E6B"/>
-                </a:solidFill>
-                <a:latin typeface="Bricolage Grotesque"/>
-              </a:rPr>
-              <a:t>Les parades : vérifier les faits importants, exiger les sources,</a:t>
-            </a:r>
-          </a:p>
-        </p:txBody>
-      </p:sp>
-      <p:sp>
-        <p:nvSpPr>
-          <p:cNvPr id="9" name="TextBox 8"/>
-          <p:cNvSpPr txBox="1"/>
-          <p:nvPr/>
-        </p:nvSpPr>
-        <p:spPr>
-          <a:xfrm>
-            <a:off x="640080" y="4133088"/>
-            <a:ext cx="10881360" cy="411480"/>
-          </a:xfrm>
-          <a:prstGeom prst="rect">
-            <a:avLst/>
-          </a:prstGeom>
-          <a:noFill/>
-        </p:spPr>
-        <p:txBody>
-          <a:bodyPr wrap="square">
-            <a:spAutoFit/>
-          </a:bodyPr>
-          <a:lstStyle/>
-          <a:p>
-            <a:r>
-              <a:rPr sz="2000" b="1">
-                <a:solidFill>
-                  <a:srgbClr val="1B5E6B"/>
-                </a:solidFill>
-                <a:latin typeface="Bricolage Grotesque"/>
-              </a:rPr>
-              <a:t>demander « Es-tu certain ? Qu'est-ce qui pourrait être faux ? »</a:t>
-            </a:r>
-          </a:p>
-        </p:txBody>
-      </p:sp>
     </p:spTree>
   </p:cSld>
   <p:clrMapOvr>
@@ -9094,7 +9098,7 @@
                 </a:solidFill>
                 <a:latin typeface="Bricolage Grotesque"/>
               </a:rPr>
-              <a:t>Le panorama</a:t>
+              <a:t>Les mots, avec vos exemples</a:t>
             </a:r>
           </a:p>
         </p:txBody>
@@ -9129,7 +9133,7 @@
                 </a:solidFill>
                 <a:latin typeface="Bricolage Grotesque"/>
               </a:rPr>
-              <a:t>Quel outil pour quel usage ?</a:t>
+              <a:t>L'hallucination : faux, mais dit avec aplomb</a:t>
             </a:r>
           </a:p>
         </p:txBody>
@@ -9157,13 +9161,13 @@
           <a:lstStyle/>
           <a:p>
             <a:r>
-              <a:rPr sz="2000" b="1">
-                <a:solidFill>
-                  <a:srgbClr val="1B5E6B"/>
-                </a:solidFill>
-                <a:latin typeface="Bricolage Grotesque"/>
-              </a:rPr>
-              <a:t>ChatGPT : polyvalent, ce que vous connaissez déjà.</a:t>
+              <a:rPr sz="2000" b="0">
+                <a:solidFill>
+                  <a:srgbClr val="333333"/>
+                </a:solidFill>
+                <a:latin typeface="Bricolage Grotesque"/>
+              </a:rPr>
+              <a:t>Votre croisière : une réponse fausse, énoncée avec assurance.</a:t>
             </a:r>
           </a:p>
         </p:txBody>
@@ -9191,26 +9195,60 @@
           <a:lstStyle/>
           <a:p>
             <a:r>
+              <a:rPr sz="2000" b="0">
+                <a:solidFill>
+                  <a:srgbClr val="333333"/>
+                </a:solidFill>
+                <a:latin typeface="Bricolage Grotesque"/>
+              </a:rPr>
+              <a:t>Le modèle ne ment pas. Il produit toujours une suite, vraie ou non.</a:t>
+            </a:r>
+          </a:p>
+        </p:txBody>
+      </p:sp>
+      <p:sp>
+        <p:nvSpPr>
+          <p:cNvPr id="8" name="TextBox 7"/>
+          <p:cNvSpPr txBox="1"/>
+          <p:nvPr/>
+        </p:nvSpPr>
+        <p:spPr>
+          <a:xfrm>
+            <a:off x="640080" y="3611880"/>
+            <a:ext cx="10881360" cy="411480"/>
+          </a:xfrm>
+          <a:prstGeom prst="rect">
+            <a:avLst/>
+          </a:prstGeom>
+          <a:noFill/>
+        </p:spPr>
+        <p:txBody>
+          <a:bodyPr wrap="square">
+            <a:spAutoFit/>
+          </a:bodyPr>
+          <a:lstStyle/>
+          <a:p>
+            <a:r>
               <a:rPr sz="2000" b="1">
                 <a:solidFill>
                   <a:srgbClr val="1B5E6B"/>
                 </a:solidFill>
                 <a:latin typeface="Bricolage Grotesque"/>
               </a:rPr>
-              <a:t>Claude : rédaction longue, documents, projets de travail.</a:t>
-            </a:r>
-          </a:p>
-        </p:txBody>
-      </p:sp>
-      <p:sp>
-        <p:nvSpPr>
-          <p:cNvPr id="8" name="TextBox 7"/>
-          <p:cNvSpPr txBox="1"/>
-          <p:nvPr/>
-        </p:nvSpPr>
-        <p:spPr>
-          <a:xfrm>
-            <a:off x="640080" y="3374136"/>
+              <a:t>Les parades : vérifier les faits importants, exiger les sources,</a:t>
+            </a:r>
+          </a:p>
+        </p:txBody>
+      </p:sp>
+      <p:sp>
+        <p:nvSpPr>
+          <p:cNvPr id="9" name="TextBox 8"/>
+          <p:cNvSpPr txBox="1"/>
+          <p:nvPr/>
+        </p:nvSpPr>
+        <p:spPr>
+          <a:xfrm>
+            <a:off x="640080" y="4133088"/>
             <a:ext cx="10881360" cy="411480"/>
           </a:xfrm>
           <a:prstGeom prst="rect">
@@ -9231,7 +9269,7 @@
                 </a:solidFill>
                 <a:latin typeface="Bricolage Grotesque"/>
               </a:rPr>
-              <a:t>Gemini : écosystème Google, lecture de vidéos.</a:t>
+              <a:t>demander « Es-tu certain ? Qu'est-ce qui pourrait être faux ? »</a:t>
             </a:r>
           </a:p>
         </p:txBody>
@@ -9520,74 +9558,6 @@
           </a:p>
         </p:txBody>
       </p:sp>
-      <p:sp>
-        <p:nvSpPr>
-          <p:cNvPr id="9" name="TextBox 8"/>
-          <p:cNvSpPr txBox="1"/>
-          <p:nvPr/>
-        </p:nvSpPr>
-        <p:spPr>
-          <a:xfrm>
-            <a:off x="640080" y="4133088"/>
-            <a:ext cx="10881360" cy="411480"/>
-          </a:xfrm>
-          <a:prstGeom prst="rect">
-            <a:avLst/>
-          </a:prstGeom>
-          <a:noFill/>
-        </p:spPr>
-        <p:txBody>
-          <a:bodyPr wrap="square">
-            <a:spAutoFit/>
-          </a:bodyPr>
-          <a:lstStyle/>
-          <a:p>
-            <a:r>
-              <a:rPr sz="2000" b="1">
-                <a:solidFill>
-                  <a:srgbClr val="1B5E6B"/>
-                </a:solidFill>
-                <a:latin typeface="Bricolage Grotesque"/>
-              </a:rPr>
-              <a:t>Midjourney et Nano Banana : générer et retoucher des images (S2).</a:t>
-            </a:r>
-          </a:p>
-        </p:txBody>
-      </p:sp>
-      <p:sp>
-        <p:nvSpPr>
-          <p:cNvPr id="10" name="TextBox 9"/>
-          <p:cNvSpPr txBox="1"/>
-          <p:nvPr/>
-        </p:nvSpPr>
-        <p:spPr>
-          <a:xfrm>
-            <a:off x="640080" y="4654296"/>
-            <a:ext cx="10881360" cy="411480"/>
-          </a:xfrm>
-          <a:prstGeom prst="rect">
-            <a:avLst/>
-          </a:prstGeom>
-          <a:noFill/>
-        </p:spPr>
-        <p:txBody>
-          <a:bodyPr wrap="square">
-            <a:spAutoFit/>
-          </a:bodyPr>
-          <a:lstStyle/>
-          <a:p>
-            <a:r>
-              <a:rPr sz="2000" b="1">
-                <a:solidFill>
-                  <a:srgbClr val="1B5E6B"/>
-                </a:solidFill>
-                <a:latin typeface="Bricolage Grotesque"/>
-              </a:rPr>
-              <a:t>Canva : mettre en page ce que l'IA a généré.</a:t>
-            </a:r>
-          </a:p>
-        </p:txBody>
-      </p:sp>
     </p:spTree>
   </p:cSld>
   <p:clrMapOvr>
@@ -9798,7 +9768,7 @@
                 </a:solidFill>
                 <a:latin typeface="Bricolage Grotesque"/>
               </a:rPr>
-              <a:t>Avant S2 :  Focus Midjourney &amp; Nano Banana, puis Claude — Les fondamentaux</a:t>
+              <a:t>Avant S2 :  Focus Midjourney &amp; Nano Banana, puis Claude : les fondamentaux</a:t>
             </a:r>
           </a:p>
         </p:txBody>
@@ -9945,7 +9915,7 @@
                 </a:solidFill>
                 <a:latin typeface="Bricolage Grotesque"/>
               </a:rPr>
-              <a:t>Une méthode de prompt</a:t>
+              <a:t>Le panorama</a:t>
             </a:r>
           </a:p>
         </p:txBody>
@@ -9980,51 +9950,42 @@
                 </a:solidFill>
                 <a:latin typeface="Bricolage Grotesque"/>
               </a:rPr>
-              <a:t>Quatre temps, à écrire une fois, à réutiliser</a:t>
-            </a:r>
-          </a:p>
-        </p:txBody>
-      </p:sp>
-      <p:sp>
-        <p:nvSpPr>
-          <p:cNvPr id="6" name="Rounded Rectangle 5"/>
-          <p:cNvSpPr/>
-          <p:nvPr/>
-        </p:nvSpPr>
-        <p:spPr>
-          <a:xfrm>
-            <a:off x="640080" y="2743200"/>
-            <a:ext cx="2331720" cy="777240"/>
-          </a:xfrm>
-          <a:prstGeom prst="roundRect">
-            <a:avLst/>
-          </a:prstGeom>
-          <a:solidFill>
-            <a:srgbClr val="1B5E6B"/>
-          </a:solidFill>
-          <a:ln>
-            <a:noFill/>
-          </a:ln>
-        </p:spPr>
-        <p:style>
-          <a:lnRef idx="1">
-            <a:schemeClr val="accent1"/>
-          </a:lnRef>
-          <a:fillRef idx="3">
-            <a:schemeClr val="accent1"/>
-          </a:fillRef>
-          <a:effectRef idx="2">
-            <a:schemeClr val="accent1"/>
-          </a:effectRef>
-          <a:fontRef idx="minor">
-            <a:schemeClr val="lt1"/>
-          </a:fontRef>
-        </p:style>
-        <p:txBody>
-          <a:bodyPr rtlCol="0" anchor="ctr"/>
-          <a:lstStyle/>
-          <a:p>
-            <a:pPr algn="ctr"/>
+              <a:t>Quel outil pour quel usage ?</a:t>
+            </a:r>
+          </a:p>
+        </p:txBody>
+      </p:sp>
+      <p:sp>
+        <p:nvSpPr>
+          <p:cNvPr id="6" name="TextBox 5"/>
+          <p:cNvSpPr txBox="1"/>
+          <p:nvPr/>
+        </p:nvSpPr>
+        <p:spPr>
+          <a:xfrm>
+            <a:off x="640080" y="2331720"/>
+            <a:ext cx="10881360" cy="411480"/>
+          </a:xfrm>
+          <a:prstGeom prst="rect">
+            <a:avLst/>
+          </a:prstGeom>
+          <a:noFill/>
+        </p:spPr>
+        <p:txBody>
+          <a:bodyPr wrap="square">
+            <a:spAutoFit/>
+          </a:bodyPr>
+          <a:lstStyle/>
+          <a:p>
+            <a:r>
+              <a:rPr sz="2000" b="1">
+                <a:solidFill>
+                  <a:srgbClr val="1B5E6B"/>
+                </a:solidFill>
+                <a:latin typeface="Bricolage Grotesque"/>
+              </a:rPr>
+              <a:t>ChatGPT : polyvalent, ce que vous connaissez déjà.</a:t>
+            </a:r>
           </a:p>
         </p:txBody>
       </p:sp>
@@ -10036,30 +9997,28 @@
         </p:nvSpPr>
         <p:spPr>
           <a:xfrm>
-            <a:off x="731520" y="2907792"/>
-            <a:ext cx="2148840" cy="502920"/>
-          </a:xfrm>
-          <a:prstGeom prst="rect">
-            <a:avLst/>
-          </a:prstGeom>
-          <a:noFill/>
-        </p:spPr>
-        <p:txBody>
-          <a:bodyPr wrap="square">
-            <a:spAutoFit/>
-          </a:bodyPr>
-          <a:lstStyle/>
-          <a:p>
-            <a:pPr algn="ctr"/>
-            <a:r>
-              <a:rPr sz="1400" b="1">
-                <a:solidFill>
-                  <a:srgbClr val="FFFFFF"/>
-                </a:solidFill>
-                <a:latin typeface="Bricolage Grotesque"/>
-              </a:rPr>
-              <a:t>1. Contexte
-qui je suis, pour qui</a:t>
+            <a:off x="640080" y="2852928"/>
+            <a:ext cx="10881360" cy="411480"/>
+          </a:xfrm>
+          <a:prstGeom prst="rect">
+            <a:avLst/>
+          </a:prstGeom>
+          <a:noFill/>
+        </p:spPr>
+        <p:txBody>
+          <a:bodyPr wrap="square">
+            <a:spAutoFit/>
+          </a:bodyPr>
+          <a:lstStyle/>
+          <a:p>
+            <a:r>
+              <a:rPr sz="2000" b="1">
+                <a:solidFill>
+                  <a:srgbClr val="1B5E6B"/>
+                </a:solidFill>
+                <a:latin typeface="Bricolage Grotesque"/>
+              </a:rPr>
+              <a:t>Claude : rédaction longue, documents, projets de travail.</a:t>
             </a:r>
           </a:p>
         </p:txBody>
@@ -10072,73 +10031,63 @@
         </p:nvSpPr>
         <p:spPr>
           <a:xfrm>
-            <a:off x="3008376" y="2926080"/>
-            <a:ext cx="310896" cy="457200"/>
-          </a:xfrm>
-          <a:prstGeom prst="rect">
-            <a:avLst/>
-          </a:prstGeom>
-          <a:noFill/>
-        </p:spPr>
-        <p:txBody>
-          <a:bodyPr wrap="square">
-            <a:spAutoFit/>
-          </a:bodyPr>
-          <a:lstStyle/>
-          <a:p>
-            <a:pPr algn="ctr"/>
-            <a:r>
-              <a:rPr sz="2200" b="1">
-                <a:solidFill>
-                  <a:srgbClr val="E8A000"/>
-                </a:solidFill>
-                <a:latin typeface="Bricolage Grotesque"/>
-              </a:rPr>
-              <a:t>→</a:t>
-            </a:r>
-          </a:p>
-        </p:txBody>
-      </p:sp>
-      <p:sp>
-        <p:nvSpPr>
-          <p:cNvPr id="9" name="Rounded Rectangle 8"/>
-          <p:cNvSpPr/>
-          <p:nvPr/>
-        </p:nvSpPr>
-        <p:spPr>
-          <a:xfrm>
-            <a:off x="3355848" y="2743200"/>
-            <a:ext cx="2331720" cy="777240"/>
-          </a:xfrm>
-          <a:prstGeom prst="roundRect">
-            <a:avLst/>
-          </a:prstGeom>
-          <a:solidFill>
-            <a:srgbClr val="1E5565"/>
-          </a:solidFill>
-          <a:ln>
-            <a:noFill/>
-          </a:ln>
-        </p:spPr>
-        <p:style>
-          <a:lnRef idx="1">
-            <a:schemeClr val="accent1"/>
-          </a:lnRef>
-          <a:fillRef idx="3">
-            <a:schemeClr val="accent1"/>
-          </a:fillRef>
-          <a:effectRef idx="2">
-            <a:schemeClr val="accent1"/>
-          </a:effectRef>
-          <a:fontRef idx="minor">
-            <a:schemeClr val="lt1"/>
-          </a:fontRef>
-        </p:style>
-        <p:txBody>
-          <a:bodyPr rtlCol="0" anchor="ctr"/>
-          <a:lstStyle/>
-          <a:p>
-            <a:pPr algn="ctr"/>
+            <a:off x="640080" y="3374136"/>
+            <a:ext cx="10881360" cy="411480"/>
+          </a:xfrm>
+          <a:prstGeom prst="rect">
+            <a:avLst/>
+          </a:prstGeom>
+          <a:noFill/>
+        </p:spPr>
+        <p:txBody>
+          <a:bodyPr wrap="square">
+            <a:spAutoFit/>
+          </a:bodyPr>
+          <a:lstStyle/>
+          <a:p>
+            <a:r>
+              <a:rPr sz="2000" b="1">
+                <a:solidFill>
+                  <a:srgbClr val="1B5E6B"/>
+                </a:solidFill>
+                <a:latin typeface="Bricolage Grotesque"/>
+              </a:rPr>
+              <a:t>Gemini : écosystème Google, lecture de vidéos.</a:t>
+            </a:r>
+          </a:p>
+        </p:txBody>
+      </p:sp>
+      <p:sp>
+        <p:nvSpPr>
+          <p:cNvPr id="9" name="TextBox 8"/>
+          <p:cNvSpPr txBox="1"/>
+          <p:nvPr/>
+        </p:nvSpPr>
+        <p:spPr>
+          <a:xfrm>
+            <a:off x="640080" y="4133088"/>
+            <a:ext cx="10881360" cy="411480"/>
+          </a:xfrm>
+          <a:prstGeom prst="rect">
+            <a:avLst/>
+          </a:prstGeom>
+          <a:noFill/>
+        </p:spPr>
+        <p:txBody>
+          <a:bodyPr wrap="square">
+            <a:spAutoFit/>
+          </a:bodyPr>
+          <a:lstStyle/>
+          <a:p>
+            <a:r>
+              <a:rPr sz="2000" b="1">
+                <a:solidFill>
+                  <a:srgbClr val="1B5E6B"/>
+                </a:solidFill>
+                <a:latin typeface="Bricolage Grotesque"/>
+              </a:rPr>
+              <a:t>Midjourney et Nano Banana : générer et retoucher des images (S2).</a:t>
+            </a:r>
           </a:p>
         </p:txBody>
       </p:sp>
@@ -10150,293 +10099,28 @@
         </p:nvSpPr>
         <p:spPr>
           <a:xfrm>
-            <a:off x="3447288" y="2907792"/>
-            <a:ext cx="2148840" cy="502920"/>
-          </a:xfrm>
-          <a:prstGeom prst="rect">
-            <a:avLst/>
-          </a:prstGeom>
-          <a:noFill/>
-        </p:spPr>
-        <p:txBody>
-          <a:bodyPr wrap="square">
-            <a:spAutoFit/>
-          </a:bodyPr>
-          <a:lstStyle/>
-          <a:p>
-            <a:pPr algn="ctr"/>
-            <a:r>
-              <a:rPr sz="1400" b="1">
-                <a:solidFill>
-                  <a:srgbClr val="FFFFFF"/>
-                </a:solidFill>
-                <a:latin typeface="Bricolage Grotesque"/>
-              </a:rPr>
-              <a:t>2. Consigne
-ce que j'attends</a:t>
-            </a:r>
-          </a:p>
-        </p:txBody>
-      </p:sp>
-      <p:sp>
-        <p:nvSpPr>
-          <p:cNvPr id="11" name="TextBox 10"/>
-          <p:cNvSpPr txBox="1"/>
-          <p:nvPr/>
-        </p:nvSpPr>
-        <p:spPr>
-          <a:xfrm>
-            <a:off x="5724144" y="2926080"/>
-            <a:ext cx="310896" cy="457200"/>
-          </a:xfrm>
-          <a:prstGeom prst="rect">
-            <a:avLst/>
-          </a:prstGeom>
-          <a:noFill/>
-        </p:spPr>
-        <p:txBody>
-          <a:bodyPr wrap="square">
-            <a:spAutoFit/>
-          </a:bodyPr>
-          <a:lstStyle/>
-          <a:p>
-            <a:pPr algn="ctr"/>
-            <a:r>
-              <a:rPr sz="2200" b="1">
-                <a:solidFill>
-                  <a:srgbClr val="E8A000"/>
-                </a:solidFill>
-                <a:latin typeface="Bricolage Grotesque"/>
-              </a:rPr>
-              <a:t>→</a:t>
-            </a:r>
-          </a:p>
-        </p:txBody>
-      </p:sp>
-      <p:sp>
-        <p:nvSpPr>
-          <p:cNvPr id="12" name="Rounded Rectangle 11"/>
-          <p:cNvSpPr/>
-          <p:nvPr/>
-        </p:nvSpPr>
-        <p:spPr>
-          <a:xfrm>
-            <a:off x="6071616" y="2743200"/>
-            <a:ext cx="2331720" cy="777240"/>
-          </a:xfrm>
-          <a:prstGeom prst="roundRect">
-            <a:avLst/>
-          </a:prstGeom>
-          <a:solidFill>
-            <a:srgbClr val="1B5E6B"/>
-          </a:solidFill>
-          <a:ln>
-            <a:noFill/>
-          </a:ln>
-        </p:spPr>
-        <p:style>
-          <a:lnRef idx="1">
-            <a:schemeClr val="accent1"/>
-          </a:lnRef>
-          <a:fillRef idx="3">
-            <a:schemeClr val="accent1"/>
-          </a:fillRef>
-          <a:effectRef idx="2">
-            <a:schemeClr val="accent1"/>
-          </a:effectRef>
-          <a:fontRef idx="minor">
-            <a:schemeClr val="lt1"/>
-          </a:fontRef>
-        </p:style>
-        <p:txBody>
-          <a:bodyPr rtlCol="0" anchor="ctr"/>
-          <a:lstStyle/>
-          <a:p>
-            <a:pPr algn="ctr"/>
-          </a:p>
-        </p:txBody>
-      </p:sp>
-      <p:sp>
-        <p:nvSpPr>
-          <p:cNvPr id="13" name="TextBox 12"/>
-          <p:cNvSpPr txBox="1"/>
-          <p:nvPr/>
-        </p:nvSpPr>
-        <p:spPr>
-          <a:xfrm>
-            <a:off x="6163056" y="2907792"/>
-            <a:ext cx="2148840" cy="502920"/>
-          </a:xfrm>
-          <a:prstGeom prst="rect">
-            <a:avLst/>
-          </a:prstGeom>
-          <a:noFill/>
-        </p:spPr>
-        <p:txBody>
-          <a:bodyPr wrap="square">
-            <a:spAutoFit/>
-          </a:bodyPr>
-          <a:lstStyle/>
-          <a:p>
-            <a:pPr algn="ctr"/>
-            <a:r>
-              <a:rPr sz="1400" b="1">
-                <a:solidFill>
-                  <a:srgbClr val="FFFFFF"/>
-                </a:solidFill>
-                <a:latin typeface="Bricolage Grotesque"/>
-              </a:rPr>
-              <a:t>3. Format
-longueur, ton, structure</a:t>
-            </a:r>
-          </a:p>
-        </p:txBody>
-      </p:sp>
-      <p:sp>
-        <p:nvSpPr>
-          <p:cNvPr id="14" name="TextBox 13"/>
-          <p:cNvSpPr txBox="1"/>
-          <p:nvPr/>
-        </p:nvSpPr>
-        <p:spPr>
-          <a:xfrm>
-            <a:off x="8439912" y="2926080"/>
-            <a:ext cx="310896" cy="457200"/>
-          </a:xfrm>
-          <a:prstGeom prst="rect">
-            <a:avLst/>
-          </a:prstGeom>
-          <a:noFill/>
-        </p:spPr>
-        <p:txBody>
-          <a:bodyPr wrap="square">
-            <a:spAutoFit/>
-          </a:bodyPr>
-          <a:lstStyle/>
-          <a:p>
-            <a:pPr algn="ctr"/>
-            <a:r>
-              <a:rPr sz="2200" b="1">
-                <a:solidFill>
-                  <a:srgbClr val="E8A000"/>
-                </a:solidFill>
-                <a:latin typeface="Bricolage Grotesque"/>
-              </a:rPr>
-              <a:t>→</a:t>
-            </a:r>
-          </a:p>
-        </p:txBody>
-      </p:sp>
-      <p:sp>
-        <p:nvSpPr>
-          <p:cNvPr id="15" name="Rounded Rectangle 14"/>
-          <p:cNvSpPr/>
-          <p:nvPr/>
-        </p:nvSpPr>
-        <p:spPr>
-          <a:xfrm>
-            <a:off x="8787384" y="2743200"/>
-            <a:ext cx="2331720" cy="777240"/>
-          </a:xfrm>
-          <a:prstGeom prst="roundRect">
-            <a:avLst/>
-          </a:prstGeom>
-          <a:solidFill>
-            <a:srgbClr val="1E5565"/>
-          </a:solidFill>
-          <a:ln>
-            <a:noFill/>
-          </a:ln>
-        </p:spPr>
-        <p:style>
-          <a:lnRef idx="1">
-            <a:schemeClr val="accent1"/>
-          </a:lnRef>
-          <a:fillRef idx="3">
-            <a:schemeClr val="accent1"/>
-          </a:fillRef>
-          <a:effectRef idx="2">
-            <a:schemeClr val="accent1"/>
-          </a:effectRef>
-          <a:fontRef idx="minor">
-            <a:schemeClr val="lt1"/>
-          </a:fontRef>
-        </p:style>
-        <p:txBody>
-          <a:bodyPr rtlCol="0" anchor="ctr"/>
-          <a:lstStyle/>
-          <a:p>
-            <a:pPr algn="ctr"/>
-          </a:p>
-        </p:txBody>
-      </p:sp>
-      <p:sp>
-        <p:nvSpPr>
-          <p:cNvPr id="16" name="TextBox 15"/>
-          <p:cNvSpPr txBox="1"/>
-          <p:nvPr/>
-        </p:nvSpPr>
-        <p:spPr>
-          <a:xfrm>
-            <a:off x="8878824" y="2907792"/>
-            <a:ext cx="2148840" cy="502920"/>
-          </a:xfrm>
-          <a:prstGeom prst="rect">
-            <a:avLst/>
-          </a:prstGeom>
-          <a:noFill/>
-        </p:spPr>
-        <p:txBody>
-          <a:bodyPr wrap="square">
-            <a:spAutoFit/>
-          </a:bodyPr>
-          <a:lstStyle/>
-          <a:p>
-            <a:pPr algn="ctr"/>
-            <a:r>
-              <a:rPr sz="1400" b="1">
-                <a:solidFill>
-                  <a:srgbClr val="FFFFFF"/>
-                </a:solidFill>
-                <a:latin typeface="Bricolage Grotesque"/>
-              </a:rPr>
-              <a:t>4. Vérification
-ce que je contrôle</a:t>
-            </a:r>
-          </a:p>
-        </p:txBody>
-      </p:sp>
-      <p:sp>
-        <p:nvSpPr>
-          <p:cNvPr id="17" name="TextBox 16"/>
-          <p:cNvSpPr txBox="1"/>
-          <p:nvPr/>
-        </p:nvSpPr>
-        <p:spPr>
-          <a:xfrm>
-            <a:off x="640080" y="4114800"/>
-            <a:ext cx="10972800" cy="640080"/>
-          </a:xfrm>
-          <a:prstGeom prst="rect">
-            <a:avLst/>
-          </a:prstGeom>
-          <a:noFill/>
-        </p:spPr>
-        <p:txBody>
-          <a:bodyPr wrap="square">
-            <a:spAutoFit/>
-          </a:bodyPr>
-          <a:lstStyle/>
-          <a:p>
-            <a:pPr algn="l"/>
-            <a:r>
-              <a:rPr sz="1800" b="1">
+            <a:off x="640080" y="4654296"/>
+            <a:ext cx="10881360" cy="411480"/>
+          </a:xfrm>
+          <a:prstGeom prst="rect">
+            <a:avLst/>
+          </a:prstGeom>
+          <a:noFill/>
+        </p:spPr>
+        <p:txBody>
+          <a:bodyPr wrap="square">
+            <a:spAutoFit/>
+          </a:bodyPr>
+          <a:lstStyle/>
+          <a:p>
+            <a:r>
+              <a:rPr sz="2000" b="1">
                 <a:solidFill>
                   <a:srgbClr val="1B5E6B"/>
                 </a:solidFill>
                 <a:latin typeface="Bricolage Grotesque"/>
               </a:rPr>
-              <a:t>Ce que vous faites déjà d'instinct, rendu explicite et réutilisable.</a:t>
+              <a:t>Canva : mettre en page ce que l'IA a généré.</a:t>
             </a:r>
           </a:p>
         </p:txBody>
@@ -10583,7 +10267,7 @@
                 </a:solidFill>
                 <a:latin typeface="Bricolage Grotesque"/>
               </a:rPr>
-              <a:t>Le cadre de vos données</a:t>
+              <a:t>Une méthode de prompt</a:t>
             </a:r>
           </a:p>
         </p:txBody>
@@ -10618,75 +10302,463 @@
                 </a:solidFill>
                 <a:latin typeface="Bricolage Grotesque"/>
               </a:rPr>
-              <a:t>Ce qui entre dans un outil, et ce qui n'y entre jamais</a:t>
-            </a:r>
-          </a:p>
-        </p:txBody>
-      </p:sp>
-      <p:sp>
-        <p:nvSpPr>
-          <p:cNvPr id="6" name="TextBox 5"/>
-          <p:cNvSpPr txBox="1"/>
-          <p:nvPr/>
-        </p:nvSpPr>
-        <p:spPr>
-          <a:xfrm>
-            <a:off x="640080" y="2331720"/>
-            <a:ext cx="10881360" cy="411480"/>
-          </a:xfrm>
-          <a:prstGeom prst="rect">
-            <a:avLst/>
-          </a:prstGeom>
-          <a:noFill/>
-        </p:spPr>
-        <p:txBody>
-          <a:bodyPr wrap="square">
-            <a:spAutoFit/>
-          </a:bodyPr>
-          <a:lstStyle/>
-          <a:p>
-            <a:r>
-              <a:rPr sz="2000" b="1">
+              <a:t>Quatre temps, à écrire une fois, à réutiliser</a:t>
+            </a:r>
+          </a:p>
+        </p:txBody>
+      </p:sp>
+      <p:sp>
+        <p:nvSpPr>
+          <p:cNvPr id="6" name="Rounded Rectangle 5"/>
+          <p:cNvSpPr/>
+          <p:nvPr/>
+        </p:nvSpPr>
+        <p:spPr>
+          <a:xfrm>
+            <a:off x="640080" y="2743200"/>
+            <a:ext cx="2331720" cy="777240"/>
+          </a:xfrm>
+          <a:prstGeom prst="roundRect">
+            <a:avLst/>
+          </a:prstGeom>
+          <a:solidFill>
+            <a:srgbClr val="1B5E6B"/>
+          </a:solidFill>
+          <a:ln>
+            <a:noFill/>
+          </a:ln>
+        </p:spPr>
+        <p:style>
+          <a:lnRef idx="1">
+            <a:schemeClr val="accent1"/>
+          </a:lnRef>
+          <a:fillRef idx="3">
+            <a:schemeClr val="accent1"/>
+          </a:fillRef>
+          <a:effectRef idx="2">
+            <a:schemeClr val="accent1"/>
+          </a:effectRef>
+          <a:fontRef idx="minor">
+            <a:schemeClr val="lt1"/>
+          </a:fontRef>
+        </p:style>
+        <p:txBody>
+          <a:bodyPr rtlCol="0" anchor="ctr"/>
+          <a:lstStyle/>
+          <a:p>
+            <a:pPr algn="ctr"/>
+          </a:p>
+        </p:txBody>
+      </p:sp>
+      <p:sp>
+        <p:nvSpPr>
+          <p:cNvPr id="7" name="TextBox 6"/>
+          <p:cNvSpPr txBox="1"/>
+          <p:nvPr/>
+        </p:nvSpPr>
+        <p:spPr>
+          <a:xfrm>
+            <a:off x="731520" y="2907792"/>
+            <a:ext cx="2148840" cy="502920"/>
+          </a:xfrm>
+          <a:prstGeom prst="rect">
+            <a:avLst/>
+          </a:prstGeom>
+          <a:noFill/>
+        </p:spPr>
+        <p:txBody>
+          <a:bodyPr wrap="square">
+            <a:spAutoFit/>
+          </a:bodyPr>
+          <a:lstStyle/>
+          <a:p>
+            <a:pPr algn="ctr"/>
+            <a:r>
+              <a:rPr sz="1400" b="1">
+                <a:solidFill>
+                  <a:srgbClr val="FFFFFF"/>
+                </a:solidFill>
+                <a:latin typeface="Bricolage Grotesque"/>
+              </a:rPr>
+              <a:t>1. Contexte
+qui je suis, pour qui</a:t>
+            </a:r>
+          </a:p>
+        </p:txBody>
+      </p:sp>
+      <p:sp>
+        <p:nvSpPr>
+          <p:cNvPr id="8" name="TextBox 7"/>
+          <p:cNvSpPr txBox="1"/>
+          <p:nvPr/>
+        </p:nvSpPr>
+        <p:spPr>
+          <a:xfrm>
+            <a:off x="3008376" y="2926080"/>
+            <a:ext cx="310896" cy="457200"/>
+          </a:xfrm>
+          <a:prstGeom prst="rect">
+            <a:avLst/>
+          </a:prstGeom>
+          <a:noFill/>
+        </p:spPr>
+        <p:txBody>
+          <a:bodyPr wrap="square">
+            <a:spAutoFit/>
+          </a:bodyPr>
+          <a:lstStyle/>
+          <a:p>
+            <a:pPr algn="ctr"/>
+            <a:r>
+              <a:rPr sz="2200" b="1">
+                <a:solidFill>
+                  <a:srgbClr val="E8A000"/>
+                </a:solidFill>
+                <a:latin typeface="Bricolage Grotesque"/>
+              </a:rPr>
+              <a:t>→</a:t>
+            </a:r>
+          </a:p>
+        </p:txBody>
+      </p:sp>
+      <p:sp>
+        <p:nvSpPr>
+          <p:cNvPr id="9" name="Rounded Rectangle 8"/>
+          <p:cNvSpPr/>
+          <p:nvPr/>
+        </p:nvSpPr>
+        <p:spPr>
+          <a:xfrm>
+            <a:off x="3355848" y="2743200"/>
+            <a:ext cx="2331720" cy="777240"/>
+          </a:xfrm>
+          <a:prstGeom prst="roundRect">
+            <a:avLst/>
+          </a:prstGeom>
+          <a:solidFill>
+            <a:srgbClr val="1E5565"/>
+          </a:solidFill>
+          <a:ln>
+            <a:noFill/>
+          </a:ln>
+        </p:spPr>
+        <p:style>
+          <a:lnRef idx="1">
+            <a:schemeClr val="accent1"/>
+          </a:lnRef>
+          <a:fillRef idx="3">
+            <a:schemeClr val="accent1"/>
+          </a:fillRef>
+          <a:effectRef idx="2">
+            <a:schemeClr val="accent1"/>
+          </a:effectRef>
+          <a:fontRef idx="minor">
+            <a:schemeClr val="lt1"/>
+          </a:fontRef>
+        </p:style>
+        <p:txBody>
+          <a:bodyPr rtlCol="0" anchor="ctr"/>
+          <a:lstStyle/>
+          <a:p>
+            <a:pPr algn="ctr"/>
+          </a:p>
+        </p:txBody>
+      </p:sp>
+      <p:sp>
+        <p:nvSpPr>
+          <p:cNvPr id="10" name="TextBox 9"/>
+          <p:cNvSpPr txBox="1"/>
+          <p:nvPr/>
+        </p:nvSpPr>
+        <p:spPr>
+          <a:xfrm>
+            <a:off x="3447288" y="2907792"/>
+            <a:ext cx="2148840" cy="502920"/>
+          </a:xfrm>
+          <a:prstGeom prst="rect">
+            <a:avLst/>
+          </a:prstGeom>
+          <a:noFill/>
+        </p:spPr>
+        <p:txBody>
+          <a:bodyPr wrap="square">
+            <a:spAutoFit/>
+          </a:bodyPr>
+          <a:lstStyle/>
+          <a:p>
+            <a:pPr algn="ctr"/>
+            <a:r>
+              <a:rPr sz="1400" b="1">
+                <a:solidFill>
+                  <a:srgbClr val="FFFFFF"/>
+                </a:solidFill>
+                <a:latin typeface="Bricolage Grotesque"/>
+              </a:rPr>
+              <a:t>2. Consigne
+ce que j'attends</a:t>
+            </a:r>
+          </a:p>
+        </p:txBody>
+      </p:sp>
+      <p:sp>
+        <p:nvSpPr>
+          <p:cNvPr id="11" name="TextBox 10"/>
+          <p:cNvSpPr txBox="1"/>
+          <p:nvPr/>
+        </p:nvSpPr>
+        <p:spPr>
+          <a:xfrm>
+            <a:off x="5724144" y="2926080"/>
+            <a:ext cx="310896" cy="457200"/>
+          </a:xfrm>
+          <a:prstGeom prst="rect">
+            <a:avLst/>
+          </a:prstGeom>
+          <a:noFill/>
+        </p:spPr>
+        <p:txBody>
+          <a:bodyPr wrap="square">
+            <a:spAutoFit/>
+          </a:bodyPr>
+          <a:lstStyle/>
+          <a:p>
+            <a:pPr algn="ctr"/>
+            <a:r>
+              <a:rPr sz="2200" b="1">
+                <a:solidFill>
+                  <a:srgbClr val="E8A000"/>
+                </a:solidFill>
+                <a:latin typeface="Bricolage Grotesque"/>
+              </a:rPr>
+              <a:t>→</a:t>
+            </a:r>
+          </a:p>
+        </p:txBody>
+      </p:sp>
+      <p:sp>
+        <p:nvSpPr>
+          <p:cNvPr id="12" name="Rounded Rectangle 11"/>
+          <p:cNvSpPr/>
+          <p:nvPr/>
+        </p:nvSpPr>
+        <p:spPr>
+          <a:xfrm>
+            <a:off x="6071616" y="2743200"/>
+            <a:ext cx="2331720" cy="777240"/>
+          </a:xfrm>
+          <a:prstGeom prst="roundRect">
+            <a:avLst/>
+          </a:prstGeom>
+          <a:solidFill>
+            <a:srgbClr val="1B5E6B"/>
+          </a:solidFill>
+          <a:ln>
+            <a:noFill/>
+          </a:ln>
+        </p:spPr>
+        <p:style>
+          <a:lnRef idx="1">
+            <a:schemeClr val="accent1"/>
+          </a:lnRef>
+          <a:fillRef idx="3">
+            <a:schemeClr val="accent1"/>
+          </a:fillRef>
+          <a:effectRef idx="2">
+            <a:schemeClr val="accent1"/>
+          </a:effectRef>
+          <a:fontRef idx="minor">
+            <a:schemeClr val="lt1"/>
+          </a:fontRef>
+        </p:style>
+        <p:txBody>
+          <a:bodyPr rtlCol="0" anchor="ctr"/>
+          <a:lstStyle/>
+          <a:p>
+            <a:pPr algn="ctr"/>
+          </a:p>
+        </p:txBody>
+      </p:sp>
+      <p:sp>
+        <p:nvSpPr>
+          <p:cNvPr id="13" name="TextBox 12"/>
+          <p:cNvSpPr txBox="1"/>
+          <p:nvPr/>
+        </p:nvSpPr>
+        <p:spPr>
+          <a:xfrm>
+            <a:off x="6163056" y="2907792"/>
+            <a:ext cx="2148840" cy="502920"/>
+          </a:xfrm>
+          <a:prstGeom prst="rect">
+            <a:avLst/>
+          </a:prstGeom>
+          <a:noFill/>
+        </p:spPr>
+        <p:txBody>
+          <a:bodyPr wrap="square">
+            <a:spAutoFit/>
+          </a:bodyPr>
+          <a:lstStyle/>
+          <a:p>
+            <a:pPr algn="ctr"/>
+            <a:r>
+              <a:rPr sz="1400" b="1">
+                <a:solidFill>
+                  <a:srgbClr val="FFFFFF"/>
+                </a:solidFill>
+                <a:latin typeface="Bricolage Grotesque"/>
+              </a:rPr>
+              <a:t>3. Format
+longueur, ton, structure</a:t>
+            </a:r>
+          </a:p>
+        </p:txBody>
+      </p:sp>
+      <p:sp>
+        <p:nvSpPr>
+          <p:cNvPr id="14" name="TextBox 13"/>
+          <p:cNvSpPr txBox="1"/>
+          <p:nvPr/>
+        </p:nvSpPr>
+        <p:spPr>
+          <a:xfrm>
+            <a:off x="8439912" y="2926080"/>
+            <a:ext cx="310896" cy="457200"/>
+          </a:xfrm>
+          <a:prstGeom prst="rect">
+            <a:avLst/>
+          </a:prstGeom>
+          <a:noFill/>
+        </p:spPr>
+        <p:txBody>
+          <a:bodyPr wrap="square">
+            <a:spAutoFit/>
+          </a:bodyPr>
+          <a:lstStyle/>
+          <a:p>
+            <a:pPr algn="ctr"/>
+            <a:r>
+              <a:rPr sz="2200" b="1">
+                <a:solidFill>
+                  <a:srgbClr val="E8A000"/>
+                </a:solidFill>
+                <a:latin typeface="Bricolage Grotesque"/>
+              </a:rPr>
+              <a:t>→</a:t>
+            </a:r>
+          </a:p>
+        </p:txBody>
+      </p:sp>
+      <p:sp>
+        <p:nvSpPr>
+          <p:cNvPr id="15" name="Rounded Rectangle 14"/>
+          <p:cNvSpPr/>
+          <p:nvPr/>
+        </p:nvSpPr>
+        <p:spPr>
+          <a:xfrm>
+            <a:off x="8787384" y="2743200"/>
+            <a:ext cx="2331720" cy="777240"/>
+          </a:xfrm>
+          <a:prstGeom prst="roundRect">
+            <a:avLst/>
+          </a:prstGeom>
+          <a:solidFill>
+            <a:srgbClr val="1E5565"/>
+          </a:solidFill>
+          <a:ln>
+            <a:noFill/>
+          </a:ln>
+        </p:spPr>
+        <p:style>
+          <a:lnRef idx="1">
+            <a:schemeClr val="accent1"/>
+          </a:lnRef>
+          <a:fillRef idx="3">
+            <a:schemeClr val="accent1"/>
+          </a:fillRef>
+          <a:effectRef idx="2">
+            <a:schemeClr val="accent1"/>
+          </a:effectRef>
+          <a:fontRef idx="minor">
+            <a:schemeClr val="lt1"/>
+          </a:fontRef>
+        </p:style>
+        <p:txBody>
+          <a:bodyPr rtlCol="0" anchor="ctr"/>
+          <a:lstStyle/>
+          <a:p>
+            <a:pPr algn="ctr"/>
+          </a:p>
+        </p:txBody>
+      </p:sp>
+      <p:sp>
+        <p:nvSpPr>
+          <p:cNvPr id="16" name="TextBox 15"/>
+          <p:cNvSpPr txBox="1"/>
+          <p:nvPr/>
+        </p:nvSpPr>
+        <p:spPr>
+          <a:xfrm>
+            <a:off x="8878824" y="2907792"/>
+            <a:ext cx="2148840" cy="502920"/>
+          </a:xfrm>
+          <a:prstGeom prst="rect">
+            <a:avLst/>
+          </a:prstGeom>
+          <a:noFill/>
+        </p:spPr>
+        <p:txBody>
+          <a:bodyPr wrap="square">
+            <a:spAutoFit/>
+          </a:bodyPr>
+          <a:lstStyle/>
+          <a:p>
+            <a:pPr algn="ctr"/>
+            <a:r>
+              <a:rPr sz="1400" b="1">
+                <a:solidFill>
+                  <a:srgbClr val="FFFFFF"/>
+                </a:solidFill>
+                <a:latin typeface="Bricolage Grotesque"/>
+              </a:rPr>
+              <a:t>4. Vérification
+ce que je contrôle</a:t>
+            </a:r>
+          </a:p>
+        </p:txBody>
+      </p:sp>
+      <p:sp>
+        <p:nvSpPr>
+          <p:cNvPr id="17" name="TextBox 16"/>
+          <p:cNvSpPr txBox="1"/>
+          <p:nvPr/>
+        </p:nvSpPr>
+        <p:spPr>
+          <a:xfrm>
+            <a:off x="640080" y="4114800"/>
+            <a:ext cx="10972800" cy="640080"/>
+          </a:xfrm>
+          <a:prstGeom prst="rect">
+            <a:avLst/>
+          </a:prstGeom>
+          <a:noFill/>
+        </p:spPr>
+        <p:txBody>
+          <a:bodyPr wrap="square">
+            <a:spAutoFit/>
+          </a:bodyPr>
+          <a:lstStyle/>
+          <a:p>
+            <a:pPr algn="l"/>
+            <a:r>
+              <a:rPr sz="1800" b="1">
                 <a:solidFill>
                   <a:srgbClr val="1B5E6B"/>
                 </a:solidFill>
                 <a:latin typeface="Bricolage Grotesque"/>
               </a:rPr>
-              <a:t>Jamais : nom, adresse, santé, situation sociale d'une personne réelle.</a:t>
-            </a:r>
-          </a:p>
-        </p:txBody>
-      </p:sp>
-      <p:sp>
-        <p:nvSpPr>
-          <p:cNvPr id="7" name="TextBox 6"/>
-          <p:cNvSpPr txBox="1"/>
-          <p:nvPr/>
-        </p:nvSpPr>
-        <p:spPr>
-          <a:xfrm>
-            <a:off x="640080" y="2852928"/>
-            <a:ext cx="10881360" cy="411480"/>
-          </a:xfrm>
-          <a:prstGeom prst="rect">
-            <a:avLst/>
-          </a:prstGeom>
-          <a:noFill/>
-        </p:spPr>
-        <p:txBody>
-          <a:bodyPr wrap="square">
-            <a:spAutoFit/>
-          </a:bodyPr>
-          <a:lstStyle/>
-          <a:p>
-            <a:r>
-              <a:rPr sz="2000" b="1">
-                <a:solidFill>
-                  <a:srgbClr val="1B5E6B"/>
-                </a:solidFill>
-                <a:latin typeface="Bricolage Grotesque"/>
-              </a:rPr>
-              <a:t>Toujours : anonymiser (« Mme A., 82 ans, seule ») ou passer au fictif.</a:t>
+              <a:t>Ce que vous faites déjà d'instinct, rendu explicite et réutilisable.</a:t>
             </a:r>
           </a:p>
         </p:txBody>
@@ -10941,74 +11013,6 @@
           </a:p>
         </p:txBody>
       </p:sp>
-      <p:sp>
-        <p:nvSpPr>
-          <p:cNvPr id="8" name="TextBox 7"/>
-          <p:cNvSpPr txBox="1"/>
-          <p:nvPr/>
-        </p:nvSpPr>
-        <p:spPr>
-          <a:xfrm>
-            <a:off x="640080" y="3611880"/>
-            <a:ext cx="10881360" cy="411480"/>
-          </a:xfrm>
-          <a:prstGeom prst="rect">
-            <a:avLst/>
-          </a:prstGeom>
-          <a:noFill/>
-        </p:spPr>
-        <p:txBody>
-          <a:bodyPr wrap="square">
-            <a:spAutoFit/>
-          </a:bodyPr>
-          <a:lstStyle/>
-          <a:p>
-            <a:r>
-              <a:rPr sz="2000" b="1">
-                <a:solidFill>
-                  <a:srgbClr val="1B5E6B"/>
-                </a:solidFill>
-                <a:latin typeface="Bricolage Grotesque"/>
-              </a:rPr>
-              <a:t>Deux réglages à maîtriser : l'entraînement et la mémoire.</a:t>
-            </a:r>
-          </a:p>
-        </p:txBody>
-      </p:sp>
-      <p:sp>
-        <p:nvSpPr>
-          <p:cNvPr id="9" name="TextBox 8"/>
-          <p:cNvSpPr txBox="1"/>
-          <p:nvPr/>
-        </p:nvSpPr>
-        <p:spPr>
-          <a:xfrm>
-            <a:off x="640080" y="4133088"/>
-            <a:ext cx="10881360" cy="411480"/>
-          </a:xfrm>
-          <a:prstGeom prst="rect">
-            <a:avLst/>
-          </a:prstGeom>
-          <a:noFill/>
-        </p:spPr>
-        <p:txBody>
-          <a:bodyPr wrap="square">
-            <a:spAutoFit/>
-          </a:bodyPr>
-          <a:lstStyle/>
-          <a:p>
-            <a:r>
-              <a:rPr sz="2000" b="1">
-                <a:solidFill>
-                  <a:srgbClr val="1B5E6B"/>
-                </a:solidFill>
-                <a:latin typeface="Bricolage Grotesque"/>
-              </a:rPr>
-              <a:t>Garder une trace : ce que vous avez validé, et quand.</a:t>
-            </a:r>
-          </a:p>
-        </p:txBody>
-      </p:sp>
     </p:spTree>
   </p:cSld>
   <p:clrMapOvr>
@@ -11186,7 +11190,7 @@
                 </a:solidFill>
                 <a:latin typeface="Bricolage Grotesque"/>
               </a:rPr>
-              <a:t>Pourquoi c'est votre compétence, pas un détail</a:t>
+              <a:t>Ce qui entre dans un outil, et ce qui n'y entre jamais</a:t>
             </a:r>
           </a:p>
         </p:txBody>
@@ -11214,13 +11218,13 @@
           <a:lstStyle/>
           <a:p>
             <a:r>
-              <a:rPr sz="2000" b="0">
-                <a:solidFill>
-                  <a:srgbClr val="333333"/>
-                </a:solidFill>
-                <a:latin typeface="Bricolage Grotesque"/>
-              </a:rPr>
-              <a:t>Dans le médico-social, c'est le cadre que vous aurez à poser</a:t>
+              <a:rPr sz="2000" b="1">
+                <a:solidFill>
+                  <a:srgbClr val="1B5E6B"/>
+                </a:solidFill>
+                <a:latin typeface="Bricolage Grotesque"/>
+              </a:rPr>
+              <a:t>Jamais : nom, adresse, santé, situation sociale d'une personne réelle.</a:t>
             </a:r>
           </a:p>
         </p:txBody>
@@ -11248,13 +11252,81 @@
           <a:lstStyle/>
           <a:p>
             <a:r>
-              <a:rPr sz="2000" b="0">
-                <a:solidFill>
-                  <a:srgbClr val="333333"/>
-                </a:solidFill>
-                <a:latin typeface="Bricolage Grotesque"/>
-              </a:rPr>
-              <a:t>dans une structure, pour une équipe.</a:t>
+              <a:rPr sz="2000" b="1">
+                <a:solidFill>
+                  <a:srgbClr val="1B5E6B"/>
+                </a:solidFill>
+                <a:latin typeface="Bricolage Grotesque"/>
+              </a:rPr>
+              <a:t>Toujours : anonymiser (« Mme A., 82 ans, seule ») ou passer au fictif.</a:t>
+            </a:r>
+          </a:p>
+        </p:txBody>
+      </p:sp>
+      <p:sp>
+        <p:nvSpPr>
+          <p:cNvPr id="8" name="TextBox 7"/>
+          <p:cNvSpPr txBox="1"/>
+          <p:nvPr/>
+        </p:nvSpPr>
+        <p:spPr>
+          <a:xfrm>
+            <a:off x="640080" y="3611880"/>
+            <a:ext cx="10881360" cy="411480"/>
+          </a:xfrm>
+          <a:prstGeom prst="rect">
+            <a:avLst/>
+          </a:prstGeom>
+          <a:noFill/>
+        </p:spPr>
+        <p:txBody>
+          <a:bodyPr wrap="square">
+            <a:spAutoFit/>
+          </a:bodyPr>
+          <a:lstStyle/>
+          <a:p>
+            <a:r>
+              <a:rPr sz="2000" b="1">
+                <a:solidFill>
+                  <a:srgbClr val="1B5E6B"/>
+                </a:solidFill>
+                <a:latin typeface="Bricolage Grotesque"/>
+              </a:rPr>
+              <a:t>Deux réglages à maîtriser : l'entraînement et la mémoire.</a:t>
+            </a:r>
+          </a:p>
+        </p:txBody>
+      </p:sp>
+      <p:sp>
+        <p:nvSpPr>
+          <p:cNvPr id="9" name="TextBox 8"/>
+          <p:cNvSpPr txBox="1"/>
+          <p:nvPr/>
+        </p:nvSpPr>
+        <p:spPr>
+          <a:xfrm>
+            <a:off x="640080" y="4133088"/>
+            <a:ext cx="10881360" cy="411480"/>
+          </a:xfrm>
+          <a:prstGeom prst="rect">
+            <a:avLst/>
+          </a:prstGeom>
+          <a:noFill/>
+        </p:spPr>
+        <p:txBody>
+          <a:bodyPr wrap="square">
+            <a:spAutoFit/>
+          </a:bodyPr>
+          <a:lstStyle/>
+          <a:p>
+            <a:r>
+              <a:rPr sz="2000" b="1">
+                <a:solidFill>
+                  <a:srgbClr val="1B5E6B"/>
+                </a:solidFill>
+                <a:latin typeface="Bricolage Grotesque"/>
+              </a:rPr>
+              <a:t>Garder une trace : ce que vous avez validé, et quand.</a:t>
             </a:r>
           </a:p>
         </p:txBody>
@@ -11509,74 +11581,6 @@
           </a:p>
         </p:txBody>
       </p:sp>
-      <p:sp>
-        <p:nvSpPr>
-          <p:cNvPr id="8" name="TextBox 7"/>
-          <p:cNvSpPr txBox="1"/>
-          <p:nvPr/>
-        </p:nvSpPr>
-        <p:spPr>
-          <a:xfrm>
-            <a:off x="640080" y="3611880"/>
-            <a:ext cx="10881360" cy="411480"/>
-          </a:xfrm>
-          <a:prstGeom prst="rect">
-            <a:avLst/>
-          </a:prstGeom>
-          <a:noFill/>
-        </p:spPr>
-        <p:txBody>
-          <a:bodyPr wrap="square">
-            <a:spAutoFit/>
-          </a:bodyPr>
-          <a:lstStyle/>
-          <a:p>
-            <a:r>
-              <a:rPr sz="2000" b="1">
-                <a:solidFill>
-                  <a:srgbClr val="1B5E6B"/>
-                </a:solidFill>
-                <a:latin typeface="Bricolage Grotesque"/>
-              </a:rPr>
-              <a:t>Distinguer : une donnée publique (un appel à projets)</a:t>
-            </a:r>
-          </a:p>
-        </p:txBody>
-      </p:sp>
-      <p:sp>
-        <p:nvSpPr>
-          <p:cNvPr id="9" name="TextBox 8"/>
-          <p:cNvSpPr txBox="1"/>
-          <p:nvPr/>
-        </p:nvSpPr>
-        <p:spPr>
-          <a:xfrm>
-            <a:off x="640080" y="4133088"/>
-            <a:ext cx="10881360" cy="411480"/>
-          </a:xfrm>
-          <a:prstGeom prst="rect">
-            <a:avLst/>
-          </a:prstGeom>
-          <a:noFill/>
-        </p:spPr>
-        <p:txBody>
-          <a:bodyPr wrap="square">
-            <a:spAutoFit/>
-          </a:bodyPr>
-          <a:lstStyle/>
-          <a:p>
-            <a:r>
-              <a:rPr sz="2000" b="1">
-                <a:solidFill>
-                  <a:srgbClr val="1B5E6B"/>
-                </a:solidFill>
-                <a:latin typeface="Bricolage Grotesque"/>
-              </a:rPr>
-              <a:t>et une situation nominative (une personne accompagnée).</a:t>
-            </a:r>
-          </a:p>
-        </p:txBody>
-      </p:sp>
     </p:spTree>
   </p:cSld>
   <p:clrMapOvr>
@@ -11719,7 +11723,7 @@
                 </a:solidFill>
                 <a:latin typeface="Bricolage Grotesque"/>
               </a:rPr>
-              <a:t>Vos données</a:t>
+              <a:t>Le cadre de vos données</a:t>
             </a:r>
           </a:p>
         </p:txBody>
@@ -11754,7 +11758,7 @@
                 </a:solidFill>
                 <a:latin typeface="Bricolage Grotesque"/>
               </a:rPr>
-              <a:t>L'entraînement : au cas par cas, comme vous le souhaitez</a:t>
+              <a:t>Pourquoi c'est votre compétence, pas un détail</a:t>
             </a:r>
           </a:p>
         </p:txBody>
@@ -11782,13 +11786,13 @@
           <a:lstStyle/>
           <a:p>
             <a:r>
-              <a:rPr sz="2000" b="1">
-                <a:solidFill>
-                  <a:srgbClr val="1B5E6B"/>
-                </a:solidFill>
-                <a:latin typeface="Bricolage Grotesque"/>
-              </a:rPr>
-              <a:t>Par défaut : vous contribuez à améliorer le modèle. C'est un choix légitime.</a:t>
+              <a:rPr sz="2000" b="0">
+                <a:solidFill>
+                  <a:srgbClr val="333333"/>
+                </a:solidFill>
+                <a:latin typeface="Bricolage Grotesque"/>
+              </a:rPr>
+              <a:t>Dans le médico-social, c'est le cadre que vous aurez à poser</a:t>
             </a:r>
           </a:p>
         </p:txBody>
@@ -11816,13 +11820,81 @@
           <a:lstStyle/>
           <a:p>
             <a:r>
+              <a:rPr sz="2000" b="0">
+                <a:solidFill>
+                  <a:srgbClr val="333333"/>
+                </a:solidFill>
+                <a:latin typeface="Bricolage Grotesque"/>
+              </a:rPr>
+              <a:t>dans une structure, pour une équipe.</a:t>
+            </a:r>
+          </a:p>
+        </p:txBody>
+      </p:sp>
+      <p:sp>
+        <p:nvSpPr>
+          <p:cNvPr id="8" name="TextBox 7"/>
+          <p:cNvSpPr txBox="1"/>
+          <p:nvPr/>
+        </p:nvSpPr>
+        <p:spPr>
+          <a:xfrm>
+            <a:off x="640080" y="3611880"/>
+            <a:ext cx="10881360" cy="411480"/>
+          </a:xfrm>
+          <a:prstGeom prst="rect">
+            <a:avLst/>
+          </a:prstGeom>
+          <a:noFill/>
+        </p:spPr>
+        <p:txBody>
+          <a:bodyPr wrap="square">
+            <a:spAutoFit/>
+          </a:bodyPr>
+          <a:lstStyle/>
+          <a:p>
+            <a:r>
               <a:rPr sz="2000" b="1">
                 <a:solidFill>
                   <a:srgbClr val="1B5E6B"/>
                 </a:solidFill>
                 <a:latin typeface="Bricolage Grotesque"/>
               </a:rPr>
-              <a:t>Dossier innovant : une conversation temporaire, exclue de l'entraînement.</a:t>
+              <a:t>Distinguer : une donnée publique (un appel à projets)</a:t>
+            </a:r>
+          </a:p>
+        </p:txBody>
+      </p:sp>
+      <p:sp>
+        <p:nvSpPr>
+          <p:cNvPr id="9" name="TextBox 8"/>
+          <p:cNvSpPr txBox="1"/>
+          <p:nvPr/>
+        </p:nvSpPr>
+        <p:spPr>
+          <a:xfrm>
+            <a:off x="640080" y="4133088"/>
+            <a:ext cx="10881360" cy="411480"/>
+          </a:xfrm>
+          <a:prstGeom prst="rect">
+            <a:avLst/>
+          </a:prstGeom>
+          <a:noFill/>
+        </p:spPr>
+        <p:txBody>
+          <a:bodyPr wrap="square">
+            <a:spAutoFit/>
+          </a:bodyPr>
+          <a:lstStyle/>
+          <a:p>
+            <a:r>
+              <a:rPr sz="2000" b="1">
+                <a:solidFill>
+                  <a:srgbClr val="1B5E6B"/>
+                </a:solidFill>
+                <a:latin typeface="Bricolage Grotesque"/>
+              </a:rPr>
+              <a:t>et une situation nominative (une personne accompagnée).</a:t>
             </a:r>
           </a:p>
         </p:txBody>
@@ -12072,75 +12144,7 @@
                 </a:solidFill>
                 <a:latin typeface="Bricolage Grotesque"/>
               </a:rPr>
-              <a:t>Dossier innovant : une conversation temporaire, exclue de l'entraînement.</a:t>
-            </a:r>
-          </a:p>
-        </p:txBody>
-      </p:sp>
-      <p:sp>
-        <p:nvSpPr>
-          <p:cNvPr id="8" name="TextBox 7"/>
-          <p:cNvSpPr txBox="1"/>
-          <p:nvPr/>
-        </p:nvSpPr>
-        <p:spPr>
-          <a:xfrm>
-            <a:off x="640080" y="3611880"/>
-            <a:ext cx="10881360" cy="411480"/>
-          </a:xfrm>
-          <a:prstGeom prst="rect">
-            <a:avLst/>
-          </a:prstGeom>
-          <a:noFill/>
-        </p:spPr>
-        <p:txBody>
-          <a:bodyPr wrap="square">
-            <a:spAutoFit/>
-          </a:bodyPr>
-          <a:lstStyle/>
-          <a:p>
-            <a:r>
-              <a:rPr sz="2000" b="1">
-                <a:solidFill>
-                  <a:srgbClr val="1B5E6B"/>
-                </a:solidFill>
-                <a:latin typeface="Bricolage Grotesque"/>
-              </a:rPr>
-              <a:t>Ou le réglage global : Paramètres › Contrôles des données.</a:t>
-            </a:r>
-          </a:p>
-        </p:txBody>
-      </p:sp>
-      <p:sp>
-        <p:nvSpPr>
-          <p:cNvPr id="9" name="TextBox 8"/>
-          <p:cNvSpPr txBox="1"/>
-          <p:nvPr/>
-        </p:nvSpPr>
-        <p:spPr>
-          <a:xfrm>
-            <a:off x="640080" y="4133088"/>
-            <a:ext cx="10881360" cy="411480"/>
-          </a:xfrm>
-          <a:prstGeom prst="rect">
-            <a:avLst/>
-          </a:prstGeom>
-          <a:noFill/>
-        </p:spPr>
-        <p:txBody>
-          <a:bodyPr wrap="square">
-            <a:spAutoFit/>
-          </a:bodyPr>
-          <a:lstStyle/>
-          <a:p>
-            <a:r>
-              <a:rPr sz="2000" b="0">
-                <a:solidFill>
-                  <a:srgbClr val="333333"/>
-                </a:solidFill>
-                <a:latin typeface="Bricolage Grotesque"/>
-              </a:rPr>
-              <a:t>Coupé, il vaut pour toutes vos conversations, jusqu'à le réactiver.</a:t>
+              <a:t>Dossier innovant : Nouveau chat › Temporaire, exclu de l'entraînement.</a:t>
             </a:r>
           </a:p>
         </p:txBody>
@@ -12322,7 +12326,7 @@
                 </a:solidFill>
                 <a:latin typeface="Bricolage Grotesque"/>
               </a:rPr>
-              <a:t>Ce que l'outil retient de votre quotidien</a:t>
+              <a:t>L'entraînement : au cas par cas, comme vous le souhaitez</a:t>
             </a:r>
           </a:p>
         </p:txBody>
@@ -12356,7 +12360,7 @@
                 </a:solidFill>
                 <a:latin typeface="Bricolage Grotesque"/>
               </a:rPr>
-              <a:t>La mémoire : ChatGPT retient des faits sur vous, d'un échange à l'autre.</a:t>
+              <a:t>Par défaut : vous contribuez à améliorer le modèle. C'est un choix légitime.</a:t>
             </a:r>
           </a:p>
         </p:txBody>
@@ -12390,7 +12394,75 @@
                 </a:solidFill>
                 <a:latin typeface="Bricolage Grotesque"/>
               </a:rPr>
-              <a:t>Paramètres › Personnalisation : la consulter, l'effacer, la couper.</a:t>
+              <a:t>Dossier innovant : Nouveau chat › Temporaire, exclu de l'entraînement.</a:t>
+            </a:r>
+          </a:p>
+        </p:txBody>
+      </p:sp>
+      <p:sp>
+        <p:nvSpPr>
+          <p:cNvPr id="8" name="TextBox 7"/>
+          <p:cNvSpPr txBox="1"/>
+          <p:nvPr/>
+        </p:nvSpPr>
+        <p:spPr>
+          <a:xfrm>
+            <a:off x="640080" y="3611880"/>
+            <a:ext cx="10881360" cy="411480"/>
+          </a:xfrm>
+          <a:prstGeom prst="rect">
+            <a:avLst/>
+          </a:prstGeom>
+          <a:noFill/>
+        </p:spPr>
+        <p:txBody>
+          <a:bodyPr wrap="square">
+            <a:spAutoFit/>
+          </a:bodyPr>
+          <a:lstStyle/>
+          <a:p>
+            <a:r>
+              <a:rPr sz="2000" b="1">
+                <a:solidFill>
+                  <a:srgbClr val="1B5E6B"/>
+                </a:solidFill>
+                <a:latin typeface="Bricolage Grotesque"/>
+              </a:rPr>
+              <a:t>Piège : enregistré, le chat temporaire reprend vos réglages habituels.</a:t>
+            </a:r>
+          </a:p>
+        </p:txBody>
+      </p:sp>
+      <p:sp>
+        <p:nvSpPr>
+          <p:cNvPr id="9" name="TextBox 8"/>
+          <p:cNvSpPr txBox="1"/>
+          <p:nvPr/>
+        </p:nvSpPr>
+        <p:spPr>
+          <a:xfrm>
+            <a:off x="640080" y="4133088"/>
+            <a:ext cx="10881360" cy="411480"/>
+          </a:xfrm>
+          <a:prstGeom prst="rect">
+            <a:avLst/>
+          </a:prstGeom>
+          <a:noFill/>
+        </p:spPr>
+        <p:txBody>
+          <a:bodyPr wrap="square">
+            <a:spAutoFit/>
+          </a:bodyPr>
+          <a:lstStyle/>
+          <a:p>
+            <a:r>
+              <a:rPr sz="2000" b="0">
+                <a:solidFill>
+                  <a:srgbClr val="333333"/>
+                </a:solidFill>
+                <a:latin typeface="Bricolage Grotesque"/>
+              </a:rPr>
+              <a:t>Le réglage global (Contrôles des données) vaut, lui, pour tout le compte.</a:t>
             </a:r>
           </a:p>
         </p:txBody>
@@ -12645,74 +12717,6 @@
           </a:p>
         </p:txBody>
       </p:sp>
-      <p:sp>
-        <p:nvSpPr>
-          <p:cNvPr id="8" name="TextBox 7"/>
-          <p:cNvSpPr txBox="1"/>
-          <p:nvPr/>
-        </p:nvSpPr>
-        <p:spPr>
-          <a:xfrm>
-            <a:off x="640080" y="3611880"/>
-            <a:ext cx="10881360" cy="411480"/>
-          </a:xfrm>
-          <a:prstGeom prst="rect">
-            <a:avLst/>
-          </a:prstGeom>
-          <a:noFill/>
-        </p:spPr>
-        <p:txBody>
-          <a:bodyPr wrap="square">
-            <a:spAutoFit/>
-          </a:bodyPr>
-          <a:lstStyle/>
-          <a:p>
-            <a:r>
-              <a:rPr sz="2000" b="1">
-                <a:solidFill>
-                  <a:srgbClr val="1B5E6B"/>
-                </a:solidFill>
-                <a:latin typeface="Bricolage Grotesque"/>
-              </a:rPr>
-              <a:t>Mémoire et entraînement sont deux réglages distincts.</a:t>
-            </a:r>
-          </a:p>
-        </p:txBody>
-      </p:sp>
-      <p:sp>
-        <p:nvSpPr>
-          <p:cNvPr id="9" name="TextBox 8"/>
-          <p:cNvSpPr txBox="1"/>
-          <p:nvPr/>
-        </p:nvSpPr>
-        <p:spPr>
-          <a:xfrm>
-            <a:off x="640080" y="4133088"/>
-            <a:ext cx="10881360" cy="411480"/>
-          </a:xfrm>
-          <a:prstGeom prst="rect">
-            <a:avLst/>
-          </a:prstGeom>
-          <a:noFill/>
-        </p:spPr>
-        <p:txBody>
-          <a:bodyPr wrap="square">
-            <a:spAutoFit/>
-          </a:bodyPr>
-          <a:lstStyle/>
-          <a:p>
-            <a:r>
-              <a:rPr sz="2000" b="0">
-                <a:solidFill>
-                  <a:srgbClr val="333333"/>
-                </a:solidFill>
-                <a:latin typeface="Bricolage Grotesque"/>
-              </a:rPr>
-              <a:t>La conversation temporaire n'utilise ni ne crée de souvenirs.</a:t>
-            </a:r>
-          </a:p>
-        </p:txBody>
-      </p:sp>
     </p:spTree>
   </p:cSld>
   <p:clrMapOvr>
@@ -12890,7 +12894,7 @@
                 </a:solidFill>
                 <a:latin typeface="Bricolage Grotesque"/>
               </a:rPr>
-              <a:t>En situation professionnelle : le cadre de l'établissement</a:t>
+              <a:t>Ce que l'outil retient de votre quotidien</a:t>
             </a:r>
           </a:p>
         </p:txBody>
@@ -12924,7 +12928,7 @@
                 </a:solidFill>
                 <a:latin typeface="Bricolage Grotesque"/>
               </a:rPr>
-              <a:t>La charte informatique et le DPO de la structure fixent la règle.</a:t>
+              <a:t>La mémoire : ChatGPT retient des faits sur vous, d'un échange à l'autre.</a:t>
             </a:r>
           </a:p>
         </p:txBody>
@@ -12958,7 +12962,75 @@
                 </a:solidFill>
                 <a:latin typeface="Bricolage Grotesque"/>
               </a:rPr>
-              <a:t>Santé, situation sociale : des données sensibles au sens du RGPD.</a:t>
+              <a:t>Paramètres › Personnalisation : la consulter, l'effacer, la couper.</a:t>
+            </a:r>
+          </a:p>
+        </p:txBody>
+      </p:sp>
+      <p:sp>
+        <p:nvSpPr>
+          <p:cNvPr id="8" name="TextBox 7"/>
+          <p:cNvSpPr txBox="1"/>
+          <p:nvPr/>
+        </p:nvSpPr>
+        <p:spPr>
+          <a:xfrm>
+            <a:off x="640080" y="3611880"/>
+            <a:ext cx="10881360" cy="411480"/>
+          </a:xfrm>
+          <a:prstGeom prst="rect">
+            <a:avLst/>
+          </a:prstGeom>
+          <a:noFill/>
+        </p:spPr>
+        <p:txBody>
+          <a:bodyPr wrap="square">
+            <a:spAutoFit/>
+          </a:bodyPr>
+          <a:lstStyle/>
+          <a:p>
+            <a:r>
+              <a:rPr sz="2000" b="1">
+                <a:solidFill>
+                  <a:srgbClr val="1B5E6B"/>
+                </a:solidFill>
+                <a:latin typeface="Bricolage Grotesque"/>
+              </a:rPr>
+              <a:t>Mémoire et entraînement sont deux réglages distincts.</a:t>
+            </a:r>
+          </a:p>
+        </p:txBody>
+      </p:sp>
+      <p:sp>
+        <p:nvSpPr>
+          <p:cNvPr id="9" name="TextBox 8"/>
+          <p:cNvSpPr txBox="1"/>
+          <p:nvPr/>
+        </p:nvSpPr>
+        <p:spPr>
+          <a:xfrm>
+            <a:off x="640080" y="4133088"/>
+            <a:ext cx="10881360" cy="411480"/>
+          </a:xfrm>
+          <a:prstGeom prst="rect">
+            <a:avLst/>
+          </a:prstGeom>
+          <a:noFill/>
+        </p:spPr>
+        <p:txBody>
+          <a:bodyPr wrap="square">
+            <a:spAutoFit/>
+          </a:bodyPr>
+          <a:lstStyle/>
+          <a:p>
+            <a:r>
+              <a:rPr sz="2000" b="0">
+                <a:solidFill>
+                  <a:srgbClr val="333333"/>
+                </a:solidFill>
+                <a:latin typeface="Bricolage Grotesque"/>
+              </a:rPr>
+              <a:t>Temporaire « non personnalisé » : ni lecture ni création de souvenirs.</a:t>
             </a:r>
           </a:p>
         </p:txBody>
@@ -13173,7 +13245,7 @@
                 </a:solidFill>
                 <a:latin typeface="Bricolage Grotesque"/>
               </a:rPr>
-              <a:t>Avant S2 :  Focus Midjourney &amp; Nano Banana, puis Claude — Les fondamentaux</a:t>
+              <a:t>Avant S2 :  Focus Midjourney &amp; Nano Banana, puis Claude : les fondamentaux</a:t>
             </a:r>
           </a:p>
         </p:txBody>
@@ -13496,74 +13568,6 @@
           </a:p>
         </p:txBody>
       </p:sp>
-      <p:sp>
-        <p:nvSpPr>
-          <p:cNvPr id="8" name="TextBox 7"/>
-          <p:cNvSpPr txBox="1"/>
-          <p:nvPr/>
-        </p:nvSpPr>
-        <p:spPr>
-          <a:xfrm>
-            <a:off x="640080" y="3611880"/>
-            <a:ext cx="10881360" cy="411480"/>
-          </a:xfrm>
-          <a:prstGeom prst="rect">
-            <a:avLst/>
-          </a:prstGeom>
-          <a:noFill/>
-        </p:spPr>
-        <p:txBody>
-          <a:bodyPr wrap="square">
-            <a:spAutoFit/>
-          </a:bodyPr>
-          <a:lstStyle/>
-          <a:p>
-            <a:r>
-              <a:rPr sz="2000" b="1">
-                <a:solidFill>
-                  <a:srgbClr val="1B5E6B"/>
-                </a:solidFill>
-                <a:latin typeface="Bricolage Grotesque"/>
-              </a:rPr>
-              <a:t>Un compte personnel n'est pas un outil validé par l'établissement.</a:t>
-            </a:r>
-          </a:p>
-        </p:txBody>
-      </p:sp>
-      <p:sp>
-        <p:nvSpPr>
-          <p:cNvPr id="9" name="TextBox 8"/>
-          <p:cNvSpPr txBox="1"/>
-          <p:nvPr/>
-        </p:nvSpPr>
-        <p:spPr>
-          <a:xfrm>
-            <a:off x="640080" y="4133088"/>
-            <a:ext cx="10881360" cy="411480"/>
-          </a:xfrm>
-          <a:prstGeom prst="rect">
-            <a:avLst/>
-          </a:prstGeom>
-          <a:noFill/>
-        </p:spPr>
-        <p:txBody>
-          <a:bodyPr wrap="square">
-            <a:spAutoFit/>
-          </a:bodyPr>
-          <a:lstStyle/>
-          <a:p>
-            <a:r>
-              <a:rPr sz="2000" b="1">
-                <a:solidFill>
-                  <a:srgbClr val="1B5E6B"/>
-                </a:solidFill>
-                <a:latin typeface="Bricolage Grotesque"/>
-              </a:rPr>
-              <a:t>Offres pro (Business, Enterprise) : pas d'entraînement par défaut, contrat.</a:t>
-            </a:r>
-          </a:p>
-        </p:txBody>
-      </p:sp>
     </p:spTree>
   </p:cSld>
   <p:clrMapOvr>
@@ -13741,51 +13745,42 @@
                 </a:solidFill>
                 <a:latin typeface="Bricolage Grotesque"/>
               </a:rPr>
-              <a:t>Avant d'envoyer, quatre questions</a:t>
-            </a:r>
-          </a:p>
-        </p:txBody>
-      </p:sp>
-      <p:sp>
-        <p:nvSpPr>
-          <p:cNvPr id="6" name="Rounded Rectangle 5"/>
-          <p:cNvSpPr/>
-          <p:nvPr/>
-        </p:nvSpPr>
-        <p:spPr>
-          <a:xfrm>
-            <a:off x="640080" y="2743200"/>
-            <a:ext cx="2331720" cy="777240"/>
-          </a:xfrm>
-          <a:prstGeom prst="roundRect">
-            <a:avLst/>
-          </a:prstGeom>
-          <a:solidFill>
-            <a:srgbClr val="1B5E6B"/>
-          </a:solidFill>
-          <a:ln>
-            <a:noFill/>
-          </a:ln>
-        </p:spPr>
-        <p:style>
-          <a:lnRef idx="1">
-            <a:schemeClr val="accent1"/>
-          </a:lnRef>
-          <a:fillRef idx="3">
-            <a:schemeClr val="accent1"/>
-          </a:fillRef>
-          <a:effectRef idx="2">
-            <a:schemeClr val="accent1"/>
-          </a:effectRef>
-          <a:fontRef idx="minor">
-            <a:schemeClr val="lt1"/>
-          </a:fontRef>
-        </p:style>
-        <p:txBody>
-          <a:bodyPr rtlCol="0" anchor="ctr"/>
-          <a:lstStyle/>
-          <a:p>
-            <a:pPr algn="ctr"/>
+              <a:t>En situation professionnelle : le cadre de l'établissement</a:t>
+            </a:r>
+          </a:p>
+        </p:txBody>
+      </p:sp>
+      <p:sp>
+        <p:nvSpPr>
+          <p:cNvPr id="6" name="TextBox 5"/>
+          <p:cNvSpPr txBox="1"/>
+          <p:nvPr/>
+        </p:nvSpPr>
+        <p:spPr>
+          <a:xfrm>
+            <a:off x="640080" y="2331720"/>
+            <a:ext cx="10881360" cy="411480"/>
+          </a:xfrm>
+          <a:prstGeom prst="rect">
+            <a:avLst/>
+          </a:prstGeom>
+          <a:noFill/>
+        </p:spPr>
+        <p:txBody>
+          <a:bodyPr wrap="square">
+            <a:spAutoFit/>
+          </a:bodyPr>
+          <a:lstStyle/>
+          <a:p>
+            <a:r>
+              <a:rPr sz="2000" b="1">
+                <a:solidFill>
+                  <a:srgbClr val="1B5E6B"/>
+                </a:solidFill>
+                <a:latin typeface="Bricolage Grotesque"/>
+              </a:rPr>
+              <a:t>La charte informatique et le DPO de la structure fixent la règle.</a:t>
+            </a:r>
           </a:p>
         </p:txBody>
       </p:sp>
@@ -13797,30 +13792,28 @@
         </p:nvSpPr>
         <p:spPr>
           <a:xfrm>
-            <a:off x="731520" y="2907792"/>
-            <a:ext cx="2148840" cy="502920"/>
-          </a:xfrm>
-          <a:prstGeom prst="rect">
-            <a:avLst/>
-          </a:prstGeom>
-          <a:noFill/>
-        </p:spPr>
-        <p:txBody>
-          <a:bodyPr wrap="square">
-            <a:spAutoFit/>
-          </a:bodyPr>
-          <a:lstStyle/>
-          <a:p>
-            <a:pPr algn="ctr"/>
-            <a:r>
-              <a:rPr sz="1400" b="1">
-                <a:solidFill>
-                  <a:srgbClr val="FFFFFF"/>
-                </a:solidFill>
-                <a:latin typeface="Bricolage Grotesque"/>
-              </a:rPr>
-              <a:t>Nominatif ?
-→ anonymiser</a:t>
+            <a:off x="640080" y="2852928"/>
+            <a:ext cx="10881360" cy="411480"/>
+          </a:xfrm>
+          <a:prstGeom prst="rect">
+            <a:avLst/>
+          </a:prstGeom>
+          <a:noFill/>
+        </p:spPr>
+        <p:txBody>
+          <a:bodyPr wrap="square">
+            <a:spAutoFit/>
+          </a:bodyPr>
+          <a:lstStyle/>
+          <a:p>
+            <a:r>
+              <a:rPr sz="2000" b="1">
+                <a:solidFill>
+                  <a:srgbClr val="1B5E6B"/>
+                </a:solidFill>
+                <a:latin typeface="Bricolage Grotesque"/>
+              </a:rPr>
+              <a:t>Santé, situation sociale : des données sensibles au sens du RGPD.</a:t>
             </a:r>
           </a:p>
         </p:txBody>
@@ -13833,371 +13826,62 @@
         </p:nvSpPr>
         <p:spPr>
           <a:xfrm>
-            <a:off x="3008376" y="2926080"/>
-            <a:ext cx="310896" cy="457200"/>
-          </a:xfrm>
-          <a:prstGeom prst="rect">
-            <a:avLst/>
-          </a:prstGeom>
-          <a:noFill/>
-        </p:spPr>
-        <p:txBody>
-          <a:bodyPr wrap="square">
-            <a:spAutoFit/>
-          </a:bodyPr>
-          <a:lstStyle/>
-          <a:p>
-            <a:pPr algn="ctr"/>
-            <a:r>
-              <a:rPr sz="2200" b="1">
-                <a:solidFill>
-                  <a:srgbClr val="E8A000"/>
-                </a:solidFill>
-                <a:latin typeface="Bricolage Grotesque"/>
-              </a:rPr>
-              <a:t>→</a:t>
-            </a:r>
-          </a:p>
-        </p:txBody>
-      </p:sp>
-      <p:sp>
-        <p:nvSpPr>
-          <p:cNvPr id="9" name="Rounded Rectangle 8"/>
-          <p:cNvSpPr/>
-          <p:nvPr/>
-        </p:nvSpPr>
-        <p:spPr>
-          <a:xfrm>
-            <a:off x="3355848" y="2743200"/>
-            <a:ext cx="2331720" cy="777240"/>
-          </a:xfrm>
-          <a:prstGeom prst="roundRect">
-            <a:avLst/>
-          </a:prstGeom>
-          <a:solidFill>
-            <a:srgbClr val="1E5565"/>
-          </a:solidFill>
-          <a:ln>
-            <a:noFill/>
-          </a:ln>
-        </p:spPr>
-        <p:style>
-          <a:lnRef idx="1">
-            <a:schemeClr val="accent1"/>
-          </a:lnRef>
-          <a:fillRef idx="3">
-            <a:schemeClr val="accent1"/>
-          </a:fillRef>
-          <a:effectRef idx="2">
-            <a:schemeClr val="accent1"/>
-          </a:effectRef>
-          <a:fontRef idx="minor">
-            <a:schemeClr val="lt1"/>
-          </a:fontRef>
-        </p:style>
-        <p:txBody>
-          <a:bodyPr rtlCol="0" anchor="ctr"/>
-          <a:lstStyle/>
-          <a:p>
-            <a:pPr algn="ctr"/>
-          </a:p>
-        </p:txBody>
-      </p:sp>
-      <p:sp>
-        <p:nvSpPr>
-          <p:cNvPr id="10" name="TextBox 9"/>
-          <p:cNvSpPr txBox="1"/>
-          <p:nvPr/>
-        </p:nvSpPr>
-        <p:spPr>
-          <a:xfrm>
-            <a:off x="3447288" y="2907792"/>
-            <a:ext cx="2148840" cy="502920"/>
-          </a:xfrm>
-          <a:prstGeom prst="rect">
-            <a:avLst/>
-          </a:prstGeom>
-          <a:noFill/>
-        </p:spPr>
-        <p:txBody>
-          <a:bodyPr wrap="square">
-            <a:spAutoFit/>
-          </a:bodyPr>
-          <a:lstStyle/>
-          <a:p>
-            <a:pPr algn="ctr"/>
-            <a:r>
-              <a:rPr sz="1400" b="1">
-                <a:solidFill>
-                  <a:srgbClr val="FFFFFF"/>
-                </a:solidFill>
-                <a:latin typeface="Bricolage Grotesque"/>
-              </a:rPr>
-              <a:t>Dossier innovant ?
-→ temporaire</a:t>
-            </a:r>
-          </a:p>
-        </p:txBody>
-      </p:sp>
-      <p:sp>
-        <p:nvSpPr>
-          <p:cNvPr id="11" name="TextBox 10"/>
-          <p:cNvSpPr txBox="1"/>
-          <p:nvPr/>
-        </p:nvSpPr>
-        <p:spPr>
-          <a:xfrm>
-            <a:off x="5724144" y="2926080"/>
-            <a:ext cx="310896" cy="457200"/>
-          </a:xfrm>
-          <a:prstGeom prst="rect">
-            <a:avLst/>
-          </a:prstGeom>
-          <a:noFill/>
-        </p:spPr>
-        <p:txBody>
-          <a:bodyPr wrap="square">
-            <a:spAutoFit/>
-          </a:bodyPr>
-          <a:lstStyle/>
-          <a:p>
-            <a:pPr algn="ctr"/>
-            <a:r>
-              <a:rPr sz="2200" b="1">
-                <a:solidFill>
-                  <a:srgbClr val="E8A000"/>
-                </a:solidFill>
-                <a:latin typeface="Bricolage Grotesque"/>
-              </a:rPr>
-              <a:t>→</a:t>
-            </a:r>
-          </a:p>
-        </p:txBody>
-      </p:sp>
-      <p:sp>
-        <p:nvSpPr>
-          <p:cNvPr id="12" name="Rounded Rectangle 11"/>
-          <p:cNvSpPr/>
-          <p:nvPr/>
-        </p:nvSpPr>
-        <p:spPr>
-          <a:xfrm>
-            <a:off x="6071616" y="2743200"/>
-            <a:ext cx="2331720" cy="777240"/>
-          </a:xfrm>
-          <a:prstGeom prst="roundRect">
-            <a:avLst/>
-          </a:prstGeom>
-          <a:solidFill>
-            <a:srgbClr val="1B5E6B"/>
-          </a:solidFill>
-          <a:ln>
-            <a:noFill/>
-          </a:ln>
-        </p:spPr>
-        <p:style>
-          <a:lnRef idx="1">
-            <a:schemeClr val="accent1"/>
-          </a:lnRef>
-          <a:fillRef idx="3">
-            <a:schemeClr val="accent1"/>
-          </a:fillRef>
-          <a:effectRef idx="2">
-            <a:schemeClr val="accent1"/>
-          </a:effectRef>
-          <a:fontRef idx="minor">
-            <a:schemeClr val="lt1"/>
-          </a:fontRef>
-        </p:style>
-        <p:txBody>
-          <a:bodyPr rtlCol="0" anchor="ctr"/>
-          <a:lstStyle/>
-          <a:p>
-            <a:pPr algn="ctr"/>
-          </a:p>
-        </p:txBody>
-      </p:sp>
-      <p:sp>
-        <p:nvSpPr>
-          <p:cNvPr id="13" name="TextBox 12"/>
-          <p:cNvSpPr txBox="1"/>
-          <p:nvPr/>
-        </p:nvSpPr>
-        <p:spPr>
-          <a:xfrm>
-            <a:off x="6163056" y="2907792"/>
-            <a:ext cx="2148840" cy="502920"/>
-          </a:xfrm>
-          <a:prstGeom prst="rect">
-            <a:avLst/>
-          </a:prstGeom>
-          <a:noFill/>
-        </p:spPr>
-        <p:txBody>
-          <a:bodyPr wrap="square">
-            <a:spAutoFit/>
-          </a:bodyPr>
-          <a:lstStyle/>
-          <a:p>
-            <a:pPr algn="ctr"/>
-            <a:r>
-              <a:rPr sz="1400" b="1">
-                <a:solidFill>
-                  <a:srgbClr val="FFFFFF"/>
-                </a:solidFill>
-                <a:latin typeface="Bricolage Grotesque"/>
-              </a:rPr>
-              <a:t>Cadre pro ?
-→ outil validé</a:t>
-            </a:r>
-          </a:p>
-        </p:txBody>
-      </p:sp>
-      <p:sp>
-        <p:nvSpPr>
-          <p:cNvPr id="14" name="TextBox 13"/>
-          <p:cNvSpPr txBox="1"/>
-          <p:nvPr/>
-        </p:nvSpPr>
-        <p:spPr>
-          <a:xfrm>
-            <a:off x="8439912" y="2926080"/>
-            <a:ext cx="310896" cy="457200"/>
-          </a:xfrm>
-          <a:prstGeom prst="rect">
-            <a:avLst/>
-          </a:prstGeom>
-          <a:noFill/>
-        </p:spPr>
-        <p:txBody>
-          <a:bodyPr wrap="square">
-            <a:spAutoFit/>
-          </a:bodyPr>
-          <a:lstStyle/>
-          <a:p>
-            <a:pPr algn="ctr"/>
-            <a:r>
-              <a:rPr sz="2200" b="1">
-                <a:solidFill>
-                  <a:srgbClr val="E8A000"/>
-                </a:solidFill>
-                <a:latin typeface="Bricolage Grotesque"/>
-              </a:rPr>
-              <a:t>→</a:t>
-            </a:r>
-          </a:p>
-        </p:txBody>
-      </p:sp>
-      <p:sp>
-        <p:nvSpPr>
-          <p:cNvPr id="15" name="Rounded Rectangle 14"/>
-          <p:cNvSpPr/>
-          <p:nvPr/>
-        </p:nvSpPr>
-        <p:spPr>
-          <a:xfrm>
-            <a:off x="8787384" y="2743200"/>
-            <a:ext cx="2331720" cy="777240"/>
-          </a:xfrm>
-          <a:prstGeom prst="roundRect">
-            <a:avLst/>
-          </a:prstGeom>
-          <a:solidFill>
-            <a:srgbClr val="1E5565"/>
-          </a:solidFill>
-          <a:ln>
-            <a:noFill/>
-          </a:ln>
-        </p:spPr>
-        <p:style>
-          <a:lnRef idx="1">
-            <a:schemeClr val="accent1"/>
-          </a:lnRef>
-          <a:fillRef idx="3">
-            <a:schemeClr val="accent1"/>
-          </a:fillRef>
-          <a:effectRef idx="2">
-            <a:schemeClr val="accent1"/>
-          </a:effectRef>
-          <a:fontRef idx="minor">
-            <a:schemeClr val="lt1"/>
-          </a:fontRef>
-        </p:style>
-        <p:txBody>
-          <a:bodyPr rtlCol="0" anchor="ctr"/>
-          <a:lstStyle/>
-          <a:p>
-            <a:pPr algn="ctr"/>
-          </a:p>
-        </p:txBody>
-      </p:sp>
-      <p:sp>
-        <p:nvSpPr>
-          <p:cNvPr id="16" name="TextBox 15"/>
-          <p:cNvSpPr txBox="1"/>
-          <p:nvPr/>
-        </p:nvSpPr>
-        <p:spPr>
-          <a:xfrm>
-            <a:off x="8878824" y="2907792"/>
-            <a:ext cx="2148840" cy="502920"/>
-          </a:xfrm>
-          <a:prstGeom prst="rect">
-            <a:avLst/>
-          </a:prstGeom>
-          <a:noFill/>
-        </p:spPr>
-        <p:txBody>
-          <a:bodyPr wrap="square">
-            <a:spAutoFit/>
-          </a:bodyPr>
-          <a:lstStyle/>
-          <a:p>
-            <a:pPr algn="ctr"/>
-            <a:r>
-              <a:rPr sz="1400" b="1">
-                <a:solidFill>
-                  <a:srgbClr val="FFFFFF"/>
-                </a:solidFill>
-                <a:latin typeface="Bricolage Grotesque"/>
-              </a:rPr>
-              <a:t>Rien de tout ça ?
-→ allez-y</a:t>
-            </a:r>
-          </a:p>
-        </p:txBody>
-      </p:sp>
-      <p:sp>
-        <p:nvSpPr>
-          <p:cNvPr id="17" name="TextBox 16"/>
-          <p:cNvSpPr txBox="1"/>
-          <p:nvPr/>
-        </p:nvSpPr>
-        <p:spPr>
-          <a:xfrm>
-            <a:off x="640080" y="4114800"/>
-            <a:ext cx="10972800" cy="640080"/>
-          </a:xfrm>
-          <a:prstGeom prst="rect">
-            <a:avLst/>
-          </a:prstGeom>
-          <a:noFill/>
-        </p:spPr>
-        <p:txBody>
-          <a:bodyPr wrap="square">
-            <a:spAutoFit/>
-          </a:bodyPr>
-          <a:lstStyle/>
-          <a:p>
-            <a:pPr algn="l"/>
-            <a:r>
-              <a:rPr sz="1800" b="1">
+            <a:off x="640080" y="3611880"/>
+            <a:ext cx="10881360" cy="411480"/>
+          </a:xfrm>
+          <a:prstGeom prst="rect">
+            <a:avLst/>
+          </a:prstGeom>
+          <a:noFill/>
+        </p:spPr>
+        <p:txBody>
+          <a:bodyPr wrap="square">
+            <a:spAutoFit/>
+          </a:bodyPr>
+          <a:lstStyle/>
+          <a:p>
+            <a:r>
+              <a:rPr sz="2000" b="1">
                 <a:solidFill>
                   <a:srgbClr val="1B5E6B"/>
                 </a:solidFill>
                 <a:latin typeface="Bricolage Grotesque"/>
               </a:rPr>
-              <a:t>Votre réflexe, à écrire dans votre cadre de confidentialité.</a:t>
+              <a:t>Un compte personnel n'est pas un outil validé par l'établissement.</a:t>
+            </a:r>
+          </a:p>
+        </p:txBody>
+      </p:sp>
+      <p:sp>
+        <p:nvSpPr>
+          <p:cNvPr id="9" name="TextBox 8"/>
+          <p:cNvSpPr txBox="1"/>
+          <p:nvPr/>
+        </p:nvSpPr>
+        <p:spPr>
+          <a:xfrm>
+            <a:off x="640080" y="4133088"/>
+            <a:ext cx="10881360" cy="411480"/>
+          </a:xfrm>
+          <a:prstGeom prst="rect">
+            <a:avLst/>
+          </a:prstGeom>
+          <a:noFill/>
+        </p:spPr>
+        <p:txBody>
+          <a:bodyPr wrap="square">
+            <a:spAutoFit/>
+          </a:bodyPr>
+          <a:lstStyle/>
+          <a:p>
+            <a:r>
+              <a:rPr sz="2000" b="1">
+                <a:solidFill>
+                  <a:srgbClr val="1B5E6B"/>
+                </a:solidFill>
+                <a:latin typeface="Bricolage Grotesque"/>
+              </a:rPr>
+              <a:t>Offres pro (Business, Enterprise) : pas d'entraînement par défaut, contrat.</a:t>
             </a:r>
           </a:p>
         </p:txBody>
@@ -14344,7 +14028,7 @@
                 </a:solidFill>
                 <a:latin typeface="Bricolage Grotesque"/>
               </a:rPr>
-              <a:t>Protéger vos contenus</a:t>
+              <a:t>Vos données</a:t>
             </a:r>
           </a:p>
         </p:txBody>
@@ -14379,75 +14063,463 @@
                 </a:solidFill>
                 <a:latin typeface="Bricolage Grotesque"/>
               </a:rPr>
-              <a:t>Votre concept original, confié à un outil grand public</a:t>
-            </a:r>
-          </a:p>
-        </p:txBody>
-      </p:sp>
-      <p:sp>
-        <p:nvSpPr>
-          <p:cNvPr id="6" name="TextBox 5"/>
-          <p:cNvSpPr txBox="1"/>
-          <p:nvPr/>
-        </p:nvSpPr>
-        <p:spPr>
-          <a:xfrm>
-            <a:off x="640080" y="2331720"/>
-            <a:ext cx="10881360" cy="411480"/>
-          </a:xfrm>
-          <a:prstGeom prst="rect">
-            <a:avLst/>
-          </a:prstGeom>
-          <a:noFill/>
-        </p:spPr>
-        <p:txBody>
-          <a:bodyPr wrap="square">
-            <a:spAutoFit/>
-          </a:bodyPr>
-          <a:lstStyle/>
-          <a:p>
-            <a:r>
-              <a:rPr sz="2000" b="1">
+              <a:t>Avant d'envoyer, quatre questions</a:t>
+            </a:r>
+          </a:p>
+        </p:txBody>
+      </p:sp>
+      <p:sp>
+        <p:nvSpPr>
+          <p:cNvPr id="6" name="Rounded Rectangle 5"/>
+          <p:cNvSpPr/>
+          <p:nvPr/>
+        </p:nvSpPr>
+        <p:spPr>
+          <a:xfrm>
+            <a:off x="640080" y="2743200"/>
+            <a:ext cx="2331720" cy="777240"/>
+          </a:xfrm>
+          <a:prstGeom prst="roundRect">
+            <a:avLst/>
+          </a:prstGeom>
+          <a:solidFill>
+            <a:srgbClr val="1B5E6B"/>
+          </a:solidFill>
+          <a:ln>
+            <a:noFill/>
+          </a:ln>
+        </p:spPr>
+        <p:style>
+          <a:lnRef idx="1">
+            <a:schemeClr val="accent1"/>
+          </a:lnRef>
+          <a:fillRef idx="3">
+            <a:schemeClr val="accent1"/>
+          </a:fillRef>
+          <a:effectRef idx="2">
+            <a:schemeClr val="accent1"/>
+          </a:effectRef>
+          <a:fontRef idx="minor">
+            <a:schemeClr val="lt1"/>
+          </a:fontRef>
+        </p:style>
+        <p:txBody>
+          <a:bodyPr rtlCol="0" anchor="ctr"/>
+          <a:lstStyle/>
+          <a:p>
+            <a:pPr algn="ctr"/>
+          </a:p>
+        </p:txBody>
+      </p:sp>
+      <p:sp>
+        <p:nvSpPr>
+          <p:cNvPr id="7" name="TextBox 6"/>
+          <p:cNvSpPr txBox="1"/>
+          <p:nvPr/>
+        </p:nvSpPr>
+        <p:spPr>
+          <a:xfrm>
+            <a:off x="731520" y="2907792"/>
+            <a:ext cx="2148840" cy="502920"/>
+          </a:xfrm>
+          <a:prstGeom prst="rect">
+            <a:avLst/>
+          </a:prstGeom>
+          <a:noFill/>
+        </p:spPr>
+        <p:txBody>
+          <a:bodyPr wrap="square">
+            <a:spAutoFit/>
+          </a:bodyPr>
+          <a:lstStyle/>
+          <a:p>
+            <a:pPr algn="ctr"/>
+            <a:r>
+              <a:rPr sz="1400" b="1">
+                <a:solidFill>
+                  <a:srgbClr val="FFFFFF"/>
+                </a:solidFill>
+                <a:latin typeface="Bricolage Grotesque"/>
+              </a:rPr>
+              <a:t>Nominatif ?
+→ anonymiser</a:t>
+            </a:r>
+          </a:p>
+        </p:txBody>
+      </p:sp>
+      <p:sp>
+        <p:nvSpPr>
+          <p:cNvPr id="8" name="TextBox 7"/>
+          <p:cNvSpPr txBox="1"/>
+          <p:nvPr/>
+        </p:nvSpPr>
+        <p:spPr>
+          <a:xfrm>
+            <a:off x="3008376" y="2926080"/>
+            <a:ext cx="310896" cy="457200"/>
+          </a:xfrm>
+          <a:prstGeom prst="rect">
+            <a:avLst/>
+          </a:prstGeom>
+          <a:noFill/>
+        </p:spPr>
+        <p:txBody>
+          <a:bodyPr wrap="square">
+            <a:spAutoFit/>
+          </a:bodyPr>
+          <a:lstStyle/>
+          <a:p>
+            <a:pPr algn="ctr"/>
+            <a:r>
+              <a:rPr sz="2200" b="1">
+                <a:solidFill>
+                  <a:srgbClr val="E8A000"/>
+                </a:solidFill>
+                <a:latin typeface="Bricolage Grotesque"/>
+              </a:rPr>
+              <a:t>→</a:t>
+            </a:r>
+          </a:p>
+        </p:txBody>
+      </p:sp>
+      <p:sp>
+        <p:nvSpPr>
+          <p:cNvPr id="9" name="Rounded Rectangle 8"/>
+          <p:cNvSpPr/>
+          <p:nvPr/>
+        </p:nvSpPr>
+        <p:spPr>
+          <a:xfrm>
+            <a:off x="3355848" y="2743200"/>
+            <a:ext cx="2331720" cy="777240"/>
+          </a:xfrm>
+          <a:prstGeom prst="roundRect">
+            <a:avLst/>
+          </a:prstGeom>
+          <a:solidFill>
+            <a:srgbClr val="1E5565"/>
+          </a:solidFill>
+          <a:ln>
+            <a:noFill/>
+          </a:ln>
+        </p:spPr>
+        <p:style>
+          <a:lnRef idx="1">
+            <a:schemeClr val="accent1"/>
+          </a:lnRef>
+          <a:fillRef idx="3">
+            <a:schemeClr val="accent1"/>
+          </a:fillRef>
+          <a:effectRef idx="2">
+            <a:schemeClr val="accent1"/>
+          </a:effectRef>
+          <a:fontRef idx="minor">
+            <a:schemeClr val="lt1"/>
+          </a:fontRef>
+        </p:style>
+        <p:txBody>
+          <a:bodyPr rtlCol="0" anchor="ctr"/>
+          <a:lstStyle/>
+          <a:p>
+            <a:pPr algn="ctr"/>
+          </a:p>
+        </p:txBody>
+      </p:sp>
+      <p:sp>
+        <p:nvSpPr>
+          <p:cNvPr id="10" name="TextBox 9"/>
+          <p:cNvSpPr txBox="1"/>
+          <p:nvPr/>
+        </p:nvSpPr>
+        <p:spPr>
+          <a:xfrm>
+            <a:off x="3447288" y="2907792"/>
+            <a:ext cx="2148840" cy="502920"/>
+          </a:xfrm>
+          <a:prstGeom prst="rect">
+            <a:avLst/>
+          </a:prstGeom>
+          <a:noFill/>
+        </p:spPr>
+        <p:txBody>
+          <a:bodyPr wrap="square">
+            <a:spAutoFit/>
+          </a:bodyPr>
+          <a:lstStyle/>
+          <a:p>
+            <a:pPr algn="ctr"/>
+            <a:r>
+              <a:rPr sz="1400" b="1">
+                <a:solidFill>
+                  <a:srgbClr val="FFFFFF"/>
+                </a:solidFill>
+                <a:latin typeface="Bricolage Grotesque"/>
+              </a:rPr>
+              <a:t>Dossier innovant ?
+→ temporaire</a:t>
+            </a:r>
+          </a:p>
+        </p:txBody>
+      </p:sp>
+      <p:sp>
+        <p:nvSpPr>
+          <p:cNvPr id="11" name="TextBox 10"/>
+          <p:cNvSpPr txBox="1"/>
+          <p:nvPr/>
+        </p:nvSpPr>
+        <p:spPr>
+          <a:xfrm>
+            <a:off x="5724144" y="2926080"/>
+            <a:ext cx="310896" cy="457200"/>
+          </a:xfrm>
+          <a:prstGeom prst="rect">
+            <a:avLst/>
+          </a:prstGeom>
+          <a:noFill/>
+        </p:spPr>
+        <p:txBody>
+          <a:bodyPr wrap="square">
+            <a:spAutoFit/>
+          </a:bodyPr>
+          <a:lstStyle/>
+          <a:p>
+            <a:pPr algn="ctr"/>
+            <a:r>
+              <a:rPr sz="2200" b="1">
+                <a:solidFill>
+                  <a:srgbClr val="E8A000"/>
+                </a:solidFill>
+                <a:latin typeface="Bricolage Grotesque"/>
+              </a:rPr>
+              <a:t>→</a:t>
+            </a:r>
+          </a:p>
+        </p:txBody>
+      </p:sp>
+      <p:sp>
+        <p:nvSpPr>
+          <p:cNvPr id="12" name="Rounded Rectangle 11"/>
+          <p:cNvSpPr/>
+          <p:nvPr/>
+        </p:nvSpPr>
+        <p:spPr>
+          <a:xfrm>
+            <a:off x="6071616" y="2743200"/>
+            <a:ext cx="2331720" cy="777240"/>
+          </a:xfrm>
+          <a:prstGeom prst="roundRect">
+            <a:avLst/>
+          </a:prstGeom>
+          <a:solidFill>
+            <a:srgbClr val="1B5E6B"/>
+          </a:solidFill>
+          <a:ln>
+            <a:noFill/>
+          </a:ln>
+        </p:spPr>
+        <p:style>
+          <a:lnRef idx="1">
+            <a:schemeClr val="accent1"/>
+          </a:lnRef>
+          <a:fillRef idx="3">
+            <a:schemeClr val="accent1"/>
+          </a:fillRef>
+          <a:effectRef idx="2">
+            <a:schemeClr val="accent1"/>
+          </a:effectRef>
+          <a:fontRef idx="minor">
+            <a:schemeClr val="lt1"/>
+          </a:fontRef>
+        </p:style>
+        <p:txBody>
+          <a:bodyPr rtlCol="0" anchor="ctr"/>
+          <a:lstStyle/>
+          <a:p>
+            <a:pPr algn="ctr"/>
+          </a:p>
+        </p:txBody>
+      </p:sp>
+      <p:sp>
+        <p:nvSpPr>
+          <p:cNvPr id="13" name="TextBox 12"/>
+          <p:cNvSpPr txBox="1"/>
+          <p:nvPr/>
+        </p:nvSpPr>
+        <p:spPr>
+          <a:xfrm>
+            <a:off x="6163056" y="2907792"/>
+            <a:ext cx="2148840" cy="502920"/>
+          </a:xfrm>
+          <a:prstGeom prst="rect">
+            <a:avLst/>
+          </a:prstGeom>
+          <a:noFill/>
+        </p:spPr>
+        <p:txBody>
+          <a:bodyPr wrap="square">
+            <a:spAutoFit/>
+          </a:bodyPr>
+          <a:lstStyle/>
+          <a:p>
+            <a:pPr algn="ctr"/>
+            <a:r>
+              <a:rPr sz="1400" b="1">
+                <a:solidFill>
+                  <a:srgbClr val="FFFFFF"/>
+                </a:solidFill>
+                <a:latin typeface="Bricolage Grotesque"/>
+              </a:rPr>
+              <a:t>Cadre pro ?
+→ outil validé</a:t>
+            </a:r>
+          </a:p>
+        </p:txBody>
+      </p:sp>
+      <p:sp>
+        <p:nvSpPr>
+          <p:cNvPr id="14" name="TextBox 13"/>
+          <p:cNvSpPr txBox="1"/>
+          <p:nvPr/>
+        </p:nvSpPr>
+        <p:spPr>
+          <a:xfrm>
+            <a:off x="8439912" y="2926080"/>
+            <a:ext cx="310896" cy="457200"/>
+          </a:xfrm>
+          <a:prstGeom prst="rect">
+            <a:avLst/>
+          </a:prstGeom>
+          <a:noFill/>
+        </p:spPr>
+        <p:txBody>
+          <a:bodyPr wrap="square">
+            <a:spAutoFit/>
+          </a:bodyPr>
+          <a:lstStyle/>
+          <a:p>
+            <a:pPr algn="ctr"/>
+            <a:r>
+              <a:rPr sz="2200" b="1">
+                <a:solidFill>
+                  <a:srgbClr val="E8A000"/>
+                </a:solidFill>
+                <a:latin typeface="Bricolage Grotesque"/>
+              </a:rPr>
+              <a:t>→</a:t>
+            </a:r>
+          </a:p>
+        </p:txBody>
+      </p:sp>
+      <p:sp>
+        <p:nvSpPr>
+          <p:cNvPr id="15" name="Rounded Rectangle 14"/>
+          <p:cNvSpPr/>
+          <p:nvPr/>
+        </p:nvSpPr>
+        <p:spPr>
+          <a:xfrm>
+            <a:off x="8787384" y="2743200"/>
+            <a:ext cx="2331720" cy="777240"/>
+          </a:xfrm>
+          <a:prstGeom prst="roundRect">
+            <a:avLst/>
+          </a:prstGeom>
+          <a:solidFill>
+            <a:srgbClr val="1E5565"/>
+          </a:solidFill>
+          <a:ln>
+            <a:noFill/>
+          </a:ln>
+        </p:spPr>
+        <p:style>
+          <a:lnRef idx="1">
+            <a:schemeClr val="accent1"/>
+          </a:lnRef>
+          <a:fillRef idx="3">
+            <a:schemeClr val="accent1"/>
+          </a:fillRef>
+          <a:effectRef idx="2">
+            <a:schemeClr val="accent1"/>
+          </a:effectRef>
+          <a:fontRef idx="minor">
+            <a:schemeClr val="lt1"/>
+          </a:fontRef>
+        </p:style>
+        <p:txBody>
+          <a:bodyPr rtlCol="0" anchor="ctr"/>
+          <a:lstStyle/>
+          <a:p>
+            <a:pPr algn="ctr"/>
+          </a:p>
+        </p:txBody>
+      </p:sp>
+      <p:sp>
+        <p:nvSpPr>
+          <p:cNvPr id="16" name="TextBox 15"/>
+          <p:cNvSpPr txBox="1"/>
+          <p:nvPr/>
+        </p:nvSpPr>
+        <p:spPr>
+          <a:xfrm>
+            <a:off x="8878824" y="2907792"/>
+            <a:ext cx="2148840" cy="502920"/>
+          </a:xfrm>
+          <a:prstGeom prst="rect">
+            <a:avLst/>
+          </a:prstGeom>
+          <a:noFill/>
+        </p:spPr>
+        <p:txBody>
+          <a:bodyPr wrap="square">
+            <a:spAutoFit/>
+          </a:bodyPr>
+          <a:lstStyle/>
+          <a:p>
+            <a:pPr algn="ctr"/>
+            <a:r>
+              <a:rPr sz="1400" b="1">
+                <a:solidFill>
+                  <a:srgbClr val="FFFFFF"/>
+                </a:solidFill>
+                <a:latin typeface="Bricolage Grotesque"/>
+              </a:rPr>
+              <a:t>Rien de tout ça ?
+→ allez-y</a:t>
+            </a:r>
+          </a:p>
+        </p:txBody>
+      </p:sp>
+      <p:sp>
+        <p:nvSpPr>
+          <p:cNvPr id="17" name="TextBox 16"/>
+          <p:cNvSpPr txBox="1"/>
+          <p:nvPr/>
+        </p:nvSpPr>
+        <p:spPr>
+          <a:xfrm>
+            <a:off x="640080" y="4114800"/>
+            <a:ext cx="10972800" cy="640080"/>
+          </a:xfrm>
+          <a:prstGeom prst="rect">
+            <a:avLst/>
+          </a:prstGeom>
+          <a:noFill/>
+        </p:spPr>
+        <p:txBody>
+          <a:bodyPr wrap="square">
+            <a:spAutoFit/>
+          </a:bodyPr>
+          <a:lstStyle/>
+          <a:p>
+            <a:pPr algn="l"/>
+            <a:r>
+              <a:rPr sz="1800" b="1">
                 <a:solidFill>
                   <a:srgbClr val="1B5E6B"/>
                 </a:solidFill>
                 <a:latin typeface="Bricolage Grotesque"/>
               </a:rPr>
-              <a:t>Conditions d'utilisation : relire ce que l'outil fait de vos données.</a:t>
-            </a:r>
-          </a:p>
-        </p:txBody>
-      </p:sp>
-      <p:sp>
-        <p:nvSpPr>
-          <p:cNvPr id="7" name="TextBox 6"/>
-          <p:cNvSpPr txBox="1"/>
-          <p:nvPr/>
-        </p:nvSpPr>
-        <p:spPr>
-          <a:xfrm>
-            <a:off x="640080" y="2852928"/>
-            <a:ext cx="10881360" cy="411480"/>
-          </a:xfrm>
-          <a:prstGeom prst="rect">
-            <a:avLst/>
-          </a:prstGeom>
-          <a:noFill/>
-        </p:spPr>
-        <p:txBody>
-          <a:bodyPr wrap="square">
-            <a:spAutoFit/>
-          </a:bodyPr>
-          <a:lstStyle/>
-          <a:p>
-            <a:r>
-              <a:rPr sz="2000" b="1">
-                <a:solidFill>
-                  <a:srgbClr val="1B5E6B"/>
-                </a:solidFill>
-                <a:latin typeface="Bricolage Grotesque"/>
-              </a:rPr>
-              <a:t>Travailler par fragments : ne pas confier le concept entier d'un coup.</a:t>
+              <a:t>Votre réflexe, à écrire dans votre cadre de confidentialité.</a:t>
             </a:r>
           </a:p>
         </p:txBody>
@@ -14702,74 +14774,6 @@
           </a:p>
         </p:txBody>
       </p:sp>
-      <p:sp>
-        <p:nvSpPr>
-          <p:cNvPr id="8" name="TextBox 7"/>
-          <p:cNvSpPr txBox="1"/>
-          <p:nvPr/>
-        </p:nvSpPr>
-        <p:spPr>
-          <a:xfrm>
-            <a:off x="640080" y="3611880"/>
-            <a:ext cx="10881360" cy="411480"/>
-          </a:xfrm>
-          <a:prstGeom prst="rect">
-            <a:avLst/>
-          </a:prstGeom>
-          <a:noFill/>
-        </p:spPr>
-        <p:txBody>
-          <a:bodyPr wrap="square">
-            <a:spAutoFit/>
-          </a:bodyPr>
-          <a:lstStyle/>
-          <a:p>
-            <a:r>
-              <a:rPr sz="2000" b="1">
-                <a:solidFill>
-                  <a:srgbClr val="1B5E6B"/>
-                </a:solidFill>
-                <a:latin typeface="Bricolage Grotesque"/>
-              </a:rPr>
-              <a:t>Antériorité datée : garder une trace de votre version, avant l'IA.</a:t>
-            </a:r>
-          </a:p>
-        </p:txBody>
-      </p:sp>
-      <p:sp>
-        <p:nvSpPr>
-          <p:cNvPr id="9" name="TextBox 8"/>
-          <p:cNvSpPr txBox="1"/>
-          <p:nvPr/>
-        </p:nvSpPr>
-        <p:spPr>
-          <a:xfrm>
-            <a:off x="640080" y="4133088"/>
-            <a:ext cx="10881360" cy="411480"/>
-          </a:xfrm>
-          <a:prstGeom prst="rect">
-            <a:avLst/>
-          </a:prstGeom>
-          <a:noFill/>
-        </p:spPr>
-        <p:txBody>
-          <a:bodyPr wrap="square">
-            <a:spAutoFit/>
-          </a:bodyPr>
-          <a:lstStyle/>
-          <a:p>
-            <a:r>
-              <a:rPr sz="2000" b="1">
-                <a:solidFill>
-                  <a:srgbClr val="1B5E6B"/>
-                </a:solidFill>
-                <a:latin typeface="Bricolage Grotesque"/>
-              </a:rPr>
-              <a:t>Titularité : ce que dit chaque outil de la propriété de ce qui en sort.</a:t>
-            </a:r>
-          </a:p>
-        </p:txBody>
-      </p:sp>
     </p:spTree>
   </p:cSld>
   <p:clrMapOvr>
@@ -14912,7 +14916,7 @@
                 </a:solidFill>
                 <a:latin typeface="Bricolage Grotesque"/>
               </a:rPr>
-              <a:t>Garder la main</a:t>
+              <a:t>Protéger vos contenus</a:t>
             </a:r>
           </a:p>
         </p:txBody>
@@ -14947,7 +14951,7 @@
                 </a:solidFill>
                 <a:latin typeface="Bricolage Grotesque"/>
               </a:rPr>
-              <a:t>Pour que l'IA reste un instrument de travail</a:t>
+              <a:t>Votre concept original, confié à un outil grand public</a:t>
             </a:r>
           </a:p>
         </p:txBody>
@@ -14981,7 +14985,7 @@
                 </a:solidFill>
                 <a:latin typeface="Bricolage Grotesque"/>
               </a:rPr>
-              <a:t>Repérer quand l'outil vous emmène ailleurs que là où vous alliez.</a:t>
+              <a:t>Conditions d'utilisation : relire ce que l'outil fait de vos données.</a:t>
             </a:r>
           </a:p>
         </p:txBody>
@@ -15015,7 +15019,75 @@
                 </a:solidFill>
                 <a:latin typeface="Bricolage Grotesque"/>
               </a:rPr>
-              <a:t>Contrer le « toujours d'accord » : demandez-lui de vous contredire.</a:t>
+              <a:t>Travailler par fragments : ne pas confier le concept entier d'un coup.</a:t>
+            </a:r>
+          </a:p>
+        </p:txBody>
+      </p:sp>
+      <p:sp>
+        <p:nvSpPr>
+          <p:cNvPr id="8" name="TextBox 7"/>
+          <p:cNvSpPr txBox="1"/>
+          <p:nvPr/>
+        </p:nvSpPr>
+        <p:spPr>
+          <a:xfrm>
+            <a:off x="640080" y="3611880"/>
+            <a:ext cx="10881360" cy="411480"/>
+          </a:xfrm>
+          <a:prstGeom prst="rect">
+            <a:avLst/>
+          </a:prstGeom>
+          <a:noFill/>
+        </p:spPr>
+        <p:txBody>
+          <a:bodyPr wrap="square">
+            <a:spAutoFit/>
+          </a:bodyPr>
+          <a:lstStyle/>
+          <a:p>
+            <a:r>
+              <a:rPr sz="2000" b="1">
+                <a:solidFill>
+                  <a:srgbClr val="1B5E6B"/>
+                </a:solidFill>
+                <a:latin typeface="Bricolage Grotesque"/>
+              </a:rPr>
+              <a:t>Antériorité datée : garder une trace de votre version, avant l'IA.</a:t>
+            </a:r>
+          </a:p>
+        </p:txBody>
+      </p:sp>
+      <p:sp>
+        <p:nvSpPr>
+          <p:cNvPr id="9" name="TextBox 8"/>
+          <p:cNvSpPr txBox="1"/>
+          <p:nvPr/>
+        </p:nvSpPr>
+        <p:spPr>
+          <a:xfrm>
+            <a:off x="640080" y="4133088"/>
+            <a:ext cx="10881360" cy="411480"/>
+          </a:xfrm>
+          <a:prstGeom prst="rect">
+            <a:avLst/>
+          </a:prstGeom>
+          <a:noFill/>
+        </p:spPr>
+        <p:txBody>
+          <a:bodyPr wrap="square">
+            <a:spAutoFit/>
+          </a:bodyPr>
+          <a:lstStyle/>
+          <a:p>
+            <a:r>
+              <a:rPr sz="2000" b="1">
+                <a:solidFill>
+                  <a:srgbClr val="1B5E6B"/>
+                </a:solidFill>
+                <a:latin typeface="Bricolage Grotesque"/>
+              </a:rPr>
+              <a:t>Titularité : ce que dit chaque outil de la propriété de ce qui en sort.</a:t>
             </a:r>
           </a:p>
         </p:txBody>
@@ -15270,74 +15342,6 @@
           </a:p>
         </p:txBody>
       </p:sp>
-      <p:sp>
-        <p:nvSpPr>
-          <p:cNvPr id="8" name="TextBox 7"/>
-          <p:cNvSpPr txBox="1"/>
-          <p:nvPr/>
-        </p:nvSpPr>
-        <p:spPr>
-          <a:xfrm>
-            <a:off x="640080" y="3611880"/>
-            <a:ext cx="10881360" cy="411480"/>
-          </a:xfrm>
-          <a:prstGeom prst="rect">
-            <a:avLst/>
-          </a:prstGeom>
-          <a:noFill/>
-        </p:spPr>
-        <p:txBody>
-          <a:bodyPr wrap="square">
-            <a:spAutoFit/>
-          </a:bodyPr>
-          <a:lstStyle/>
-          <a:p>
-            <a:r>
-              <a:rPr sz="2000" b="1">
-                <a:solidFill>
-                  <a:srgbClr val="1B5E6B"/>
-                </a:solidFill>
-                <a:latin typeface="Bricolage Grotesque"/>
-              </a:rPr>
-              <a:t>Fixer vos limites d'usage : quand, pour quoi, combien de temps.</a:t>
-            </a:r>
-          </a:p>
-        </p:txBody>
-      </p:sp>
-      <p:sp>
-        <p:nvSpPr>
-          <p:cNvPr id="9" name="TextBox 8"/>
-          <p:cNvSpPr txBox="1"/>
-          <p:nvPr/>
-        </p:nvSpPr>
-        <p:spPr>
-          <a:xfrm>
-            <a:off x="640080" y="4133088"/>
-            <a:ext cx="10881360" cy="411480"/>
-          </a:xfrm>
-          <a:prstGeom prst="rect">
-            <a:avLst/>
-          </a:prstGeom>
-          <a:noFill/>
-        </p:spPr>
-        <p:txBody>
-          <a:bodyPr wrap="square">
-            <a:spAutoFit/>
-          </a:bodyPr>
-          <a:lstStyle/>
-          <a:p>
-            <a:r>
-              <a:rPr sz="2000" b="1">
-                <a:solidFill>
-                  <a:srgbClr val="1B5E6B"/>
-                </a:solidFill>
-                <a:latin typeface="Bricolage Grotesque"/>
-              </a:rPr>
-              <a:t>La relation à l'outil : il imite l'écoute, il n'est pas une relation.</a:t>
-            </a:r>
-          </a:p>
-        </p:txBody>
-      </p:sp>
     </p:spTree>
   </p:cSld>
   <p:clrMapOvr>
@@ -15365,17 +15369,25 @@
         <p:spPr>
           <a:xfrm>
             <a:off x="0" y="0"/>
-            <a:ext cx="12191695" cy="6858000"/>
-          </a:xfrm>
-          <a:prstGeom prst="rect">
-            <a:avLst/>
-          </a:prstGeom>
-          <a:solidFill>
-            <a:srgbClr val="0F2B3A"/>
-          </a:solidFill>
+            <a:ext cx="12191695" cy="1143000"/>
+          </a:xfrm>
+          <a:prstGeom prst="rect">
+            <a:avLst/>
+          </a:prstGeom>
           <a:ln>
             <a:noFill/>
           </a:ln>
+          <a:gradFill>
+            <a:gsLst>
+              <a:gs pos="0">
+                <a:srgbClr val="0A2530"/>
+              </a:gs>
+              <a:gs pos="100000">
+                <a:srgbClr val="1E5565"/>
+              </a:gs>
+            </a:gsLst>
+            <a:lin ang="0" scaled="1"/>
+          </a:gradFill>
         </p:spPr>
         <p:style>
           <a:lnRef idx="1">
@@ -15401,84 +15413,14 @@
       </p:sp>
       <p:sp>
         <p:nvSpPr>
-          <p:cNvPr id="3" name="TextBox 2"/>
-          <p:cNvSpPr txBox="1"/>
-          <p:nvPr/>
-        </p:nvSpPr>
-        <p:spPr>
-          <a:xfrm>
-            <a:off x="640080" y="914400"/>
-            <a:ext cx="10515600" cy="731520"/>
-          </a:xfrm>
-          <a:prstGeom prst="rect">
-            <a:avLst/>
-          </a:prstGeom>
-          <a:noFill/>
-        </p:spPr>
-        <p:txBody>
-          <a:bodyPr wrap="square">
-            <a:spAutoFit/>
-          </a:bodyPr>
-          <a:lstStyle/>
-          <a:p>
-            <a:pPr algn="l"/>
-            <a:r>
-              <a:rPr sz="3600" b="1">
-                <a:solidFill>
-                  <a:srgbClr val="E8A000"/>
-                </a:solidFill>
-                <a:latin typeface="Bricolage Grotesque"/>
-              </a:rPr>
-              <a:t>À retenir</a:t>
-            </a:r>
-          </a:p>
-        </p:txBody>
-      </p:sp>
-      <p:sp>
-        <p:nvSpPr>
-          <p:cNvPr id="4" name="TextBox 3"/>
-          <p:cNvSpPr txBox="1"/>
-          <p:nvPr/>
-        </p:nvSpPr>
-        <p:spPr>
-          <a:xfrm>
-            <a:off x="640080" y="1645920"/>
-            <a:ext cx="10515600" cy="548640"/>
-          </a:xfrm>
-          <a:prstGeom prst="rect">
-            <a:avLst/>
-          </a:prstGeom>
-          <a:noFill/>
-        </p:spPr>
-        <p:txBody>
-          <a:bodyPr wrap="square">
-            <a:spAutoFit/>
-          </a:bodyPr>
-          <a:lstStyle/>
-          <a:p>
-            <a:pPr algn="l"/>
-            <a:r>
-              <a:rPr sz="1800" b="0">
-                <a:solidFill>
-                  <a:srgbClr val="5A8A8F"/>
-                </a:solidFill>
-                <a:latin typeface="Bricolage Grotesque"/>
-              </a:rPr>
-              <a:t>Les fondamentaux</a:t>
-            </a:r>
-          </a:p>
-        </p:txBody>
-      </p:sp>
-      <p:sp>
-        <p:nvSpPr>
-          <p:cNvPr id="5" name="Rectangle 4"/>
+          <p:cNvPr id="3" name="Rectangle 2"/>
           <p:cNvSpPr/>
           <p:nvPr/>
         </p:nvSpPr>
         <p:spPr>
           <a:xfrm>
-            <a:off x="640080" y="2286000"/>
-            <a:ext cx="2743200" cy="27432"/>
+            <a:off x="0" y="1143000"/>
+            <a:ext cx="12191695" cy="18288"/>
           </a:xfrm>
           <a:prstGeom prst="rect">
             <a:avLst/>
@@ -15514,131 +15456,142 @@
       </p:sp>
       <p:sp>
         <p:nvSpPr>
+          <p:cNvPr id="4" name="TextBox 3"/>
+          <p:cNvSpPr txBox="1"/>
+          <p:nvPr/>
+        </p:nvSpPr>
+        <p:spPr>
+          <a:xfrm>
+            <a:off x="640080" y="182880"/>
+            <a:ext cx="10515600" cy="822960"/>
+          </a:xfrm>
+          <a:prstGeom prst="rect">
+            <a:avLst/>
+          </a:prstGeom>
+          <a:noFill/>
+        </p:spPr>
+        <p:txBody>
+          <a:bodyPr wrap="square">
+            <a:spAutoFit/>
+          </a:bodyPr>
+          <a:lstStyle/>
+          <a:p>
+            <a:pPr algn="l"/>
+            <a:r>
+              <a:rPr sz="3400" b="1">
+                <a:solidFill>
+                  <a:srgbClr val="FFFFFF"/>
+                </a:solidFill>
+                <a:latin typeface="Bricolage Grotesque"/>
+              </a:rPr>
+              <a:t>Garder la main</a:t>
+            </a:r>
+          </a:p>
+        </p:txBody>
+      </p:sp>
+      <p:sp>
+        <p:nvSpPr>
+          <p:cNvPr id="5" name="TextBox 4"/>
+          <p:cNvSpPr txBox="1"/>
+          <p:nvPr/>
+        </p:nvSpPr>
+        <p:spPr>
+          <a:xfrm>
+            <a:off x="640080" y="1463040"/>
+            <a:ext cx="10515600" cy="640080"/>
+          </a:xfrm>
+          <a:prstGeom prst="rect">
+            <a:avLst/>
+          </a:prstGeom>
+          <a:noFill/>
+        </p:spPr>
+        <p:txBody>
+          <a:bodyPr wrap="square">
+            <a:spAutoFit/>
+          </a:bodyPr>
+          <a:lstStyle/>
+          <a:p>
+            <a:pPr algn="l"/>
+            <a:r>
+              <a:rPr sz="2600" b="1">
+                <a:solidFill>
+                  <a:srgbClr val="1A1A1A"/>
+                </a:solidFill>
+                <a:latin typeface="Bricolage Grotesque"/>
+              </a:rPr>
+              <a:t>Pour que l'IA reste un instrument de travail</a:t>
+            </a:r>
+          </a:p>
+        </p:txBody>
+      </p:sp>
+      <p:sp>
+        <p:nvSpPr>
           <p:cNvPr id="6" name="TextBox 5"/>
           <p:cNvSpPr txBox="1"/>
           <p:nvPr/>
         </p:nvSpPr>
         <p:spPr>
           <a:xfrm>
-            <a:off x="640080" y="2651760"/>
-            <a:ext cx="10881360" cy="3383280"/>
-          </a:xfrm>
-          <a:prstGeom prst="rect">
-            <a:avLst/>
-          </a:prstGeom>
-          <a:noFill/>
-        </p:spPr>
-        <p:txBody>
-          <a:bodyPr wrap="square">
-            <a:spAutoFit/>
-          </a:bodyPr>
-          <a:lstStyle/>
-          <a:p>
-            <a:pPr>
-              <a:spcBef>
-                <a:spcPts val="1200"/>
-              </a:spcBef>
-            </a:pPr>
-            <a:r>
-              <a:rPr sz="2000">
-                <a:solidFill>
-                  <a:srgbClr val="FFFFFF"/>
-                </a:solidFill>
-                <a:latin typeface="Bricolage Grotesque"/>
-              </a:rPr>
-              <a:t>1.  Un LLM prédit, il ne sait pas : vérifiez ce qui compte.</a:t>
-            </a:r>
-          </a:p>
-          <a:p>
-            <a:pPr>
-              <a:spcBef>
-                <a:spcPts val="1200"/>
-              </a:spcBef>
-            </a:pPr>
-            <a:r>
-              <a:rPr sz="2000">
-                <a:solidFill>
-                  <a:srgbClr val="FFFFFF"/>
-                </a:solidFill>
-                <a:latin typeface="Bricolage Grotesque"/>
-              </a:rPr>
-              <a:t>2.  Un outil par usage, pas un outil pour tout.</a:t>
-            </a:r>
-          </a:p>
-          <a:p>
-            <a:pPr>
-              <a:spcBef>
-                <a:spcPts val="1200"/>
-              </a:spcBef>
-            </a:pPr>
-            <a:r>
-              <a:rPr sz="2000">
-                <a:solidFill>
-                  <a:srgbClr val="FFFFFF"/>
-                </a:solidFill>
-                <a:latin typeface="Bricolage Grotesque"/>
-              </a:rPr>
-              <a:t>3.  Contexte, consigne, format, vérification : votre méthode.</a:t>
-            </a:r>
-          </a:p>
-          <a:p>
-            <a:pPr>
-              <a:spcBef>
-                <a:spcPts val="1200"/>
-              </a:spcBef>
-            </a:pPr>
-            <a:r>
-              <a:rPr sz="2000">
-                <a:solidFill>
-                  <a:srgbClr val="FFFFFF"/>
-                </a:solidFill>
-                <a:latin typeface="Bricolage Grotesque"/>
-              </a:rPr>
-              <a:t>4.  Rien de nominatif dans un outil grand public, jamais.</a:t>
-            </a:r>
-          </a:p>
-          <a:p>
-            <a:pPr>
-              <a:spcBef>
-                <a:spcPts val="1200"/>
-              </a:spcBef>
-            </a:pPr>
-            <a:r>
-              <a:rPr sz="2000">
-                <a:solidFill>
-                  <a:srgbClr val="FFFFFF"/>
-                </a:solidFill>
-                <a:latin typeface="Bricolage Grotesque"/>
-              </a:rPr>
-              <a:t>5.  Vos limites d'usage sont écrites, pas implicites.</a:t>
-            </a:r>
-          </a:p>
-        </p:txBody>
-      </p:sp>
-      <p:pic>
-        <p:nvPicPr>
-          <p:cNvPr id="7" name="Picture 6" descr="ia-round.png"/>
-          <p:cNvPicPr>
-            <a:picLocks noChangeAspect="1"/>
-          </p:cNvPicPr>
-          <p:nvPr/>
-        </p:nvPicPr>
-        <p:blipFill>
-          <a:blip r:embed="rId2"/>
-          <a:stretch>
-            <a:fillRect/>
-          </a:stretch>
-        </p:blipFill>
-        <p:spPr>
-          <a:xfrm>
-            <a:off x="457200" y="6355080"/>
-            <a:ext cx="320040" cy="320040"/>
-          </a:xfrm>
-          <a:prstGeom prst="rect">
-            <a:avLst/>
-          </a:prstGeom>
-        </p:spPr>
-      </p:pic>
+            <a:off x="640080" y="2331720"/>
+            <a:ext cx="10881360" cy="411480"/>
+          </a:xfrm>
+          <a:prstGeom prst="rect">
+            <a:avLst/>
+          </a:prstGeom>
+          <a:noFill/>
+        </p:spPr>
+        <p:txBody>
+          <a:bodyPr wrap="square">
+            <a:spAutoFit/>
+          </a:bodyPr>
+          <a:lstStyle/>
+          <a:p>
+            <a:r>
+              <a:rPr sz="2000" b="1">
+                <a:solidFill>
+                  <a:srgbClr val="1B5E6B"/>
+                </a:solidFill>
+                <a:latin typeface="Bricolage Grotesque"/>
+              </a:rPr>
+              <a:t>Repérer quand l'outil vous emmène ailleurs que là où vous alliez.</a:t>
+            </a:r>
+          </a:p>
+        </p:txBody>
+      </p:sp>
+      <p:sp>
+        <p:nvSpPr>
+          <p:cNvPr id="7" name="TextBox 6"/>
+          <p:cNvSpPr txBox="1"/>
+          <p:nvPr/>
+        </p:nvSpPr>
+        <p:spPr>
+          <a:xfrm>
+            <a:off x="640080" y="2852928"/>
+            <a:ext cx="10881360" cy="411480"/>
+          </a:xfrm>
+          <a:prstGeom prst="rect">
+            <a:avLst/>
+          </a:prstGeom>
+          <a:noFill/>
+        </p:spPr>
+        <p:txBody>
+          <a:bodyPr wrap="square">
+            <a:spAutoFit/>
+          </a:bodyPr>
+          <a:lstStyle/>
+          <a:p>
+            <a:r>
+              <a:rPr sz="2000" b="1">
+                <a:solidFill>
+                  <a:srgbClr val="1B5E6B"/>
+                </a:solidFill>
+                <a:latin typeface="Bricolage Grotesque"/>
+              </a:rPr>
+              <a:t>Contrer le « toujours d'accord » : demandez-lui de vous contredire.</a:t>
+            </a:r>
+          </a:p>
+        </p:txBody>
+      </p:sp>
       <p:sp>
         <p:nvSpPr>
           <p:cNvPr id="8" name="TextBox 7"/>
@@ -15647,29 +15600,62 @@
         </p:nvSpPr>
         <p:spPr>
           <a:xfrm>
-            <a:off x="868680" y="6336792"/>
-            <a:ext cx="3657600" cy="365760"/>
-          </a:xfrm>
-          <a:prstGeom prst="rect">
-            <a:avLst/>
-          </a:prstGeom>
-          <a:noFill/>
-        </p:spPr>
-        <p:txBody>
-          <a:bodyPr wrap="square">
-            <a:spAutoFit/>
-          </a:bodyPr>
-          <a:lstStyle/>
-          <a:p>
-            <a:pPr algn="l"/>
-            <a:r>
-              <a:rPr sz="1400" b="0">
-                <a:solidFill>
-                  <a:srgbClr val="FFFFFF"/>
-                </a:solidFill>
-                <a:latin typeface="Bricolage Grotesque"/>
-              </a:rPr>
-              <a:t>intelligence academy</a:t>
+            <a:off x="640080" y="3611880"/>
+            <a:ext cx="10881360" cy="411480"/>
+          </a:xfrm>
+          <a:prstGeom prst="rect">
+            <a:avLst/>
+          </a:prstGeom>
+          <a:noFill/>
+        </p:spPr>
+        <p:txBody>
+          <a:bodyPr wrap="square">
+            <a:spAutoFit/>
+          </a:bodyPr>
+          <a:lstStyle/>
+          <a:p>
+            <a:r>
+              <a:rPr sz="2000" b="1">
+                <a:solidFill>
+                  <a:srgbClr val="1B5E6B"/>
+                </a:solidFill>
+                <a:latin typeface="Bricolage Grotesque"/>
+              </a:rPr>
+              <a:t>Fixer vos limites d'usage : quand, pour quoi, combien de temps.</a:t>
+            </a:r>
+          </a:p>
+        </p:txBody>
+      </p:sp>
+      <p:sp>
+        <p:nvSpPr>
+          <p:cNvPr id="9" name="TextBox 8"/>
+          <p:cNvSpPr txBox="1"/>
+          <p:nvPr/>
+        </p:nvSpPr>
+        <p:spPr>
+          <a:xfrm>
+            <a:off x="640080" y="4133088"/>
+            <a:ext cx="10881360" cy="411480"/>
+          </a:xfrm>
+          <a:prstGeom prst="rect">
+            <a:avLst/>
+          </a:prstGeom>
+          <a:noFill/>
+        </p:spPr>
+        <p:txBody>
+          <a:bodyPr wrap="square">
+            <a:spAutoFit/>
+          </a:bodyPr>
+          <a:lstStyle/>
+          <a:p>
+            <a:r>
+              <a:rPr sz="2000" b="1">
+                <a:solidFill>
+                  <a:srgbClr val="1B5E6B"/>
+                </a:solidFill>
+                <a:latin typeface="Bricolage Grotesque"/>
+              </a:rPr>
+              <a:t>La relation à l'outil : il imite l'écoute, il n'est pas une relation.</a:t>
             </a:r>
           </a:p>
         </p:txBody>
@@ -15737,14 +15723,84 @@
       </p:sp>
       <p:sp>
         <p:nvSpPr>
-          <p:cNvPr id="3" name="Rectangle 2"/>
+          <p:cNvPr id="3" name="TextBox 2"/>
+          <p:cNvSpPr txBox="1"/>
+          <p:nvPr/>
+        </p:nvSpPr>
+        <p:spPr>
+          <a:xfrm>
+            <a:off x="640080" y="914400"/>
+            <a:ext cx="10515600" cy="731520"/>
+          </a:xfrm>
+          <a:prstGeom prst="rect">
+            <a:avLst/>
+          </a:prstGeom>
+          <a:noFill/>
+        </p:spPr>
+        <p:txBody>
+          <a:bodyPr wrap="square">
+            <a:spAutoFit/>
+          </a:bodyPr>
+          <a:lstStyle/>
+          <a:p>
+            <a:pPr algn="l"/>
+            <a:r>
+              <a:rPr sz="3600" b="1">
+                <a:solidFill>
+                  <a:srgbClr val="E8A000"/>
+                </a:solidFill>
+                <a:latin typeface="Bricolage Grotesque"/>
+              </a:rPr>
+              <a:t>À retenir</a:t>
+            </a:r>
+          </a:p>
+        </p:txBody>
+      </p:sp>
+      <p:sp>
+        <p:nvSpPr>
+          <p:cNvPr id="4" name="TextBox 3"/>
+          <p:cNvSpPr txBox="1"/>
+          <p:nvPr/>
+        </p:nvSpPr>
+        <p:spPr>
+          <a:xfrm>
+            <a:off x="640080" y="1645920"/>
+            <a:ext cx="10515600" cy="548640"/>
+          </a:xfrm>
+          <a:prstGeom prst="rect">
+            <a:avLst/>
+          </a:prstGeom>
+          <a:noFill/>
+        </p:spPr>
+        <p:txBody>
+          <a:bodyPr wrap="square">
+            <a:spAutoFit/>
+          </a:bodyPr>
+          <a:lstStyle/>
+          <a:p>
+            <a:pPr algn="l"/>
+            <a:r>
+              <a:rPr sz="1800" b="0">
+                <a:solidFill>
+                  <a:srgbClr val="5A8A8F"/>
+                </a:solidFill>
+                <a:latin typeface="Bricolage Grotesque"/>
+              </a:rPr>
+              <a:t>Les fondamentaux</a:t>
+            </a:r>
+          </a:p>
+        </p:txBody>
+      </p:sp>
+      <p:sp>
+        <p:nvSpPr>
+          <p:cNvPr id="5" name="Rectangle 4"/>
           <p:cNvSpPr/>
           <p:nvPr/>
         </p:nvSpPr>
         <p:spPr>
           <a:xfrm>
-            <a:off x="640080" y="1965960"/>
-            <a:ext cx="2743200" cy="36576"/>
+            <a:off x="640080" y="2286000"/>
+            <a:ext cx="2743200" cy="27432"/>
           </a:xfrm>
           <a:prstGeom prst="rect">
             <a:avLst/>
@@ -15780,105 +15836,103 @@
       </p:sp>
       <p:sp>
         <p:nvSpPr>
-          <p:cNvPr id="4" name="TextBox 3"/>
-          <p:cNvSpPr txBox="1"/>
-          <p:nvPr/>
-        </p:nvSpPr>
-        <p:spPr>
-          <a:xfrm>
-            <a:off x="640080" y="1371600"/>
-            <a:ext cx="10515600" cy="731520"/>
-          </a:xfrm>
-          <a:prstGeom prst="rect">
-            <a:avLst/>
-          </a:prstGeom>
-          <a:noFill/>
-        </p:spPr>
-        <p:txBody>
-          <a:bodyPr wrap="square">
-            <a:spAutoFit/>
-          </a:bodyPr>
-          <a:lstStyle/>
-          <a:p>
-            <a:pPr algn="l"/>
-            <a:r>
-              <a:rPr sz="2200" b="1">
-                <a:solidFill>
-                  <a:srgbClr val="E8A000"/>
-                </a:solidFill>
-                <a:latin typeface="Bricolage Grotesque"/>
-              </a:rPr>
-              <a:t>Séquence 3</a:t>
-            </a:r>
-          </a:p>
-        </p:txBody>
-      </p:sp>
-      <p:sp>
-        <p:nvSpPr>
-          <p:cNvPr id="5" name="TextBox 4"/>
-          <p:cNvSpPr txBox="1"/>
-          <p:nvPr/>
-        </p:nvSpPr>
-        <p:spPr>
-          <a:xfrm>
-            <a:off x="640080" y="2286000"/>
-            <a:ext cx="10698480" cy="1645920"/>
-          </a:xfrm>
-          <a:prstGeom prst="rect">
-            <a:avLst/>
-          </a:prstGeom>
-          <a:noFill/>
-        </p:spPr>
-        <p:txBody>
-          <a:bodyPr wrap="square">
-            <a:spAutoFit/>
-          </a:bodyPr>
-          <a:lstStyle/>
-          <a:p>
-            <a:pPr algn="l"/>
-            <a:r>
-              <a:rPr sz="4200" b="1">
+          <p:cNvPr id="6" name="TextBox 5"/>
+          <p:cNvSpPr txBox="1"/>
+          <p:nvPr/>
+        </p:nvSpPr>
+        <p:spPr>
+          <a:xfrm>
+            <a:off x="640080" y="2651760"/>
+            <a:ext cx="10881360" cy="3383280"/>
+          </a:xfrm>
+          <a:prstGeom prst="rect">
+            <a:avLst/>
+          </a:prstGeom>
+          <a:noFill/>
+        </p:spPr>
+        <p:txBody>
+          <a:bodyPr wrap="square">
+            <a:spAutoFit/>
+          </a:bodyPr>
+          <a:lstStyle/>
+          <a:p>
+            <a:pPr>
+              <a:spcBef>
+                <a:spcPts val="1200"/>
+              </a:spcBef>
+            </a:pPr>
+            <a:r>
+              <a:rPr sz="2000">
                 <a:solidFill>
                   <a:srgbClr val="FFFFFF"/>
                 </a:solidFill>
                 <a:latin typeface="Bricolage Grotesque"/>
               </a:rPr>
-              <a:t>La pratique</a:t>
-            </a:r>
-          </a:p>
-        </p:txBody>
-      </p:sp>
-      <p:sp>
-        <p:nvSpPr>
-          <p:cNvPr id="6" name="TextBox 5"/>
-          <p:cNvSpPr txBox="1"/>
-          <p:nvPr/>
-        </p:nvSpPr>
-        <p:spPr>
-          <a:xfrm>
-            <a:off x="640080" y="4023360"/>
-            <a:ext cx="10515600" cy="731520"/>
-          </a:xfrm>
-          <a:prstGeom prst="rect">
-            <a:avLst/>
-          </a:prstGeom>
-          <a:noFill/>
-        </p:spPr>
-        <p:txBody>
-          <a:bodyPr wrap="square">
-            <a:spAutoFit/>
-          </a:bodyPr>
-          <a:lstStyle/>
-          <a:p>
-            <a:pPr algn="l"/>
-            <a:r>
-              <a:rPr sz="2000" b="0">
-                <a:solidFill>
-                  <a:srgbClr val="5A8A8F"/>
-                </a:solidFill>
-                <a:latin typeface="Bricolage Grotesque"/>
-              </a:rPr>
-              <a:t>Partage d'écran : vous faites, je montre</a:t>
+              <a:t>1.  Un LLM prédit, il ne sait pas : vérifiez ce qui compte.</a:t>
+            </a:r>
+          </a:p>
+          <a:p>
+            <a:pPr>
+              <a:spcBef>
+                <a:spcPts val="1200"/>
+              </a:spcBef>
+            </a:pPr>
+            <a:r>
+              <a:rPr sz="2000">
+                <a:solidFill>
+                  <a:srgbClr val="FFFFFF"/>
+                </a:solidFill>
+                <a:latin typeface="Bricolage Grotesque"/>
+              </a:rPr>
+              <a:t>2.  Un outil par usage, pas un outil pour tout.</a:t>
+            </a:r>
+          </a:p>
+          <a:p>
+            <a:pPr>
+              <a:spcBef>
+                <a:spcPts val="1200"/>
+              </a:spcBef>
+            </a:pPr>
+            <a:r>
+              <a:rPr sz="2000">
+                <a:solidFill>
+                  <a:srgbClr val="FFFFFF"/>
+                </a:solidFill>
+                <a:latin typeface="Bricolage Grotesque"/>
+              </a:rPr>
+              <a:t>3.  Contexte, consigne, format, vérification : votre méthode.</a:t>
+            </a:r>
+          </a:p>
+          <a:p>
+            <a:pPr>
+              <a:spcBef>
+                <a:spcPts val="1200"/>
+              </a:spcBef>
+            </a:pPr>
+            <a:r>
+              <a:rPr sz="2000">
+                <a:solidFill>
+                  <a:srgbClr val="FFFFFF"/>
+                </a:solidFill>
+                <a:latin typeface="Bricolage Grotesque"/>
+              </a:rPr>
+              <a:t>4.  Rien de nominatif dans un outil grand public, jamais.</a:t>
+            </a:r>
+          </a:p>
+          <a:p>
+            <a:pPr>
+              <a:spcBef>
+                <a:spcPts val="1200"/>
+              </a:spcBef>
+            </a:pPr>
+            <a:r>
+              <a:rPr sz="2000">
+                <a:solidFill>
+                  <a:srgbClr val="FFFFFF"/>
+                </a:solidFill>
+                <a:latin typeface="Bricolage Grotesque"/>
+              </a:rPr>
+              <a:t>5.  Vos limites d'usage sont écrites, pas implicites.</a:t>
             </a:r>
           </a:p>
         </p:txBody>
@@ -15899,7 +15953,7 @@
         </p:blipFill>
         <p:spPr>
           <a:xfrm>
-            <a:off x="457200" y="6217920"/>
+            <a:off x="457200" y="6355080"/>
             <a:ext cx="320040" cy="320040"/>
           </a:xfrm>
           <a:prstGeom prst="rect">
@@ -15915,7 +15969,7 @@
         </p:nvSpPr>
         <p:spPr>
           <a:xfrm>
-            <a:off x="868680" y="6199632"/>
+            <a:off x="868680" y="6336792"/>
             <a:ext cx="3657600" cy="365760"/>
           </a:xfrm>
           <a:prstGeom prst="rect">
@@ -15969,25 +16023,17 @@
         <p:spPr>
           <a:xfrm>
             <a:off x="0" y="0"/>
-            <a:ext cx="12191695" cy="1143000"/>
-          </a:xfrm>
-          <a:prstGeom prst="rect">
-            <a:avLst/>
-          </a:prstGeom>
+            <a:ext cx="12191695" cy="6858000"/>
+          </a:xfrm>
+          <a:prstGeom prst="rect">
+            <a:avLst/>
+          </a:prstGeom>
+          <a:solidFill>
+            <a:srgbClr val="0F2B3A"/>
+          </a:solidFill>
           <a:ln>
             <a:noFill/>
           </a:ln>
-          <a:gradFill>
-            <a:gsLst>
-              <a:gs pos="0">
-                <a:srgbClr val="0A2530"/>
-              </a:gs>
-              <a:gs pos="100000">
-                <a:srgbClr val="1E5565"/>
-              </a:gs>
-            </a:gsLst>
-            <a:lin ang="0" scaled="1"/>
-          </a:gradFill>
         </p:spPr>
         <p:style>
           <a:lnRef idx="1">
@@ -16019,8 +16065,8 @@
         </p:nvSpPr>
         <p:spPr>
           <a:xfrm>
-            <a:off x="0" y="1143000"/>
-            <a:ext cx="12191695" cy="18288"/>
+            <a:off x="640080" y="1965960"/>
+            <a:ext cx="2743200" cy="36576"/>
           </a:xfrm>
           <a:prstGeom prst="rect">
             <a:avLst/>
@@ -16062,8 +16108,8 @@
         </p:nvSpPr>
         <p:spPr>
           <a:xfrm>
-            <a:off x="640080" y="182880"/>
-            <a:ext cx="10515600" cy="822960"/>
+            <a:off x="640080" y="1371600"/>
+            <a:ext cx="10515600" cy="731520"/>
           </a:xfrm>
           <a:prstGeom prst="rect">
             <a:avLst/>
@@ -16078,27 +16124,62 @@
           <a:p>
             <a:pPr algn="l"/>
             <a:r>
-              <a:rPr sz="3400" b="1">
+              <a:rPr sz="2200" b="1">
+                <a:solidFill>
+                  <a:srgbClr val="E8A000"/>
+                </a:solidFill>
+                <a:latin typeface="Bricolage Grotesque"/>
+              </a:rPr>
+              <a:t>Séquence 3</a:t>
+            </a:r>
+          </a:p>
+        </p:txBody>
+      </p:sp>
+      <p:sp>
+        <p:nvSpPr>
+          <p:cNvPr id="5" name="TextBox 4"/>
+          <p:cNvSpPr txBox="1"/>
+          <p:nvPr/>
+        </p:nvSpPr>
+        <p:spPr>
+          <a:xfrm>
+            <a:off x="640080" y="2286000"/>
+            <a:ext cx="10698480" cy="1645920"/>
+          </a:xfrm>
+          <a:prstGeom prst="rect">
+            <a:avLst/>
+          </a:prstGeom>
+          <a:noFill/>
+        </p:spPr>
+        <p:txBody>
+          <a:bodyPr wrap="square">
+            <a:spAutoFit/>
+          </a:bodyPr>
+          <a:lstStyle/>
+          <a:p>
+            <a:pPr algn="l"/>
+            <a:r>
+              <a:rPr sz="4200" b="1">
                 <a:solidFill>
                   <a:srgbClr val="FFFFFF"/>
                 </a:solidFill>
                 <a:latin typeface="Bricolage Grotesque"/>
               </a:rPr>
-              <a:t>Exercice · Étape 1</a:t>
-            </a:r>
-          </a:p>
-        </p:txBody>
-      </p:sp>
-      <p:sp>
-        <p:nvSpPr>
-          <p:cNvPr id="5" name="TextBox 4"/>
-          <p:cNvSpPr txBox="1"/>
-          <p:nvPr/>
-        </p:nvSpPr>
-        <p:spPr>
-          <a:xfrm>
-            <a:off x="640080" y="1463040"/>
-            <a:ext cx="10515600" cy="640080"/>
+              <a:t>La pratique</a:t>
+            </a:r>
+          </a:p>
+        </p:txBody>
+      </p:sp>
+      <p:sp>
+        <p:nvSpPr>
+          <p:cNvPr id="6" name="TextBox 5"/>
+          <p:cNvSpPr txBox="1"/>
+          <p:nvPr/>
+        </p:nvSpPr>
+        <p:spPr>
+          <a:xfrm>
+            <a:off x="640080" y="4023360"/>
+            <a:ext cx="10515600" cy="731520"/>
           </a:xfrm>
           <a:prstGeom prst="rect">
             <a:avLst/>
@@ -16113,81 +16194,72 @@
           <a:p>
             <a:pPr algn="l"/>
             <a:r>
-              <a:rPr sz="2600" b="1">
-                <a:solidFill>
-                  <a:srgbClr val="1A1A1A"/>
-                </a:solidFill>
-                <a:latin typeface="Bricolage Grotesque"/>
-              </a:rPr>
-              <a:t>Votre base de contexte personnelle</a:t>
-            </a:r>
-          </a:p>
-        </p:txBody>
-      </p:sp>
-      <p:sp>
-        <p:nvSpPr>
-          <p:cNvPr id="6" name="TextBox 5"/>
-          <p:cNvSpPr txBox="1"/>
-          <p:nvPr/>
-        </p:nvSpPr>
-        <p:spPr>
-          <a:xfrm>
-            <a:off x="640080" y="2331720"/>
-            <a:ext cx="10881360" cy="411480"/>
-          </a:xfrm>
-          <a:prstGeom prst="rect">
-            <a:avLst/>
-          </a:prstGeom>
-          <a:noFill/>
-        </p:spPr>
-        <p:txBody>
-          <a:bodyPr wrap="square">
-            <a:spAutoFit/>
-          </a:bodyPr>
-          <a:lstStyle/>
-          <a:p>
-            <a:r>
               <a:rPr sz="2000" b="0">
                 <a:solidFill>
-                  <a:srgbClr val="333333"/>
-                </a:solidFill>
-                <a:latin typeface="Bricolage Grotesque"/>
-              </a:rPr>
-              <a:t>Un texte que vous collerez en tête de vos échanges avec l'IA :</a:t>
-            </a:r>
-          </a:p>
-        </p:txBody>
-      </p:sp>
-      <p:sp>
-        <p:nvSpPr>
-          <p:cNvPr id="7" name="TextBox 6"/>
-          <p:cNvSpPr txBox="1"/>
-          <p:nvPr/>
-        </p:nvSpPr>
-        <p:spPr>
-          <a:xfrm>
-            <a:off x="640080" y="2852928"/>
-            <a:ext cx="10881360" cy="411480"/>
-          </a:xfrm>
-          <a:prstGeom prst="rect">
-            <a:avLst/>
-          </a:prstGeom>
-          <a:noFill/>
-        </p:spPr>
-        <p:txBody>
-          <a:bodyPr wrap="square">
-            <a:spAutoFit/>
-          </a:bodyPr>
-          <a:lstStyle/>
-          <a:p>
-            <a:r>
-              <a:rPr sz="2000" b="1">
-                <a:solidFill>
-                  <a:srgbClr val="1B5E6B"/>
-                </a:solidFill>
-                <a:latin typeface="Bricolage Grotesque"/>
-              </a:rPr>
-              <a:t>qui vous êtes, votre métier visé, votre façon d'écrire, vos exigences.</a:t>
+                  <a:srgbClr val="5A8A8F"/>
+                </a:solidFill>
+                <a:latin typeface="Bricolage Grotesque"/>
+              </a:rPr>
+              <a:t>Partage d'écran : vous faites, je montre</a:t>
+            </a:r>
+          </a:p>
+        </p:txBody>
+      </p:sp>
+      <p:pic>
+        <p:nvPicPr>
+          <p:cNvPr id="7" name="Picture 6" descr="ia-round.png"/>
+          <p:cNvPicPr>
+            <a:picLocks noChangeAspect="1"/>
+          </p:cNvPicPr>
+          <p:nvPr/>
+        </p:nvPicPr>
+        <p:blipFill>
+          <a:blip r:embed="rId2"/>
+          <a:stretch>
+            <a:fillRect/>
+          </a:stretch>
+        </p:blipFill>
+        <p:spPr>
+          <a:xfrm>
+            <a:off x="457200" y="6217920"/>
+            <a:ext cx="320040" cy="320040"/>
+          </a:xfrm>
+          <a:prstGeom prst="rect">
+            <a:avLst/>
+          </a:prstGeom>
+        </p:spPr>
+      </p:pic>
+      <p:sp>
+        <p:nvSpPr>
+          <p:cNvPr id="8" name="TextBox 7"/>
+          <p:cNvSpPr txBox="1"/>
+          <p:nvPr/>
+        </p:nvSpPr>
+        <p:spPr>
+          <a:xfrm>
+            <a:off x="868680" y="6199632"/>
+            <a:ext cx="3657600" cy="365760"/>
+          </a:xfrm>
+          <a:prstGeom prst="rect">
+            <a:avLst/>
+          </a:prstGeom>
+          <a:noFill/>
+        </p:spPr>
+        <p:txBody>
+          <a:bodyPr wrap="square">
+            <a:spAutoFit/>
+          </a:bodyPr>
+          <a:lstStyle/>
+          <a:p>
+            <a:pPr algn="l"/>
+            <a:r>
+              <a:rPr sz="1400" b="0">
+                <a:solidFill>
+                  <a:srgbClr val="FFFFFF"/>
+                </a:solidFill>
+                <a:latin typeface="Bricolage Grotesque"/>
+              </a:rPr>
+              <a:t>intelligence academy</a:t>
             </a:r>
           </a:p>
         </p:txBody>
@@ -16403,7 +16475,7 @@
                 </a:solidFill>
                 <a:latin typeface="Bricolage Grotesque"/>
               </a:rPr>
-              <a:t>Un texte que vous collerez en tête de vos échanges avec l'IA :</a:t>
+              <a:t>Un texte rangé dans vos instructions personnalisées, lu à chaque échange :</a:t>
             </a:r>
           </a:p>
         </p:txBody>
@@ -16438,40 +16510,6 @@
                 <a:latin typeface="Bricolage Grotesque"/>
               </a:rPr>
               <a:t>qui vous êtes, votre métier visé, votre façon d'écrire, vos exigences.</a:t>
-            </a:r>
-          </a:p>
-        </p:txBody>
-      </p:sp>
-      <p:sp>
-        <p:nvSpPr>
-          <p:cNvPr id="8" name="TextBox 7"/>
-          <p:cNvSpPr txBox="1"/>
-          <p:nvPr/>
-        </p:nvSpPr>
-        <p:spPr>
-          <a:xfrm>
-            <a:off x="640080" y="3611880"/>
-            <a:ext cx="10881360" cy="411480"/>
-          </a:xfrm>
-          <a:prstGeom prst="rect">
-            <a:avLst/>
-          </a:prstGeom>
-          <a:noFill/>
-        </p:spPr>
-        <p:txBody>
-          <a:bodyPr wrap="square">
-            <a:spAutoFit/>
-          </a:bodyPr>
-          <a:lstStyle/>
-          <a:p>
-            <a:r>
-              <a:rPr sz="2000" b="0">
-                <a:solidFill>
-                  <a:srgbClr val="333333"/>
-                </a:solidFill>
-                <a:latin typeface="Bricolage Grotesque"/>
-              </a:rPr>
-              <a:t>On l'écrit ensemble, puis on la teste dans ChatGPT.</a:t>
             </a:r>
           </a:p>
         </p:txBody>
@@ -16686,7 +16724,7 @@
                 </a:solidFill>
                 <a:latin typeface="Bricolage Grotesque"/>
               </a:rPr>
-              <a:t>Avant S2 :  Focus Midjourney &amp; Nano Banana, puis Claude — Les fondamentaux</a:t>
+              <a:t>Avant S2 :  Focus Midjourney &amp; Nano Banana, puis Claude : les fondamentaux</a:t>
             </a:r>
           </a:p>
         </p:txBody>
@@ -16935,7 +16973,7 @@
                 </a:solidFill>
                 <a:latin typeface="Bricolage Grotesque"/>
               </a:rPr>
-              <a:t>Exercice · Étape 2</a:t>
+              <a:t>Exercice · Étape 1</a:t>
             </a:r>
           </a:p>
         </p:txBody>
@@ -16970,7 +17008,7 @@
                 </a:solidFill>
                 <a:latin typeface="Bricolage Grotesque"/>
               </a:rPr>
-              <a:t>Le premier support : une réunion partenaires</a:t>
+              <a:t>Votre base de contexte personnelle</a:t>
             </a:r>
           </a:p>
         </p:txBody>
@@ -17004,7 +17042,7 @@
                 </a:solidFill>
                 <a:latin typeface="Bricolage Grotesque"/>
               </a:rPr>
-              <a:t>Projet fictif : lutter contre l'isolement des personnes âgées à domicile.</a:t>
+              <a:t>Un texte rangé dans vos instructions personnalisées, lu à chaque échange :</a:t>
             </a:r>
           </a:p>
         </p:txBody>
@@ -17038,7 +17076,75 @@
                 </a:solidFill>
                 <a:latin typeface="Bricolage Grotesque"/>
               </a:rPr>
-              <a:t>Livrable : l'ordre du jour d'une réunion de lancement avec les partenaires.</a:t>
+              <a:t>qui vous êtes, votre métier visé, votre façon d'écrire, vos exigences.</a:t>
+            </a:r>
+          </a:p>
+        </p:txBody>
+      </p:sp>
+      <p:sp>
+        <p:nvSpPr>
+          <p:cNvPr id="8" name="TextBox 7"/>
+          <p:cNvSpPr txBox="1"/>
+          <p:nvPr/>
+        </p:nvSpPr>
+        <p:spPr>
+          <a:xfrm>
+            <a:off x="640080" y="3611880"/>
+            <a:ext cx="10881360" cy="411480"/>
+          </a:xfrm>
+          <a:prstGeom prst="rect">
+            <a:avLst/>
+          </a:prstGeom>
+          <a:noFill/>
+        </p:spPr>
+        <p:txBody>
+          <a:bodyPr wrap="square">
+            <a:spAutoFit/>
+          </a:bodyPr>
+          <a:lstStyle/>
+          <a:p>
+            <a:r>
+              <a:rPr sz="2000" b="1">
+                <a:solidFill>
+                  <a:srgbClr val="1B5E6B"/>
+                </a:solidFill>
+                <a:latin typeface="Bricolage Grotesque"/>
+              </a:rPr>
+              <a:t>Où : Paramètres › Personnalisation › Instructions personnalisées.</a:t>
+            </a:r>
+          </a:p>
+        </p:txBody>
+      </p:sp>
+      <p:sp>
+        <p:nvSpPr>
+          <p:cNvPr id="9" name="TextBox 8"/>
+          <p:cNvSpPr txBox="1"/>
+          <p:nvPr/>
+        </p:nvSpPr>
+        <p:spPr>
+          <a:xfrm>
+            <a:off x="640080" y="4133088"/>
+            <a:ext cx="10881360" cy="411480"/>
+          </a:xfrm>
+          <a:prstGeom prst="rect">
+            <a:avLst/>
+          </a:prstGeom>
+          <a:noFill/>
+        </p:spPr>
+        <p:txBody>
+          <a:bodyPr wrap="square">
+            <a:spAutoFit/>
+          </a:bodyPr>
+          <a:lstStyle/>
+          <a:p>
+            <a:r>
+              <a:rPr sz="2000" b="0">
+                <a:solidFill>
+                  <a:srgbClr val="333333"/>
+                </a:solidFill>
+                <a:latin typeface="Bricolage Grotesque"/>
+              </a:rPr>
+              <a:t>On l'écrit ensemble, on l'enregistre, puis on la teste dans ChatGPT.</a:t>
             </a:r>
           </a:p>
         </p:txBody>
@@ -17220,7 +17326,7 @@
                 </a:solidFill>
                 <a:latin typeface="Bricolage Grotesque"/>
               </a:rPr>
-              <a:t>Le premier support : une réunion partenaires</a:t>
+              <a:t>Votre exercice, réécrit avec votre méthode</a:t>
             </a:r>
           </a:p>
         </p:txBody>
@@ -17248,13 +17354,13 @@
           <a:lstStyle/>
           <a:p>
             <a:r>
-              <a:rPr sz="2000" b="0">
-                <a:solidFill>
-                  <a:srgbClr val="333333"/>
-                </a:solidFill>
-                <a:latin typeface="Bricolage Grotesque"/>
-              </a:rPr>
-              <a:t>Projet fictif : lutter contre l'isolement des personnes âgées à domicile.</a:t>
+              <a:rPr sz="2000" b="1">
+                <a:solidFill>
+                  <a:srgbClr val="1B5E6B"/>
+                </a:solidFill>
+                <a:latin typeface="Bricolage Grotesque"/>
+              </a:rPr>
+              <a:t>Contexte : vous, votre poste visé, et des notes fictives (slide suivante).</a:t>
             </a:r>
           </a:p>
         </p:txBody>
@@ -17288,75 +17394,7 @@
                 </a:solidFill>
                 <a:latin typeface="Bricolage Grotesque"/>
               </a:rPr>
-              <a:t>Livrable : l'ordre du jour d'une réunion de lancement avec les partenaires.</a:t>
-            </a:r>
-          </a:p>
-        </p:txBody>
-      </p:sp>
-      <p:sp>
-        <p:nvSpPr>
-          <p:cNvPr id="8" name="TextBox 7"/>
-          <p:cNvSpPr txBox="1"/>
-          <p:nvPr/>
-        </p:nvSpPr>
-        <p:spPr>
-          <a:xfrm>
-            <a:off x="640080" y="3611880"/>
-            <a:ext cx="10881360" cy="411480"/>
-          </a:xfrm>
-          <a:prstGeom prst="rect">
-            <a:avLst/>
-          </a:prstGeom>
-          <a:noFill/>
-        </p:spPr>
-        <p:txBody>
-          <a:bodyPr wrap="square">
-            <a:spAutoFit/>
-          </a:bodyPr>
-          <a:lstStyle/>
-          <a:p>
-            <a:r>
-              <a:rPr sz="2000" b="0">
-                <a:solidFill>
-                  <a:srgbClr val="333333"/>
-                </a:solidFill>
-                <a:latin typeface="Bricolage Grotesque"/>
-              </a:rPr>
-              <a:t>Avec la méthode : contexte, consigne, format, vérification.</a:t>
-            </a:r>
-          </a:p>
-        </p:txBody>
-      </p:sp>
-      <p:sp>
-        <p:nvSpPr>
-          <p:cNvPr id="9" name="TextBox 8"/>
-          <p:cNvSpPr txBox="1"/>
-          <p:nvPr/>
-        </p:nvSpPr>
-        <p:spPr>
-          <a:xfrm>
-            <a:off x="640080" y="4133088"/>
-            <a:ext cx="10881360" cy="411480"/>
-          </a:xfrm>
-          <a:prstGeom prst="rect">
-            <a:avLst/>
-          </a:prstGeom>
-          <a:noFill/>
-        </p:spPr>
-        <p:txBody>
-          <a:bodyPr wrap="square">
-            <a:spAutoFit/>
-          </a:bodyPr>
-          <a:lstStyle/>
-          <a:p>
-            <a:r>
-              <a:rPr sz="2000" b="0">
-                <a:solidFill>
-                  <a:srgbClr val="333333"/>
-                </a:solidFill>
-                <a:latin typeface="Bricolage Grotesque"/>
-              </a:rPr>
-              <a:t>Puis : « Contredis-moi : qu'est-ce qui manque à cet ordre du jour ? »</a:t>
+              <a:t>Consigne : synthèse des besoins, plan d'action, mail aux partenaires.</a:t>
             </a:r>
           </a:p>
         </p:txBody>
@@ -17503,7 +17541,7 @@
                 </a:solidFill>
                 <a:latin typeface="Bricolage Grotesque"/>
               </a:rPr>
-              <a:t>Exercice · Étape 3</a:t>
+              <a:t>Exercice · Étape 2</a:t>
             </a:r>
           </a:p>
         </p:txBody>
@@ -17538,7 +17576,7 @@
                 </a:solidFill>
                 <a:latin typeface="Bricolage Grotesque"/>
               </a:rPr>
-              <a:t>Votre cadre de confidentialité</a:t>
+              <a:t>Votre exercice, réécrit avec votre méthode</a:t>
             </a:r>
           </a:p>
         </p:txBody>
@@ -17572,7 +17610,7 @@
                 </a:solidFill>
                 <a:latin typeface="Bricolage Grotesque"/>
               </a:rPr>
-              <a:t>Une page : ce qui entre, ce qui n'entre jamais, comment anonymiser.</a:t>
+              <a:t>Contexte : vous, votre poste visé, et des notes fictives (slide suivante).</a:t>
             </a:r>
           </a:p>
         </p:txBody>
@@ -17606,7 +17644,75 @@
                 </a:solidFill>
                 <a:latin typeface="Bricolage Grotesque"/>
               </a:rPr>
-              <a:t>À l'écran : entraînement, conversation temporaire et mémoire de ChatGPT.</a:t>
+              <a:t>Consigne : synthèse des besoins, plan d'action, mail aux partenaires.</a:t>
+            </a:r>
+          </a:p>
+        </p:txBody>
+      </p:sp>
+      <p:sp>
+        <p:nvSpPr>
+          <p:cNvPr id="8" name="TextBox 7"/>
+          <p:cNvSpPr txBox="1"/>
+          <p:nvPr/>
+        </p:nvSpPr>
+        <p:spPr>
+          <a:xfrm>
+            <a:off x="640080" y="3611880"/>
+            <a:ext cx="10881360" cy="411480"/>
+          </a:xfrm>
+          <a:prstGeom prst="rect">
+            <a:avLst/>
+          </a:prstGeom>
+          <a:noFill/>
+        </p:spPr>
+        <p:txBody>
+          <a:bodyPr wrap="square">
+            <a:spAutoFit/>
+          </a:bodyPr>
+          <a:lstStyle/>
+          <a:p>
+            <a:r>
+              <a:rPr sz="2000" b="1">
+                <a:solidFill>
+                  <a:srgbClr val="1B5E6B"/>
+                </a:solidFill>
+                <a:latin typeface="Bricolage Grotesque"/>
+              </a:rPr>
+              <a:t>Format : longueur, ton et structure de chacun des trois livrables.</a:t>
+            </a:r>
+          </a:p>
+        </p:txBody>
+      </p:sp>
+      <p:sp>
+        <p:nvSpPr>
+          <p:cNvPr id="9" name="TextBox 8"/>
+          <p:cNvSpPr txBox="1"/>
+          <p:nvPr/>
+        </p:nvSpPr>
+        <p:spPr>
+          <a:xfrm>
+            <a:off x="640080" y="4133088"/>
+            <a:ext cx="10881360" cy="411480"/>
+          </a:xfrm>
+          <a:prstGeom prst="rect">
+            <a:avLst/>
+          </a:prstGeom>
+          <a:noFill/>
+        </p:spPr>
+        <p:txBody>
+          <a:bodyPr wrap="square">
+            <a:spAutoFit/>
+          </a:bodyPr>
+          <a:lstStyle/>
+          <a:p>
+            <a:r>
+              <a:rPr sz="2000" b="1">
+                <a:solidFill>
+                  <a:srgbClr val="1B5E6B"/>
+                </a:solidFill>
+                <a:latin typeface="Bricolage Grotesque"/>
+              </a:rPr>
+              <a:t>Vérification : « Contredis-moi : qu'est-ce qui manque ou est faux ? »</a:t>
             </a:r>
           </a:p>
         </p:txBody>
@@ -17753,7 +17859,7 @@
                 </a:solidFill>
                 <a:latin typeface="Bricolage Grotesque"/>
               </a:rPr>
-              <a:t>Exercice · Étape 3</a:t>
+              <a:t>Exercice · Les notes fictives à coller</a:t>
             </a:r>
           </a:p>
         </p:txBody>
@@ -17766,29 +17872,28 @@
         </p:nvSpPr>
         <p:spPr>
           <a:xfrm>
-            <a:off x="640080" y="1463040"/>
-            <a:ext cx="10515600" cy="640080"/>
-          </a:xfrm>
-          <a:prstGeom prst="rect">
-            <a:avLst/>
-          </a:prstGeom>
-          <a:noFill/>
-        </p:spPr>
-        <p:txBody>
-          <a:bodyPr wrap="square">
-            <a:spAutoFit/>
-          </a:bodyPr>
-          <a:lstStyle/>
-          <a:p>
-            <a:pPr algn="l"/>
-            <a:r>
-              <a:rPr sz="2600" b="1">
-                <a:solidFill>
-                  <a:srgbClr val="1A1A1A"/>
-                </a:solidFill>
-                <a:latin typeface="Bricolage Grotesque"/>
-              </a:rPr>
-              <a:t>Votre cadre de confidentialité</a:t>
+            <a:off x="640080" y="1554480"/>
+            <a:ext cx="10881360" cy="411480"/>
+          </a:xfrm>
+          <a:prstGeom prst="rect">
+            <a:avLst/>
+          </a:prstGeom>
+          <a:noFill/>
+        </p:spPr>
+        <p:txBody>
+          <a:bodyPr wrap="square">
+            <a:spAutoFit/>
+          </a:bodyPr>
+          <a:lstStyle/>
+          <a:p>
+            <a:r>
+              <a:rPr sz="2000" b="0">
+                <a:solidFill>
+                  <a:srgbClr val="333333"/>
+                </a:solidFill>
+                <a:latin typeface="Bricolage Grotesque"/>
+              </a:rPr>
+              <a:t>Mme A., 84 ans, veuve, vit seule. Sa fille, à Lyon, appelle le dimanche.</a:t>
             </a:r>
           </a:p>
         </p:txBody>
@@ -17801,7 +17906,7 @@
         </p:nvSpPr>
         <p:spPr>
           <a:xfrm>
-            <a:off x="640080" y="2331720"/>
+            <a:off x="640080" y="2075688"/>
             <a:ext cx="10881360" cy="411480"/>
           </a:xfrm>
           <a:prstGeom prst="rect">
@@ -17816,13 +17921,13 @@
           <a:lstStyle/>
           <a:p>
             <a:r>
-              <a:rPr sz="2000" b="1">
-                <a:solidFill>
-                  <a:srgbClr val="1B5E6B"/>
-                </a:solidFill>
-                <a:latin typeface="Bricolage Grotesque"/>
-              </a:rPr>
-              <a:t>Une page : ce qui entre, ce qui n'entre jamais, comment anonymiser.</a:t>
+              <a:rPr sz="2000" b="0">
+                <a:solidFill>
+                  <a:srgbClr val="333333"/>
+                </a:solidFill>
+                <a:latin typeface="Bricolage Grotesque"/>
+              </a:rPr>
+              <a:t>Ne sort plus depuis une chute en août. Une voisine fait ses courses.</a:t>
             </a:r>
           </a:p>
         </p:txBody>
@@ -17835,7 +17940,7 @@
         </p:nvSpPr>
         <p:spPr>
           <a:xfrm>
-            <a:off x="640080" y="2852928"/>
+            <a:off x="640080" y="2596896"/>
             <a:ext cx="10881360" cy="411480"/>
           </a:xfrm>
           <a:prstGeom prst="rect">
@@ -17850,47 +17955,13 @@
           <a:lstStyle/>
           <a:p>
             <a:r>
-              <a:rPr sz="2000" b="1">
-                <a:solidFill>
-                  <a:srgbClr val="1B5E6B"/>
-                </a:solidFill>
-                <a:latin typeface="Bricolage Grotesque"/>
-              </a:rPr>
-              <a:t>À l'écran : entraînement, conversation temporaire et mémoire de ChatGPT.</a:t>
-            </a:r>
-          </a:p>
-        </p:txBody>
-      </p:sp>
-      <p:sp>
-        <p:nvSpPr>
-          <p:cNvPr id="8" name="TextBox 7"/>
-          <p:cNvSpPr txBox="1"/>
-          <p:nvPr/>
-        </p:nvSpPr>
-        <p:spPr>
-          <a:xfrm>
-            <a:off x="640080" y="3611880"/>
-            <a:ext cx="10881360" cy="411480"/>
-          </a:xfrm>
-          <a:prstGeom prst="rect">
-            <a:avLst/>
-          </a:prstGeom>
-          <a:noFill/>
-        </p:spPr>
-        <p:txBody>
-          <a:bodyPr wrap="square">
-            <a:spAutoFit/>
-          </a:bodyPr>
-          <a:lstStyle/>
-          <a:p>
-            <a:r>
-              <a:rPr sz="2000" b="1">
-                <a:solidFill>
-                  <a:srgbClr val="1B5E6B"/>
-                </a:solidFill>
-                <a:latin typeface="Bricolage Grotesque"/>
-              </a:rPr>
-              <a:t>Bonus : votre compte Claude, avec les mêmes précautions.</a:t>
+              <a:rPr sz="2000" b="0">
+                <a:solidFill>
+                  <a:srgbClr val="333333"/>
+                </a:solidFill>
+                <a:latin typeface="Bricolage Grotesque"/>
+              </a:rPr>
+              <a:t>Refuse le portage de repas (« pas besoin »). Aide ménagère 2 h par semaine.</a:t>
             </a:r>
           </a:p>
         </p:txBody>
@@ -17922,17 +17993,25 @@
         <p:spPr>
           <a:xfrm>
             <a:off x="0" y="0"/>
-            <a:ext cx="12191695" cy="6858000"/>
-          </a:xfrm>
-          <a:prstGeom prst="rect">
-            <a:avLst/>
-          </a:prstGeom>
-          <a:solidFill>
-            <a:srgbClr val="0F2B3A"/>
-          </a:solidFill>
+            <a:ext cx="12191695" cy="1143000"/>
+          </a:xfrm>
+          <a:prstGeom prst="rect">
+            <a:avLst/>
+          </a:prstGeom>
           <a:ln>
             <a:noFill/>
           </a:ln>
+          <a:gradFill>
+            <a:gsLst>
+              <a:gs pos="0">
+                <a:srgbClr val="0A2530"/>
+              </a:gs>
+              <a:gs pos="100000">
+                <a:srgbClr val="1E5565"/>
+              </a:gs>
+            </a:gsLst>
+            <a:lin ang="0" scaled="1"/>
+          </a:gradFill>
         </p:spPr>
         <p:style>
           <a:lnRef idx="1">
@@ -17964,8 +18043,8 @@
         </p:nvSpPr>
         <p:spPr>
           <a:xfrm>
-            <a:off x="640080" y="1965960"/>
-            <a:ext cx="2743200" cy="36576"/>
+            <a:off x="0" y="1143000"/>
+            <a:ext cx="12191695" cy="18288"/>
           </a:xfrm>
           <a:prstGeom prst="rect">
             <a:avLst/>
@@ -18007,8 +18086,8 @@
         </p:nvSpPr>
         <p:spPr>
           <a:xfrm>
-            <a:off x="640080" y="1371600"/>
-            <a:ext cx="10515600" cy="731520"/>
+            <a:off x="640080" y="182880"/>
+            <a:ext cx="10515600" cy="822960"/>
           </a:xfrm>
           <a:prstGeom prst="rect">
             <a:avLst/>
@@ -18023,13 +18102,13 @@
           <a:p>
             <a:pPr algn="l"/>
             <a:r>
-              <a:rPr sz="2200" b="1">
-                <a:solidFill>
-                  <a:srgbClr val="E8A000"/>
-                </a:solidFill>
-                <a:latin typeface="Bricolage Grotesque"/>
-              </a:rPr>
-              <a:t>Séquence 4</a:t>
+              <a:rPr sz="3400" b="1">
+                <a:solidFill>
+                  <a:srgbClr val="FFFFFF"/>
+                </a:solidFill>
+                <a:latin typeface="Bricolage Grotesque"/>
+              </a:rPr>
+              <a:t>Exercice · Les notes fictives à coller</a:t>
             </a:r>
           </a:p>
         </p:txBody>
@@ -18042,29 +18121,28 @@
         </p:nvSpPr>
         <p:spPr>
           <a:xfrm>
-            <a:off x="640080" y="2286000"/>
-            <a:ext cx="10698480" cy="1645920"/>
-          </a:xfrm>
-          <a:prstGeom prst="rect">
-            <a:avLst/>
-          </a:prstGeom>
-          <a:noFill/>
-        </p:spPr>
-        <p:txBody>
-          <a:bodyPr wrap="square">
-            <a:spAutoFit/>
-          </a:bodyPr>
-          <a:lstStyle/>
-          <a:p>
-            <a:pPr algn="l"/>
-            <a:r>
-              <a:rPr sz="4200" b="1">
-                <a:solidFill>
-                  <a:srgbClr val="FFFFFF"/>
-                </a:solidFill>
-                <a:latin typeface="Bricolage Grotesque"/>
-              </a:rPr>
-              <a:t>Les devoirs</a:t>
+            <a:off x="640080" y="1554480"/>
+            <a:ext cx="10881360" cy="411480"/>
+          </a:xfrm>
+          <a:prstGeom prst="rect">
+            <a:avLst/>
+          </a:prstGeom>
+          <a:noFill/>
+        </p:spPr>
+        <p:txBody>
+          <a:bodyPr wrap="square">
+            <a:spAutoFit/>
+          </a:bodyPr>
+          <a:lstStyle/>
+          <a:p>
+            <a:r>
+              <a:rPr sz="2000" b="0">
+                <a:solidFill>
+                  <a:srgbClr val="333333"/>
+                </a:solidFill>
+                <a:latin typeface="Bricolage Grotesque"/>
+              </a:rPr>
+              <a:t>Mme A., 84 ans, veuve, vit seule. Sa fille, à Lyon, appelle le dimanche.</a:t>
             </a:r>
           </a:p>
         </p:txBody>
@@ -18077,57 +18155,66 @@
         </p:nvSpPr>
         <p:spPr>
           <a:xfrm>
-            <a:off x="640080" y="4023360"/>
-            <a:ext cx="10515600" cy="731520"/>
-          </a:xfrm>
-          <a:prstGeom prst="rect">
-            <a:avLst/>
-          </a:prstGeom>
-          <a:noFill/>
-        </p:spPr>
-        <p:txBody>
-          <a:bodyPr wrap="square">
-            <a:spAutoFit/>
-          </a:bodyPr>
-          <a:lstStyle/>
-          <a:p>
-            <a:pPr algn="l"/>
+            <a:off x="640080" y="2075688"/>
+            <a:ext cx="10881360" cy="411480"/>
+          </a:xfrm>
+          <a:prstGeom prst="rect">
+            <a:avLst/>
+          </a:prstGeom>
+          <a:noFill/>
+        </p:spPr>
+        <p:txBody>
+          <a:bodyPr wrap="square">
+            <a:spAutoFit/>
+          </a:bodyPr>
+          <a:lstStyle/>
+          <a:p>
             <a:r>
               <a:rPr sz="2000" b="0">
                 <a:solidFill>
-                  <a:srgbClr val="5A8A8F"/>
-                </a:solidFill>
-                <a:latin typeface="Bricolage Grotesque"/>
-              </a:rPr>
-              <a:t>Pour la séance 2, lundi 13 octobre</a:t>
-            </a:r>
-          </a:p>
-        </p:txBody>
-      </p:sp>
-      <p:pic>
-        <p:nvPicPr>
-          <p:cNvPr id="7" name="Picture 6" descr="ia-round.png"/>
-          <p:cNvPicPr>
-            <a:picLocks noChangeAspect="1"/>
-          </p:cNvPicPr>
-          <p:nvPr/>
-        </p:nvPicPr>
-        <p:blipFill>
-          <a:blip r:embed="rId2"/>
-          <a:stretch>
-            <a:fillRect/>
-          </a:stretch>
-        </p:blipFill>
-        <p:spPr>
-          <a:xfrm>
-            <a:off x="457200" y="6217920"/>
-            <a:ext cx="320040" cy="320040"/>
-          </a:xfrm>
-          <a:prstGeom prst="rect">
-            <a:avLst/>
-          </a:prstGeom>
-        </p:spPr>
-      </p:pic>
+                  <a:srgbClr val="333333"/>
+                </a:solidFill>
+                <a:latin typeface="Bricolage Grotesque"/>
+              </a:rPr>
+              <a:t>Ne sort plus depuis une chute en août. Une voisine fait ses courses.</a:t>
+            </a:r>
+          </a:p>
+        </p:txBody>
+      </p:sp>
+      <p:sp>
+        <p:nvSpPr>
+          <p:cNvPr id="7" name="TextBox 6"/>
+          <p:cNvSpPr txBox="1"/>
+          <p:nvPr/>
+        </p:nvSpPr>
+        <p:spPr>
+          <a:xfrm>
+            <a:off x="640080" y="2596896"/>
+            <a:ext cx="10881360" cy="411480"/>
+          </a:xfrm>
+          <a:prstGeom prst="rect">
+            <a:avLst/>
+          </a:prstGeom>
+          <a:noFill/>
+        </p:spPr>
+        <p:txBody>
+          <a:bodyPr wrap="square">
+            <a:spAutoFit/>
+          </a:bodyPr>
+          <a:lstStyle/>
+          <a:p>
+            <a:r>
+              <a:rPr sz="2000" b="0">
+                <a:solidFill>
+                  <a:srgbClr val="333333"/>
+                </a:solidFill>
+                <a:latin typeface="Bricolage Grotesque"/>
+              </a:rPr>
+              <a:t>Refuse le portage de repas (« pas besoin »). Aide ménagère 2 h par semaine.</a:t>
+            </a:r>
+          </a:p>
+        </p:txBody>
+      </p:sp>
       <p:sp>
         <p:nvSpPr>
           <p:cNvPr id="8" name="TextBox 7"/>
@@ -18136,29 +18223,62 @@
         </p:nvSpPr>
         <p:spPr>
           <a:xfrm>
-            <a:off x="868680" y="6199632"/>
-            <a:ext cx="3657600" cy="365760"/>
-          </a:xfrm>
-          <a:prstGeom prst="rect">
-            <a:avLst/>
-          </a:prstGeom>
-          <a:noFill/>
-        </p:spPr>
-        <p:txBody>
-          <a:bodyPr wrap="square">
-            <a:spAutoFit/>
-          </a:bodyPr>
-          <a:lstStyle/>
-          <a:p>
-            <a:pPr algn="l"/>
-            <a:r>
-              <a:rPr sz="1400" b="0">
-                <a:solidFill>
-                  <a:srgbClr val="FFFFFF"/>
-                </a:solidFill>
-                <a:latin typeface="Bricolage Grotesque"/>
-              </a:rPr>
-              <a:t>intelligence academy</a:t>
+            <a:off x="640080" y="3355848"/>
+            <a:ext cx="10881360" cy="411480"/>
+          </a:xfrm>
+          <a:prstGeom prst="rect">
+            <a:avLst/>
+          </a:prstGeom>
+          <a:noFill/>
+        </p:spPr>
+        <p:txBody>
+          <a:bodyPr wrap="square">
+            <a:spAutoFit/>
+          </a:bodyPr>
+          <a:lstStyle/>
+          <a:p>
+            <a:r>
+              <a:rPr sz="2000" b="0">
+                <a:solidFill>
+                  <a:srgbClr val="333333"/>
+                </a:solidFill>
+                <a:latin typeface="Bricolage Grotesque"/>
+              </a:rPr>
+              <a:t>Visite : frigo presque vide, courrier non ouvert, moral bas.</a:t>
+            </a:r>
+          </a:p>
+        </p:txBody>
+      </p:sp>
+      <p:sp>
+        <p:nvSpPr>
+          <p:cNvPr id="9" name="TextBox 8"/>
+          <p:cNvSpPr txBox="1"/>
+          <p:nvPr/>
+        </p:nvSpPr>
+        <p:spPr>
+          <a:xfrm>
+            <a:off x="640080" y="3877056"/>
+            <a:ext cx="10881360" cy="411480"/>
+          </a:xfrm>
+          <a:prstGeom prst="rect">
+            <a:avLst/>
+          </a:prstGeom>
+          <a:noFill/>
+        </p:spPr>
+        <p:txBody>
+          <a:bodyPr wrap="square">
+            <a:spAutoFit/>
+          </a:bodyPr>
+          <a:lstStyle/>
+          <a:p>
+            <a:r>
+              <a:rPr sz="2000" b="0">
+                <a:solidFill>
+                  <a:srgbClr val="333333"/>
+                </a:solidFill>
+                <a:latin typeface="Bricolage Grotesque"/>
+              </a:rPr>
+              <a:t>Aimait le club de belote du quartier. Aucun transport adapté identifié.</a:t>
             </a:r>
           </a:p>
         </p:txBody>
@@ -18305,7 +18425,7 @@
                 </a:solidFill>
                 <a:latin typeface="Bricolage Grotesque"/>
               </a:rPr>
-              <a:t>Devoirs · avant le 13 octobre</a:t>
+              <a:t>Exercice · Les notes fictives à coller</a:t>
             </a:r>
           </a:p>
         </p:txBody>
@@ -18333,13 +18453,13 @@
           <a:lstStyle/>
           <a:p>
             <a:r>
-              <a:rPr sz="2000" b="1">
-                <a:solidFill>
-                  <a:srgbClr val="1B5E6B"/>
-                </a:solidFill>
-                <a:latin typeface="Bricolage Grotesque"/>
-              </a:rPr>
-              <a:t>1.  Finir « Comprendre l'IA sans jargon » (hallucinations, contexte)</a:t>
+              <a:rPr sz="2000" b="0">
+                <a:solidFill>
+                  <a:srgbClr val="333333"/>
+                </a:solidFill>
+                <a:latin typeface="Bricolage Grotesque"/>
+              </a:rPr>
+              <a:t>Mme A., 84 ans, veuve, vit seule. Sa fille, à Lyon, appelle le dimanche.</a:t>
             </a:r>
           </a:p>
         </p:txBody>
@@ -18367,13 +18487,13 @@
           <a:lstStyle/>
           <a:p>
             <a:r>
-              <a:rPr sz="2000" b="1">
-                <a:solidFill>
-                  <a:srgbClr val="1B5E6B"/>
-                </a:solidFill>
-                <a:latin typeface="Bricolage Grotesque"/>
-              </a:rPr>
-              <a:t>2.  Suivre « Focus Midjourney &amp; Nano Banana »</a:t>
+              <a:rPr sz="2000" b="0">
+                <a:solidFill>
+                  <a:srgbClr val="333333"/>
+                </a:solidFill>
+                <a:latin typeface="Bricolage Grotesque"/>
+              </a:rPr>
+              <a:t>Ne sort plus depuis une chute en août. Une voisine fait ses courses.</a:t>
             </a:r>
           </a:p>
         </p:txBody>
@@ -18401,13 +18521,115 @@
           <a:lstStyle/>
           <a:p>
             <a:r>
+              <a:rPr sz="2000" b="0">
+                <a:solidFill>
+                  <a:srgbClr val="333333"/>
+                </a:solidFill>
+                <a:latin typeface="Bricolage Grotesque"/>
+              </a:rPr>
+              <a:t>Refuse le portage de repas (« pas besoin »). Aide ménagère 2 h par semaine.</a:t>
+            </a:r>
+          </a:p>
+        </p:txBody>
+      </p:sp>
+      <p:sp>
+        <p:nvSpPr>
+          <p:cNvPr id="8" name="TextBox 7"/>
+          <p:cNvSpPr txBox="1"/>
+          <p:nvPr/>
+        </p:nvSpPr>
+        <p:spPr>
+          <a:xfrm>
+            <a:off x="640080" y="3355848"/>
+            <a:ext cx="10881360" cy="411480"/>
+          </a:xfrm>
+          <a:prstGeom prst="rect">
+            <a:avLst/>
+          </a:prstGeom>
+          <a:noFill/>
+        </p:spPr>
+        <p:txBody>
+          <a:bodyPr wrap="square">
+            <a:spAutoFit/>
+          </a:bodyPr>
+          <a:lstStyle/>
+          <a:p>
+            <a:r>
+              <a:rPr sz="2000" b="0">
+                <a:solidFill>
+                  <a:srgbClr val="333333"/>
+                </a:solidFill>
+                <a:latin typeface="Bricolage Grotesque"/>
+              </a:rPr>
+              <a:t>Visite : frigo presque vide, courrier non ouvert, moral bas.</a:t>
+            </a:r>
+          </a:p>
+        </p:txBody>
+      </p:sp>
+      <p:sp>
+        <p:nvSpPr>
+          <p:cNvPr id="9" name="TextBox 8"/>
+          <p:cNvSpPr txBox="1"/>
+          <p:nvPr/>
+        </p:nvSpPr>
+        <p:spPr>
+          <a:xfrm>
+            <a:off x="640080" y="3877056"/>
+            <a:ext cx="10881360" cy="411480"/>
+          </a:xfrm>
+          <a:prstGeom prst="rect">
+            <a:avLst/>
+          </a:prstGeom>
+          <a:noFill/>
+        </p:spPr>
+        <p:txBody>
+          <a:bodyPr wrap="square">
+            <a:spAutoFit/>
+          </a:bodyPr>
+          <a:lstStyle/>
+          <a:p>
+            <a:r>
+              <a:rPr sz="2000" b="0">
+                <a:solidFill>
+                  <a:srgbClr val="333333"/>
+                </a:solidFill>
+                <a:latin typeface="Bricolage Grotesque"/>
+              </a:rPr>
+              <a:t>Aimait le club de belote du quartier. Aucun transport adapté identifié.</a:t>
+            </a:r>
+          </a:p>
+        </p:txBody>
+      </p:sp>
+      <p:sp>
+        <p:nvSpPr>
+          <p:cNvPr id="10" name="TextBox 9"/>
+          <p:cNvSpPr txBox="1"/>
+          <p:nvPr/>
+        </p:nvSpPr>
+        <p:spPr>
+          <a:xfrm>
+            <a:off x="640080" y="4636008"/>
+            <a:ext cx="10881360" cy="411480"/>
+          </a:xfrm>
+          <a:prstGeom prst="rect">
+            <a:avLst/>
+          </a:prstGeom>
+          <a:noFill/>
+        </p:spPr>
+        <p:txBody>
+          <a:bodyPr wrap="square">
+            <a:spAutoFit/>
+          </a:bodyPr>
+          <a:lstStyle/>
+          <a:p>
+            <a:r>
               <a:rPr sz="2000" b="1">
                 <a:solidFill>
                   <a:srgbClr val="1B5E6B"/>
                 </a:solidFill>
                 <a:latin typeface="Bricolage Grotesque"/>
               </a:rPr>
-              <a:t>3.  Suivre « Claude — Les fondamentaux », compte créé en séance</a:t>
+              <a:t>Situation inventée pour l'exercice : aucune personne réelle.</a:t>
             </a:r>
           </a:p>
         </p:txBody>
@@ -18554,7 +18776,7 @@
                 </a:solidFill>
                 <a:latin typeface="Bricolage Grotesque"/>
               </a:rPr>
-              <a:t>Devoirs · avant le 13 octobre</a:t>
+              <a:t>Exercice · Étape 3</a:t>
             </a:r>
           </a:p>
         </p:txBody>
@@ -18567,7 +18789,42 @@
         </p:nvSpPr>
         <p:spPr>
           <a:xfrm>
-            <a:off x="640080" y="1554480"/>
+            <a:off x="640080" y="1463040"/>
+            <a:ext cx="10515600" cy="640080"/>
+          </a:xfrm>
+          <a:prstGeom prst="rect">
+            <a:avLst/>
+          </a:prstGeom>
+          <a:noFill/>
+        </p:spPr>
+        <p:txBody>
+          <a:bodyPr wrap="square">
+            <a:spAutoFit/>
+          </a:bodyPr>
+          <a:lstStyle/>
+          <a:p>
+            <a:pPr algn="l"/>
+            <a:r>
+              <a:rPr sz="2600" b="1">
+                <a:solidFill>
+                  <a:srgbClr val="1A1A1A"/>
+                </a:solidFill>
+                <a:latin typeface="Bricolage Grotesque"/>
+              </a:rPr>
+              <a:t>Votre cadre de confidentialité</a:t>
+            </a:r>
+          </a:p>
+        </p:txBody>
+      </p:sp>
+      <p:sp>
+        <p:nvSpPr>
+          <p:cNvPr id="6" name="TextBox 5"/>
+          <p:cNvSpPr txBox="1"/>
+          <p:nvPr/>
+        </p:nvSpPr>
+        <p:spPr>
+          <a:xfrm>
+            <a:off x="640080" y="2331720"/>
             <a:ext cx="10881360" cy="411480"/>
           </a:xfrm>
           <a:prstGeom prst="rect">
@@ -18588,20 +18845,20 @@
                 </a:solidFill>
                 <a:latin typeface="Bricolage Grotesque"/>
               </a:rPr>
-              <a:t>1.  Finir « Comprendre l'IA sans jargon » (hallucinations, contexte)</a:t>
-            </a:r>
-          </a:p>
-        </p:txBody>
-      </p:sp>
-      <p:sp>
-        <p:nvSpPr>
-          <p:cNvPr id="6" name="TextBox 5"/>
-          <p:cNvSpPr txBox="1"/>
-          <p:nvPr/>
-        </p:nvSpPr>
-        <p:spPr>
-          <a:xfrm>
-            <a:off x="640080" y="2075688"/>
+              <a:t>Une page : ce qui entre, ce qui n'entre jamais, comment anonymiser.</a:t>
+            </a:r>
+          </a:p>
+        </p:txBody>
+      </p:sp>
+      <p:sp>
+        <p:nvSpPr>
+          <p:cNvPr id="7" name="TextBox 6"/>
+          <p:cNvSpPr txBox="1"/>
+          <p:nvPr/>
+        </p:nvSpPr>
+        <p:spPr>
+          <a:xfrm>
+            <a:off x="640080" y="2852928"/>
             <a:ext cx="10881360" cy="411480"/>
           </a:xfrm>
           <a:prstGeom prst="rect">
@@ -18622,143 +18879,7 @@
                 </a:solidFill>
                 <a:latin typeface="Bricolage Grotesque"/>
               </a:rPr>
-              <a:t>2.  Suivre « Focus Midjourney &amp; Nano Banana »</a:t>
-            </a:r>
-          </a:p>
-        </p:txBody>
-      </p:sp>
-      <p:sp>
-        <p:nvSpPr>
-          <p:cNvPr id="7" name="TextBox 6"/>
-          <p:cNvSpPr txBox="1"/>
-          <p:nvPr/>
-        </p:nvSpPr>
-        <p:spPr>
-          <a:xfrm>
-            <a:off x="640080" y="2596896"/>
-            <a:ext cx="10881360" cy="411480"/>
-          </a:xfrm>
-          <a:prstGeom prst="rect">
-            <a:avLst/>
-          </a:prstGeom>
-          <a:noFill/>
-        </p:spPr>
-        <p:txBody>
-          <a:bodyPr wrap="square">
-            <a:spAutoFit/>
-          </a:bodyPr>
-          <a:lstStyle/>
-          <a:p>
-            <a:r>
-              <a:rPr sz="2000" b="1">
-                <a:solidFill>
-                  <a:srgbClr val="1B5E6B"/>
-                </a:solidFill>
-                <a:latin typeface="Bricolage Grotesque"/>
-              </a:rPr>
-              <a:t>3.  Suivre « Claude — Les fondamentaux », compte créé en séance</a:t>
-            </a:r>
-          </a:p>
-        </p:txBody>
-      </p:sp>
-      <p:sp>
-        <p:nvSpPr>
-          <p:cNvPr id="8" name="TextBox 7"/>
-          <p:cNvSpPr txBox="1"/>
-          <p:nvPr/>
-        </p:nvSpPr>
-        <p:spPr>
-          <a:xfrm>
-            <a:off x="640080" y="3355848"/>
-            <a:ext cx="10881360" cy="411480"/>
-          </a:xfrm>
-          <a:prstGeom prst="rect">
-            <a:avLst/>
-          </a:prstGeom>
-          <a:noFill/>
-        </p:spPr>
-        <p:txBody>
-          <a:bodyPr wrap="square">
-            <a:spAutoFit/>
-          </a:bodyPr>
-          <a:lstStyle/>
-          <a:p>
-            <a:r>
-              <a:rPr sz="2000" b="1">
-                <a:solidFill>
-                  <a:srgbClr val="1B5E6B"/>
-                </a:solidFill>
-                <a:latin typeface="Bricolage Grotesque"/>
-              </a:rPr>
-              <a:t>4.  Utiliser votre base de contexte sur 3 situations réelles</a:t>
-            </a:r>
-          </a:p>
-        </p:txBody>
-      </p:sp>
-      <p:sp>
-        <p:nvSpPr>
-          <p:cNvPr id="9" name="TextBox 8"/>
-          <p:cNvSpPr txBox="1"/>
-          <p:nvPr/>
-        </p:nvSpPr>
-        <p:spPr>
-          <a:xfrm>
-            <a:off x="640080" y="3877056"/>
-            <a:ext cx="10881360" cy="411480"/>
-          </a:xfrm>
-          <a:prstGeom prst="rect">
-            <a:avLst/>
-          </a:prstGeom>
-          <a:noFill/>
-        </p:spPr>
-        <p:txBody>
-          <a:bodyPr wrap="square">
-            <a:spAutoFit/>
-          </a:bodyPr>
-          <a:lstStyle/>
-          <a:p>
-            <a:r>
-              <a:rPr sz="2000" b="1">
-                <a:solidFill>
-                  <a:srgbClr val="1B5E6B"/>
-                </a:solidFill>
-                <a:latin typeface="Bricolage Grotesque"/>
-              </a:rPr>
-              <a:t>5.  Écrire vos limites d'usage personnelles (5 lignes)</a:t>
-            </a:r>
-          </a:p>
-        </p:txBody>
-      </p:sp>
-      <p:sp>
-        <p:nvSpPr>
-          <p:cNvPr id="10" name="TextBox 9"/>
-          <p:cNvSpPr txBox="1"/>
-          <p:nvPr/>
-        </p:nvSpPr>
-        <p:spPr>
-          <a:xfrm>
-            <a:off x="640080" y="4398264"/>
-            <a:ext cx="10881360" cy="411480"/>
-          </a:xfrm>
-          <a:prstGeom prst="rect">
-            <a:avLst/>
-          </a:prstGeom>
-          <a:noFill/>
-        </p:spPr>
-        <p:txBody>
-          <a:bodyPr wrap="square">
-            <a:spAutoFit/>
-          </a:bodyPr>
-          <a:lstStyle/>
-          <a:p>
-            <a:r>
-              <a:rPr sz="2000" b="1">
-                <a:solidFill>
-                  <a:srgbClr val="1B5E6B"/>
-                </a:solidFill>
-                <a:latin typeface="Bricolage Grotesque"/>
-              </a:rPr>
-              <a:t>6.  M'envoyer le projet visuel, fil rouge de la S2</a:t>
+              <a:t>À l'écran : entraînement, conversation temporaire et mémoire de ChatGPT.</a:t>
             </a:r>
           </a:p>
         </p:txBody>
@@ -18790,17 +18911,25 @@
         <p:spPr>
           <a:xfrm>
             <a:off x="0" y="0"/>
-            <a:ext cx="12191695" cy="6858000"/>
-          </a:xfrm>
-          <a:prstGeom prst="rect">
-            <a:avLst/>
-          </a:prstGeom>
-          <a:solidFill>
-            <a:srgbClr val="000000"/>
-          </a:solidFill>
+            <a:ext cx="12191695" cy="1143000"/>
+          </a:xfrm>
+          <a:prstGeom prst="rect">
+            <a:avLst/>
+          </a:prstGeom>
           <a:ln>
             <a:noFill/>
           </a:ln>
+          <a:gradFill>
+            <a:gsLst>
+              <a:gs pos="0">
+                <a:srgbClr val="0A2530"/>
+              </a:gs>
+              <a:gs pos="100000">
+                <a:srgbClr val="1E5565"/>
+              </a:gs>
+            </a:gsLst>
+            <a:lin ang="0" scaled="1"/>
+          </a:gradFill>
         </p:spPr>
         <p:style>
           <a:lnRef idx="1">
@@ -18826,42 +18955,431 @@
       </p:sp>
       <p:sp>
         <p:nvSpPr>
-          <p:cNvPr id="3" name="TextBox 2"/>
-          <p:cNvSpPr txBox="1"/>
-          <p:nvPr/>
-        </p:nvSpPr>
-        <p:spPr>
-          <a:xfrm>
-            <a:off x="0" y="2560320"/>
-            <a:ext cx="12191695" cy="1828800"/>
-          </a:xfrm>
-          <a:prstGeom prst="rect">
-            <a:avLst/>
-          </a:prstGeom>
-          <a:noFill/>
-        </p:spPr>
-        <p:txBody>
-          <a:bodyPr wrap="square">
-            <a:spAutoFit/>
-          </a:bodyPr>
+          <p:cNvPr id="3" name="Rectangle 2"/>
+          <p:cNvSpPr/>
+          <p:nvPr/>
+        </p:nvSpPr>
+        <p:spPr>
+          <a:xfrm>
+            <a:off x="0" y="1143000"/>
+            <a:ext cx="12191695" cy="18288"/>
+          </a:xfrm>
+          <a:prstGeom prst="rect">
+            <a:avLst/>
+          </a:prstGeom>
+          <a:solidFill>
+            <a:srgbClr val="E8A000"/>
+          </a:solidFill>
+          <a:ln>
+            <a:noFill/>
+          </a:ln>
+        </p:spPr>
+        <p:style>
+          <a:lnRef idx="1">
+            <a:schemeClr val="accent1"/>
+          </a:lnRef>
+          <a:fillRef idx="3">
+            <a:schemeClr val="accent1"/>
+          </a:fillRef>
+          <a:effectRef idx="2">
+            <a:schemeClr val="accent1"/>
+          </a:effectRef>
+          <a:fontRef idx="minor">
+            <a:schemeClr val="lt1"/>
+          </a:fontRef>
+        </p:style>
+        <p:txBody>
+          <a:bodyPr rtlCol="0" anchor="ctr"/>
           <a:lstStyle/>
           <a:p>
             <a:pPr algn="ctr"/>
-            <a:r>
-              <a:rPr sz="6400" b="1">
+          </a:p>
+        </p:txBody>
+      </p:sp>
+      <p:sp>
+        <p:nvSpPr>
+          <p:cNvPr id="4" name="TextBox 3"/>
+          <p:cNvSpPr txBox="1"/>
+          <p:nvPr/>
+        </p:nvSpPr>
+        <p:spPr>
+          <a:xfrm>
+            <a:off x="640080" y="182880"/>
+            <a:ext cx="10515600" cy="822960"/>
+          </a:xfrm>
+          <a:prstGeom prst="rect">
+            <a:avLst/>
+          </a:prstGeom>
+          <a:noFill/>
+        </p:spPr>
+        <p:txBody>
+          <a:bodyPr wrap="square">
+            <a:spAutoFit/>
+          </a:bodyPr>
+          <a:lstStyle/>
+          <a:p>
+            <a:pPr algn="l"/>
+            <a:r>
+              <a:rPr sz="3400" b="1">
                 <a:solidFill>
                   <a:srgbClr val="FFFFFF"/>
                 </a:solidFill>
                 <a:latin typeface="Bricolage Grotesque"/>
               </a:rPr>
-              <a:t>Des questions ?</a:t>
+              <a:t>Exercice · Étape 3</a:t>
+            </a:r>
+          </a:p>
+        </p:txBody>
+      </p:sp>
+      <p:sp>
+        <p:nvSpPr>
+          <p:cNvPr id="5" name="TextBox 4"/>
+          <p:cNvSpPr txBox="1"/>
+          <p:nvPr/>
+        </p:nvSpPr>
+        <p:spPr>
+          <a:xfrm>
+            <a:off x="640080" y="1463040"/>
+            <a:ext cx="10515600" cy="640080"/>
+          </a:xfrm>
+          <a:prstGeom prst="rect">
+            <a:avLst/>
+          </a:prstGeom>
+          <a:noFill/>
+        </p:spPr>
+        <p:txBody>
+          <a:bodyPr wrap="square">
+            <a:spAutoFit/>
+          </a:bodyPr>
+          <a:lstStyle/>
+          <a:p>
+            <a:pPr algn="l"/>
+            <a:r>
+              <a:rPr sz="2600" b="1">
+                <a:solidFill>
+                  <a:srgbClr val="1A1A1A"/>
+                </a:solidFill>
+                <a:latin typeface="Bricolage Grotesque"/>
+              </a:rPr>
+              <a:t>Votre cadre de confidentialité</a:t>
+            </a:r>
+          </a:p>
+        </p:txBody>
+      </p:sp>
+      <p:sp>
+        <p:nvSpPr>
+          <p:cNvPr id="6" name="TextBox 5"/>
+          <p:cNvSpPr txBox="1"/>
+          <p:nvPr/>
+        </p:nvSpPr>
+        <p:spPr>
+          <a:xfrm>
+            <a:off x="640080" y="2331720"/>
+            <a:ext cx="10881360" cy="411480"/>
+          </a:xfrm>
+          <a:prstGeom prst="rect">
+            <a:avLst/>
+          </a:prstGeom>
+          <a:noFill/>
+        </p:spPr>
+        <p:txBody>
+          <a:bodyPr wrap="square">
+            <a:spAutoFit/>
+          </a:bodyPr>
+          <a:lstStyle/>
+          <a:p>
+            <a:r>
+              <a:rPr sz="2000" b="1">
+                <a:solidFill>
+                  <a:srgbClr val="1B5E6B"/>
+                </a:solidFill>
+                <a:latin typeface="Bricolage Grotesque"/>
+              </a:rPr>
+              <a:t>Une page : ce qui entre, ce qui n'entre jamais, comment anonymiser.</a:t>
+            </a:r>
+          </a:p>
+        </p:txBody>
+      </p:sp>
+      <p:sp>
+        <p:nvSpPr>
+          <p:cNvPr id="7" name="TextBox 6"/>
+          <p:cNvSpPr txBox="1"/>
+          <p:nvPr/>
+        </p:nvSpPr>
+        <p:spPr>
+          <a:xfrm>
+            <a:off x="640080" y="2852928"/>
+            <a:ext cx="10881360" cy="411480"/>
+          </a:xfrm>
+          <a:prstGeom prst="rect">
+            <a:avLst/>
+          </a:prstGeom>
+          <a:noFill/>
+        </p:spPr>
+        <p:txBody>
+          <a:bodyPr wrap="square">
+            <a:spAutoFit/>
+          </a:bodyPr>
+          <a:lstStyle/>
+          <a:p>
+            <a:r>
+              <a:rPr sz="2000" b="1">
+                <a:solidFill>
+                  <a:srgbClr val="1B5E6B"/>
+                </a:solidFill>
+                <a:latin typeface="Bricolage Grotesque"/>
+              </a:rPr>
+              <a:t>À l'écran : entraînement, conversation temporaire et mémoire de ChatGPT.</a:t>
+            </a:r>
+          </a:p>
+        </p:txBody>
+      </p:sp>
+      <p:sp>
+        <p:nvSpPr>
+          <p:cNvPr id="8" name="TextBox 7"/>
+          <p:cNvSpPr txBox="1"/>
+          <p:nvPr/>
+        </p:nvSpPr>
+        <p:spPr>
+          <a:xfrm>
+            <a:off x="640080" y="3611880"/>
+            <a:ext cx="10881360" cy="411480"/>
+          </a:xfrm>
+          <a:prstGeom prst="rect">
+            <a:avLst/>
+          </a:prstGeom>
+          <a:noFill/>
+        </p:spPr>
+        <p:txBody>
+          <a:bodyPr wrap="square">
+            <a:spAutoFit/>
+          </a:bodyPr>
+          <a:lstStyle/>
+          <a:p>
+            <a:r>
+              <a:rPr sz="2000" b="1">
+                <a:solidFill>
+                  <a:srgbClr val="1B5E6B"/>
+                </a:solidFill>
+                <a:latin typeface="Bricolage Grotesque"/>
+              </a:rPr>
+              <a:t>Bonus : votre compte Claude, avec les mêmes précautions.</a:t>
+            </a:r>
+          </a:p>
+        </p:txBody>
+      </p:sp>
+    </p:spTree>
+  </p:cSld>
+  <p:clrMapOvr>
+    <a:masterClrMapping/>
+  </p:clrMapOvr>
+</p:sld>
+</file>
+
+<file path=ppt/slides/slide58.xml><?xml version="1.0" encoding="utf-8"?>
+<p:sld xmlns:a="http://schemas.openxmlformats.org/drawingml/2006/main" xmlns:p="http://schemas.openxmlformats.org/presentationml/2006/main" xmlns:r="http://schemas.openxmlformats.org/officeDocument/2006/relationships">
+  <p:cSld>
+    <p:spTree>
+      <p:nvGrpSpPr>
+        <p:cNvPr id="1" name=""/>
+        <p:cNvGrpSpPr/>
+        <p:nvPr/>
+      </p:nvGrpSpPr>
+      <p:grpSpPr/>
+      <p:sp>
+        <p:nvSpPr>
+          <p:cNvPr id="2" name="Rectangle 1"/>
+          <p:cNvSpPr/>
+          <p:nvPr/>
+        </p:nvSpPr>
+        <p:spPr>
+          <a:xfrm>
+            <a:off x="0" y="0"/>
+            <a:ext cx="12191695" cy="6858000"/>
+          </a:xfrm>
+          <a:prstGeom prst="rect">
+            <a:avLst/>
+          </a:prstGeom>
+          <a:solidFill>
+            <a:srgbClr val="0F2B3A"/>
+          </a:solidFill>
+          <a:ln>
+            <a:noFill/>
+          </a:ln>
+        </p:spPr>
+        <p:style>
+          <a:lnRef idx="1">
+            <a:schemeClr val="accent1"/>
+          </a:lnRef>
+          <a:fillRef idx="3">
+            <a:schemeClr val="accent1"/>
+          </a:fillRef>
+          <a:effectRef idx="2">
+            <a:schemeClr val="accent1"/>
+          </a:effectRef>
+          <a:fontRef idx="minor">
+            <a:schemeClr val="lt1"/>
+          </a:fontRef>
+        </p:style>
+        <p:txBody>
+          <a:bodyPr rtlCol="0" anchor="ctr"/>
+          <a:lstStyle/>
+          <a:p>
+            <a:pPr algn="ctr"/>
+          </a:p>
+        </p:txBody>
+      </p:sp>
+      <p:sp>
+        <p:nvSpPr>
+          <p:cNvPr id="3" name="Rectangle 2"/>
+          <p:cNvSpPr/>
+          <p:nvPr/>
+        </p:nvSpPr>
+        <p:spPr>
+          <a:xfrm>
+            <a:off x="640080" y="1965960"/>
+            <a:ext cx="2743200" cy="36576"/>
+          </a:xfrm>
+          <a:prstGeom prst="rect">
+            <a:avLst/>
+          </a:prstGeom>
+          <a:solidFill>
+            <a:srgbClr val="E8A000"/>
+          </a:solidFill>
+          <a:ln>
+            <a:noFill/>
+          </a:ln>
+        </p:spPr>
+        <p:style>
+          <a:lnRef idx="1">
+            <a:schemeClr val="accent1"/>
+          </a:lnRef>
+          <a:fillRef idx="3">
+            <a:schemeClr val="accent1"/>
+          </a:fillRef>
+          <a:effectRef idx="2">
+            <a:schemeClr val="accent1"/>
+          </a:effectRef>
+          <a:fontRef idx="minor">
+            <a:schemeClr val="lt1"/>
+          </a:fontRef>
+        </p:style>
+        <p:txBody>
+          <a:bodyPr rtlCol="0" anchor="ctr"/>
+          <a:lstStyle/>
+          <a:p>
+            <a:pPr algn="ctr"/>
+          </a:p>
+        </p:txBody>
+      </p:sp>
+      <p:sp>
+        <p:nvSpPr>
+          <p:cNvPr id="4" name="TextBox 3"/>
+          <p:cNvSpPr txBox="1"/>
+          <p:nvPr/>
+        </p:nvSpPr>
+        <p:spPr>
+          <a:xfrm>
+            <a:off x="640080" y="1371600"/>
+            <a:ext cx="10515600" cy="731520"/>
+          </a:xfrm>
+          <a:prstGeom prst="rect">
+            <a:avLst/>
+          </a:prstGeom>
+          <a:noFill/>
+        </p:spPr>
+        <p:txBody>
+          <a:bodyPr wrap="square">
+            <a:spAutoFit/>
+          </a:bodyPr>
+          <a:lstStyle/>
+          <a:p>
+            <a:pPr algn="l"/>
+            <a:r>
+              <a:rPr sz="2200" b="1">
+                <a:solidFill>
+                  <a:srgbClr val="E8A000"/>
+                </a:solidFill>
+                <a:latin typeface="Bricolage Grotesque"/>
+              </a:rPr>
+              <a:t>Séquence 4</a:t>
+            </a:r>
+          </a:p>
+        </p:txBody>
+      </p:sp>
+      <p:sp>
+        <p:nvSpPr>
+          <p:cNvPr id="5" name="TextBox 4"/>
+          <p:cNvSpPr txBox="1"/>
+          <p:nvPr/>
+        </p:nvSpPr>
+        <p:spPr>
+          <a:xfrm>
+            <a:off x="640080" y="2286000"/>
+            <a:ext cx="10698480" cy="1645920"/>
+          </a:xfrm>
+          <a:prstGeom prst="rect">
+            <a:avLst/>
+          </a:prstGeom>
+          <a:noFill/>
+        </p:spPr>
+        <p:txBody>
+          <a:bodyPr wrap="square">
+            <a:spAutoFit/>
+          </a:bodyPr>
+          <a:lstStyle/>
+          <a:p>
+            <a:pPr algn="l"/>
+            <a:r>
+              <a:rPr sz="4200" b="1">
+                <a:solidFill>
+                  <a:srgbClr val="FFFFFF"/>
+                </a:solidFill>
+                <a:latin typeface="Bricolage Grotesque"/>
+              </a:rPr>
+              <a:t>Les devoirs</a:t>
+            </a:r>
+          </a:p>
+        </p:txBody>
+      </p:sp>
+      <p:sp>
+        <p:nvSpPr>
+          <p:cNvPr id="6" name="TextBox 5"/>
+          <p:cNvSpPr txBox="1"/>
+          <p:nvPr/>
+        </p:nvSpPr>
+        <p:spPr>
+          <a:xfrm>
+            <a:off x="640080" y="4023360"/>
+            <a:ext cx="10515600" cy="731520"/>
+          </a:xfrm>
+          <a:prstGeom prst="rect">
+            <a:avLst/>
+          </a:prstGeom>
+          <a:noFill/>
+        </p:spPr>
+        <p:txBody>
+          <a:bodyPr wrap="square">
+            <a:spAutoFit/>
+          </a:bodyPr>
+          <a:lstStyle/>
+          <a:p>
+            <a:pPr algn="l"/>
+            <a:r>
+              <a:rPr sz="2000" b="0">
+                <a:solidFill>
+                  <a:srgbClr val="5A8A8F"/>
+                </a:solidFill>
+                <a:latin typeface="Bricolage Grotesque"/>
+              </a:rPr>
+              <a:t>Pour la séance 2, lundi 13 octobre</a:t>
             </a:r>
           </a:p>
         </p:txBody>
       </p:sp>
       <p:pic>
         <p:nvPicPr>
-          <p:cNvPr id="4" name="Picture 3" descr="ia-round.png"/>
+          <p:cNvPr id="7" name="Picture 6" descr="ia-round.png"/>
           <p:cNvPicPr>
             <a:picLocks noChangeAspect="1"/>
           </p:cNvPicPr>
@@ -18875,7 +19393,7 @@
         </p:blipFill>
         <p:spPr>
           <a:xfrm>
-            <a:off x="4846320" y="4754880"/>
+            <a:off x="457200" y="6217920"/>
             <a:ext cx="320040" cy="320040"/>
           </a:xfrm>
           <a:prstGeom prst="rect">
@@ -18885,35 +19403,284 @@
       </p:pic>
       <p:sp>
         <p:nvSpPr>
+          <p:cNvPr id="8" name="TextBox 7"/>
+          <p:cNvSpPr txBox="1"/>
+          <p:nvPr/>
+        </p:nvSpPr>
+        <p:spPr>
+          <a:xfrm>
+            <a:off x="868680" y="6199632"/>
+            <a:ext cx="3657600" cy="365760"/>
+          </a:xfrm>
+          <a:prstGeom prst="rect">
+            <a:avLst/>
+          </a:prstGeom>
+          <a:noFill/>
+        </p:spPr>
+        <p:txBody>
+          <a:bodyPr wrap="square">
+            <a:spAutoFit/>
+          </a:bodyPr>
+          <a:lstStyle/>
+          <a:p>
+            <a:pPr algn="l"/>
+            <a:r>
+              <a:rPr sz="1400" b="0">
+                <a:solidFill>
+                  <a:srgbClr val="FFFFFF"/>
+                </a:solidFill>
+                <a:latin typeface="Bricolage Grotesque"/>
+              </a:rPr>
+              <a:t>intelligence academy</a:t>
+            </a:r>
+          </a:p>
+        </p:txBody>
+      </p:sp>
+    </p:spTree>
+  </p:cSld>
+  <p:clrMapOvr>
+    <a:masterClrMapping/>
+  </p:clrMapOvr>
+</p:sld>
+</file>
+
+<file path=ppt/slides/slide59.xml><?xml version="1.0" encoding="utf-8"?>
+<p:sld xmlns:a="http://schemas.openxmlformats.org/drawingml/2006/main" xmlns:p="http://schemas.openxmlformats.org/presentationml/2006/main" xmlns:r="http://schemas.openxmlformats.org/officeDocument/2006/relationships">
+  <p:cSld>
+    <p:spTree>
+      <p:nvGrpSpPr>
+        <p:cNvPr id="1" name=""/>
+        <p:cNvGrpSpPr/>
+        <p:nvPr/>
+      </p:nvGrpSpPr>
+      <p:grpSpPr/>
+      <p:sp>
+        <p:nvSpPr>
+          <p:cNvPr id="2" name="Rectangle 1"/>
+          <p:cNvSpPr/>
+          <p:nvPr/>
+        </p:nvSpPr>
+        <p:spPr>
+          <a:xfrm>
+            <a:off x="0" y="0"/>
+            <a:ext cx="12191695" cy="1143000"/>
+          </a:xfrm>
+          <a:prstGeom prst="rect">
+            <a:avLst/>
+          </a:prstGeom>
+          <a:ln>
+            <a:noFill/>
+          </a:ln>
+          <a:gradFill>
+            <a:gsLst>
+              <a:gs pos="0">
+                <a:srgbClr val="0A2530"/>
+              </a:gs>
+              <a:gs pos="100000">
+                <a:srgbClr val="1E5565"/>
+              </a:gs>
+            </a:gsLst>
+            <a:lin ang="0" scaled="1"/>
+          </a:gradFill>
+        </p:spPr>
+        <p:style>
+          <a:lnRef idx="1">
+            <a:schemeClr val="accent1"/>
+          </a:lnRef>
+          <a:fillRef idx="3">
+            <a:schemeClr val="accent1"/>
+          </a:fillRef>
+          <a:effectRef idx="2">
+            <a:schemeClr val="accent1"/>
+          </a:effectRef>
+          <a:fontRef idx="minor">
+            <a:schemeClr val="lt1"/>
+          </a:fontRef>
+        </p:style>
+        <p:txBody>
+          <a:bodyPr rtlCol="0" anchor="ctr"/>
+          <a:lstStyle/>
+          <a:p>
+            <a:pPr algn="ctr"/>
+          </a:p>
+        </p:txBody>
+      </p:sp>
+      <p:sp>
+        <p:nvSpPr>
+          <p:cNvPr id="3" name="Rectangle 2"/>
+          <p:cNvSpPr/>
+          <p:nvPr/>
+        </p:nvSpPr>
+        <p:spPr>
+          <a:xfrm>
+            <a:off x="0" y="1143000"/>
+            <a:ext cx="12191695" cy="18288"/>
+          </a:xfrm>
+          <a:prstGeom prst="rect">
+            <a:avLst/>
+          </a:prstGeom>
+          <a:solidFill>
+            <a:srgbClr val="E8A000"/>
+          </a:solidFill>
+          <a:ln>
+            <a:noFill/>
+          </a:ln>
+        </p:spPr>
+        <p:style>
+          <a:lnRef idx="1">
+            <a:schemeClr val="accent1"/>
+          </a:lnRef>
+          <a:fillRef idx="3">
+            <a:schemeClr val="accent1"/>
+          </a:fillRef>
+          <a:effectRef idx="2">
+            <a:schemeClr val="accent1"/>
+          </a:effectRef>
+          <a:fontRef idx="minor">
+            <a:schemeClr val="lt1"/>
+          </a:fontRef>
+        </p:style>
+        <p:txBody>
+          <a:bodyPr rtlCol="0" anchor="ctr"/>
+          <a:lstStyle/>
+          <a:p>
+            <a:pPr algn="ctr"/>
+          </a:p>
+        </p:txBody>
+      </p:sp>
+      <p:sp>
+        <p:nvSpPr>
+          <p:cNvPr id="4" name="TextBox 3"/>
+          <p:cNvSpPr txBox="1"/>
+          <p:nvPr/>
+        </p:nvSpPr>
+        <p:spPr>
+          <a:xfrm>
+            <a:off x="640080" y="182880"/>
+            <a:ext cx="10515600" cy="822960"/>
+          </a:xfrm>
+          <a:prstGeom prst="rect">
+            <a:avLst/>
+          </a:prstGeom>
+          <a:noFill/>
+        </p:spPr>
+        <p:txBody>
+          <a:bodyPr wrap="square">
+            <a:spAutoFit/>
+          </a:bodyPr>
+          <a:lstStyle/>
+          <a:p>
+            <a:pPr algn="l"/>
+            <a:r>
+              <a:rPr sz="3400" b="1">
+                <a:solidFill>
+                  <a:srgbClr val="FFFFFF"/>
+                </a:solidFill>
+                <a:latin typeface="Bricolage Grotesque"/>
+              </a:rPr>
+              <a:t>Devoirs · avant le 13 octobre</a:t>
+            </a:r>
+          </a:p>
+        </p:txBody>
+      </p:sp>
+      <p:sp>
+        <p:nvSpPr>
           <p:cNvPr id="5" name="TextBox 4"/>
           <p:cNvSpPr txBox="1"/>
           <p:nvPr/>
         </p:nvSpPr>
         <p:spPr>
           <a:xfrm>
-            <a:off x="5257800" y="4736592"/>
-            <a:ext cx="3657600" cy="365760"/>
-          </a:xfrm>
-          <a:prstGeom prst="rect">
-            <a:avLst/>
-          </a:prstGeom>
-          <a:noFill/>
-        </p:spPr>
-        <p:txBody>
-          <a:bodyPr wrap="square">
-            <a:spAutoFit/>
-          </a:bodyPr>
-          <a:lstStyle/>
-          <a:p>
-            <a:pPr algn="l"/>
-            <a:r>
-              <a:rPr sz="1400" b="0">
-                <a:solidFill>
-                  <a:srgbClr val="FFFFFF"/>
-                </a:solidFill>
-                <a:latin typeface="Bricolage Grotesque"/>
-              </a:rPr>
-              <a:t>intelligence academy</a:t>
+            <a:off x="640080" y="1554480"/>
+            <a:ext cx="10881360" cy="411480"/>
+          </a:xfrm>
+          <a:prstGeom prst="rect">
+            <a:avLst/>
+          </a:prstGeom>
+          <a:noFill/>
+        </p:spPr>
+        <p:txBody>
+          <a:bodyPr wrap="square">
+            <a:spAutoFit/>
+          </a:bodyPr>
+          <a:lstStyle/>
+          <a:p>
+            <a:r>
+              <a:rPr sz="2000" b="1">
+                <a:solidFill>
+                  <a:srgbClr val="1B5E6B"/>
+                </a:solidFill>
+                <a:latin typeface="Bricolage Grotesque"/>
+              </a:rPr>
+              <a:t>1.  Finir « Comprendre l'IA sans jargon » (hallucinations, contexte)</a:t>
+            </a:r>
+          </a:p>
+        </p:txBody>
+      </p:sp>
+      <p:sp>
+        <p:nvSpPr>
+          <p:cNvPr id="6" name="TextBox 5"/>
+          <p:cNvSpPr txBox="1"/>
+          <p:nvPr/>
+        </p:nvSpPr>
+        <p:spPr>
+          <a:xfrm>
+            <a:off x="640080" y="2075688"/>
+            <a:ext cx="10881360" cy="411480"/>
+          </a:xfrm>
+          <a:prstGeom prst="rect">
+            <a:avLst/>
+          </a:prstGeom>
+          <a:noFill/>
+        </p:spPr>
+        <p:txBody>
+          <a:bodyPr wrap="square">
+            <a:spAutoFit/>
+          </a:bodyPr>
+          <a:lstStyle/>
+          <a:p>
+            <a:r>
+              <a:rPr sz="2000" b="1">
+                <a:solidFill>
+                  <a:srgbClr val="1B5E6B"/>
+                </a:solidFill>
+                <a:latin typeface="Bricolage Grotesque"/>
+              </a:rPr>
+              <a:t>2.  Suivre « Focus Midjourney &amp; Nano Banana »</a:t>
+            </a:r>
+          </a:p>
+        </p:txBody>
+      </p:sp>
+      <p:sp>
+        <p:nvSpPr>
+          <p:cNvPr id="7" name="TextBox 6"/>
+          <p:cNvSpPr txBox="1"/>
+          <p:nvPr/>
+        </p:nvSpPr>
+        <p:spPr>
+          <a:xfrm>
+            <a:off x="640080" y="2596896"/>
+            <a:ext cx="10881360" cy="411480"/>
+          </a:xfrm>
+          <a:prstGeom prst="rect">
+            <a:avLst/>
+          </a:prstGeom>
+          <a:noFill/>
+        </p:spPr>
+        <p:txBody>
+          <a:bodyPr wrap="square">
+            <a:spAutoFit/>
+          </a:bodyPr>
+          <a:lstStyle/>
+          <a:p>
+            <a:r>
+              <a:rPr sz="2000" b="1">
+                <a:solidFill>
+                  <a:srgbClr val="1B5E6B"/>
+                </a:solidFill>
+                <a:latin typeface="Bricolage Grotesque"/>
+              </a:rPr>
+              <a:t>3.  Suivre « Claude : les fondamentaux », compte créé en séance</a:t>
             </a:r>
           </a:p>
         </p:txBody>
@@ -19129,6 +19896,512 @@
                 <a:latin typeface="Bricolage Grotesque"/>
               </a:rPr>
               <a:t>ChatGPT : gardez votre version, tout modèle récent convient.</a:t>
+            </a:r>
+          </a:p>
+        </p:txBody>
+      </p:sp>
+    </p:spTree>
+  </p:cSld>
+  <p:clrMapOvr>
+    <a:masterClrMapping/>
+  </p:clrMapOvr>
+</p:sld>
+</file>
+
+<file path=ppt/slides/slide60.xml><?xml version="1.0" encoding="utf-8"?>
+<p:sld xmlns:a="http://schemas.openxmlformats.org/drawingml/2006/main" xmlns:p="http://schemas.openxmlformats.org/presentationml/2006/main" xmlns:r="http://schemas.openxmlformats.org/officeDocument/2006/relationships">
+  <p:cSld>
+    <p:spTree>
+      <p:nvGrpSpPr>
+        <p:cNvPr id="1" name=""/>
+        <p:cNvGrpSpPr/>
+        <p:nvPr/>
+      </p:nvGrpSpPr>
+      <p:grpSpPr/>
+      <p:sp>
+        <p:nvSpPr>
+          <p:cNvPr id="2" name="Rectangle 1"/>
+          <p:cNvSpPr/>
+          <p:nvPr/>
+        </p:nvSpPr>
+        <p:spPr>
+          <a:xfrm>
+            <a:off x="0" y="0"/>
+            <a:ext cx="12191695" cy="1143000"/>
+          </a:xfrm>
+          <a:prstGeom prst="rect">
+            <a:avLst/>
+          </a:prstGeom>
+          <a:ln>
+            <a:noFill/>
+          </a:ln>
+          <a:gradFill>
+            <a:gsLst>
+              <a:gs pos="0">
+                <a:srgbClr val="0A2530"/>
+              </a:gs>
+              <a:gs pos="100000">
+                <a:srgbClr val="1E5565"/>
+              </a:gs>
+            </a:gsLst>
+            <a:lin ang="0" scaled="1"/>
+          </a:gradFill>
+        </p:spPr>
+        <p:style>
+          <a:lnRef idx="1">
+            <a:schemeClr val="accent1"/>
+          </a:lnRef>
+          <a:fillRef idx="3">
+            <a:schemeClr val="accent1"/>
+          </a:fillRef>
+          <a:effectRef idx="2">
+            <a:schemeClr val="accent1"/>
+          </a:effectRef>
+          <a:fontRef idx="minor">
+            <a:schemeClr val="lt1"/>
+          </a:fontRef>
+        </p:style>
+        <p:txBody>
+          <a:bodyPr rtlCol="0" anchor="ctr"/>
+          <a:lstStyle/>
+          <a:p>
+            <a:pPr algn="ctr"/>
+          </a:p>
+        </p:txBody>
+      </p:sp>
+      <p:sp>
+        <p:nvSpPr>
+          <p:cNvPr id="3" name="Rectangle 2"/>
+          <p:cNvSpPr/>
+          <p:nvPr/>
+        </p:nvSpPr>
+        <p:spPr>
+          <a:xfrm>
+            <a:off x="0" y="1143000"/>
+            <a:ext cx="12191695" cy="18288"/>
+          </a:xfrm>
+          <a:prstGeom prst="rect">
+            <a:avLst/>
+          </a:prstGeom>
+          <a:solidFill>
+            <a:srgbClr val="E8A000"/>
+          </a:solidFill>
+          <a:ln>
+            <a:noFill/>
+          </a:ln>
+        </p:spPr>
+        <p:style>
+          <a:lnRef idx="1">
+            <a:schemeClr val="accent1"/>
+          </a:lnRef>
+          <a:fillRef idx="3">
+            <a:schemeClr val="accent1"/>
+          </a:fillRef>
+          <a:effectRef idx="2">
+            <a:schemeClr val="accent1"/>
+          </a:effectRef>
+          <a:fontRef idx="minor">
+            <a:schemeClr val="lt1"/>
+          </a:fontRef>
+        </p:style>
+        <p:txBody>
+          <a:bodyPr rtlCol="0" anchor="ctr"/>
+          <a:lstStyle/>
+          <a:p>
+            <a:pPr algn="ctr"/>
+          </a:p>
+        </p:txBody>
+      </p:sp>
+      <p:sp>
+        <p:nvSpPr>
+          <p:cNvPr id="4" name="TextBox 3"/>
+          <p:cNvSpPr txBox="1"/>
+          <p:nvPr/>
+        </p:nvSpPr>
+        <p:spPr>
+          <a:xfrm>
+            <a:off x="640080" y="182880"/>
+            <a:ext cx="10515600" cy="822960"/>
+          </a:xfrm>
+          <a:prstGeom prst="rect">
+            <a:avLst/>
+          </a:prstGeom>
+          <a:noFill/>
+        </p:spPr>
+        <p:txBody>
+          <a:bodyPr wrap="square">
+            <a:spAutoFit/>
+          </a:bodyPr>
+          <a:lstStyle/>
+          <a:p>
+            <a:pPr algn="l"/>
+            <a:r>
+              <a:rPr sz="3400" b="1">
+                <a:solidFill>
+                  <a:srgbClr val="FFFFFF"/>
+                </a:solidFill>
+                <a:latin typeface="Bricolage Grotesque"/>
+              </a:rPr>
+              <a:t>Devoirs · avant le 13 octobre</a:t>
+            </a:r>
+          </a:p>
+        </p:txBody>
+      </p:sp>
+      <p:sp>
+        <p:nvSpPr>
+          <p:cNvPr id="5" name="TextBox 4"/>
+          <p:cNvSpPr txBox="1"/>
+          <p:nvPr/>
+        </p:nvSpPr>
+        <p:spPr>
+          <a:xfrm>
+            <a:off x="640080" y="1554480"/>
+            <a:ext cx="10881360" cy="411480"/>
+          </a:xfrm>
+          <a:prstGeom prst="rect">
+            <a:avLst/>
+          </a:prstGeom>
+          <a:noFill/>
+        </p:spPr>
+        <p:txBody>
+          <a:bodyPr wrap="square">
+            <a:spAutoFit/>
+          </a:bodyPr>
+          <a:lstStyle/>
+          <a:p>
+            <a:r>
+              <a:rPr sz="2000" b="1">
+                <a:solidFill>
+                  <a:srgbClr val="1B5E6B"/>
+                </a:solidFill>
+                <a:latin typeface="Bricolage Grotesque"/>
+              </a:rPr>
+              <a:t>1.  Finir « Comprendre l'IA sans jargon » (hallucinations, contexte)</a:t>
+            </a:r>
+          </a:p>
+        </p:txBody>
+      </p:sp>
+      <p:sp>
+        <p:nvSpPr>
+          <p:cNvPr id="6" name="TextBox 5"/>
+          <p:cNvSpPr txBox="1"/>
+          <p:nvPr/>
+        </p:nvSpPr>
+        <p:spPr>
+          <a:xfrm>
+            <a:off x="640080" y="2075688"/>
+            <a:ext cx="10881360" cy="411480"/>
+          </a:xfrm>
+          <a:prstGeom prst="rect">
+            <a:avLst/>
+          </a:prstGeom>
+          <a:noFill/>
+        </p:spPr>
+        <p:txBody>
+          <a:bodyPr wrap="square">
+            <a:spAutoFit/>
+          </a:bodyPr>
+          <a:lstStyle/>
+          <a:p>
+            <a:r>
+              <a:rPr sz="2000" b="1">
+                <a:solidFill>
+                  <a:srgbClr val="1B5E6B"/>
+                </a:solidFill>
+                <a:latin typeface="Bricolage Grotesque"/>
+              </a:rPr>
+              <a:t>2.  Suivre « Focus Midjourney &amp; Nano Banana »</a:t>
+            </a:r>
+          </a:p>
+        </p:txBody>
+      </p:sp>
+      <p:sp>
+        <p:nvSpPr>
+          <p:cNvPr id="7" name="TextBox 6"/>
+          <p:cNvSpPr txBox="1"/>
+          <p:nvPr/>
+        </p:nvSpPr>
+        <p:spPr>
+          <a:xfrm>
+            <a:off x="640080" y="2596896"/>
+            <a:ext cx="10881360" cy="411480"/>
+          </a:xfrm>
+          <a:prstGeom prst="rect">
+            <a:avLst/>
+          </a:prstGeom>
+          <a:noFill/>
+        </p:spPr>
+        <p:txBody>
+          <a:bodyPr wrap="square">
+            <a:spAutoFit/>
+          </a:bodyPr>
+          <a:lstStyle/>
+          <a:p>
+            <a:r>
+              <a:rPr sz="2000" b="1">
+                <a:solidFill>
+                  <a:srgbClr val="1B5E6B"/>
+                </a:solidFill>
+                <a:latin typeface="Bricolage Grotesque"/>
+              </a:rPr>
+              <a:t>3.  Suivre « Claude : les fondamentaux », compte créé en séance</a:t>
+            </a:r>
+          </a:p>
+        </p:txBody>
+      </p:sp>
+      <p:sp>
+        <p:nvSpPr>
+          <p:cNvPr id="8" name="TextBox 7"/>
+          <p:cNvSpPr txBox="1"/>
+          <p:nvPr/>
+        </p:nvSpPr>
+        <p:spPr>
+          <a:xfrm>
+            <a:off x="640080" y="3355848"/>
+            <a:ext cx="10881360" cy="411480"/>
+          </a:xfrm>
+          <a:prstGeom prst="rect">
+            <a:avLst/>
+          </a:prstGeom>
+          <a:noFill/>
+        </p:spPr>
+        <p:txBody>
+          <a:bodyPr wrap="square">
+            <a:spAutoFit/>
+          </a:bodyPr>
+          <a:lstStyle/>
+          <a:p>
+            <a:r>
+              <a:rPr sz="2000" b="1">
+                <a:solidFill>
+                  <a:srgbClr val="1B5E6B"/>
+                </a:solidFill>
+                <a:latin typeface="Bricolage Grotesque"/>
+              </a:rPr>
+              <a:t>4.  Utiliser votre base de contexte sur 3 situations réelles</a:t>
+            </a:r>
+          </a:p>
+        </p:txBody>
+      </p:sp>
+      <p:sp>
+        <p:nvSpPr>
+          <p:cNvPr id="9" name="TextBox 8"/>
+          <p:cNvSpPr txBox="1"/>
+          <p:nvPr/>
+        </p:nvSpPr>
+        <p:spPr>
+          <a:xfrm>
+            <a:off x="640080" y="3877056"/>
+            <a:ext cx="10881360" cy="411480"/>
+          </a:xfrm>
+          <a:prstGeom prst="rect">
+            <a:avLst/>
+          </a:prstGeom>
+          <a:noFill/>
+        </p:spPr>
+        <p:txBody>
+          <a:bodyPr wrap="square">
+            <a:spAutoFit/>
+          </a:bodyPr>
+          <a:lstStyle/>
+          <a:p>
+            <a:r>
+              <a:rPr sz="2000" b="1">
+                <a:solidFill>
+                  <a:srgbClr val="1B5E6B"/>
+                </a:solidFill>
+                <a:latin typeface="Bricolage Grotesque"/>
+              </a:rPr>
+              <a:t>5.  Écrire vos limites d'usage personnelles (5 lignes)</a:t>
+            </a:r>
+          </a:p>
+        </p:txBody>
+      </p:sp>
+      <p:sp>
+        <p:nvSpPr>
+          <p:cNvPr id="10" name="TextBox 9"/>
+          <p:cNvSpPr txBox="1"/>
+          <p:nvPr/>
+        </p:nvSpPr>
+        <p:spPr>
+          <a:xfrm>
+            <a:off x="640080" y="4398264"/>
+            <a:ext cx="10881360" cy="411480"/>
+          </a:xfrm>
+          <a:prstGeom prst="rect">
+            <a:avLst/>
+          </a:prstGeom>
+          <a:noFill/>
+        </p:spPr>
+        <p:txBody>
+          <a:bodyPr wrap="square">
+            <a:spAutoFit/>
+          </a:bodyPr>
+          <a:lstStyle/>
+          <a:p>
+            <a:r>
+              <a:rPr sz="2000" b="1">
+                <a:solidFill>
+                  <a:srgbClr val="1B5E6B"/>
+                </a:solidFill>
+                <a:latin typeface="Bricolage Grotesque"/>
+              </a:rPr>
+              <a:t>6.  M'envoyer le projet visuel, fil rouge de la S2</a:t>
+            </a:r>
+          </a:p>
+        </p:txBody>
+      </p:sp>
+    </p:spTree>
+  </p:cSld>
+  <p:clrMapOvr>
+    <a:masterClrMapping/>
+  </p:clrMapOvr>
+</p:sld>
+</file>
+
+<file path=ppt/slides/slide61.xml><?xml version="1.0" encoding="utf-8"?>
+<p:sld xmlns:a="http://schemas.openxmlformats.org/drawingml/2006/main" xmlns:p="http://schemas.openxmlformats.org/presentationml/2006/main" xmlns:r="http://schemas.openxmlformats.org/officeDocument/2006/relationships">
+  <p:cSld>
+    <p:spTree>
+      <p:nvGrpSpPr>
+        <p:cNvPr id="1" name=""/>
+        <p:cNvGrpSpPr/>
+        <p:nvPr/>
+      </p:nvGrpSpPr>
+      <p:grpSpPr/>
+      <p:sp>
+        <p:nvSpPr>
+          <p:cNvPr id="2" name="Rectangle 1"/>
+          <p:cNvSpPr/>
+          <p:nvPr/>
+        </p:nvSpPr>
+        <p:spPr>
+          <a:xfrm>
+            <a:off x="0" y="0"/>
+            <a:ext cx="12191695" cy="6858000"/>
+          </a:xfrm>
+          <a:prstGeom prst="rect">
+            <a:avLst/>
+          </a:prstGeom>
+          <a:solidFill>
+            <a:srgbClr val="000000"/>
+          </a:solidFill>
+          <a:ln>
+            <a:noFill/>
+          </a:ln>
+        </p:spPr>
+        <p:style>
+          <a:lnRef idx="1">
+            <a:schemeClr val="accent1"/>
+          </a:lnRef>
+          <a:fillRef idx="3">
+            <a:schemeClr val="accent1"/>
+          </a:fillRef>
+          <a:effectRef idx="2">
+            <a:schemeClr val="accent1"/>
+          </a:effectRef>
+          <a:fontRef idx="minor">
+            <a:schemeClr val="lt1"/>
+          </a:fontRef>
+        </p:style>
+        <p:txBody>
+          <a:bodyPr rtlCol="0" anchor="ctr"/>
+          <a:lstStyle/>
+          <a:p>
+            <a:pPr algn="ctr"/>
+          </a:p>
+        </p:txBody>
+      </p:sp>
+      <p:sp>
+        <p:nvSpPr>
+          <p:cNvPr id="3" name="TextBox 2"/>
+          <p:cNvSpPr txBox="1"/>
+          <p:nvPr/>
+        </p:nvSpPr>
+        <p:spPr>
+          <a:xfrm>
+            <a:off x="0" y="2560320"/>
+            <a:ext cx="12191695" cy="1828800"/>
+          </a:xfrm>
+          <a:prstGeom prst="rect">
+            <a:avLst/>
+          </a:prstGeom>
+          <a:noFill/>
+        </p:spPr>
+        <p:txBody>
+          <a:bodyPr wrap="square">
+            <a:spAutoFit/>
+          </a:bodyPr>
+          <a:lstStyle/>
+          <a:p>
+            <a:pPr algn="ctr"/>
+            <a:r>
+              <a:rPr sz="6400" b="1">
+                <a:solidFill>
+                  <a:srgbClr val="FFFFFF"/>
+                </a:solidFill>
+                <a:latin typeface="Bricolage Grotesque"/>
+              </a:rPr>
+              <a:t>Des questions ?</a:t>
+            </a:r>
+          </a:p>
+        </p:txBody>
+      </p:sp>
+      <p:pic>
+        <p:nvPicPr>
+          <p:cNvPr id="4" name="Picture 3" descr="ia-round.png"/>
+          <p:cNvPicPr>
+            <a:picLocks noChangeAspect="1"/>
+          </p:cNvPicPr>
+          <p:nvPr/>
+        </p:nvPicPr>
+        <p:blipFill>
+          <a:blip r:embed="rId2"/>
+          <a:stretch>
+            <a:fillRect/>
+          </a:stretch>
+        </p:blipFill>
+        <p:spPr>
+          <a:xfrm>
+            <a:off x="4846320" y="4754880"/>
+            <a:ext cx="320040" cy="320040"/>
+          </a:xfrm>
+          <a:prstGeom prst="rect">
+            <a:avLst/>
+          </a:prstGeom>
+        </p:spPr>
+      </p:pic>
+      <p:sp>
+        <p:nvSpPr>
+          <p:cNvPr id="5" name="TextBox 4"/>
+          <p:cNvSpPr txBox="1"/>
+          <p:nvPr/>
+        </p:nvSpPr>
+        <p:spPr>
+          <a:xfrm>
+            <a:off x="5257800" y="4736592"/>
+            <a:ext cx="3657600" cy="365760"/>
+          </a:xfrm>
+          <a:prstGeom prst="rect">
+            <a:avLst/>
+          </a:prstGeom>
+          <a:noFill/>
+        </p:spPr>
+        <p:txBody>
+          <a:bodyPr wrap="square">
+            <a:spAutoFit/>
+          </a:bodyPr>
+          <a:lstStyle/>
+          <a:p>
+            <a:pPr algn="l"/>
+            <a:r>
+              <a:rPr sz="1400" b="0">
+                <a:solidFill>
+                  <a:srgbClr val="FFFFFF"/>
+                </a:solidFill>
+                <a:latin typeface="Bricolage Grotesque"/>
+              </a:rPr>
+              <a:t>intelligence academy</a:t>
             </a:r>
           </a:p>
         </p:txBody>
